--- a/morning-registration-activities/open-evening-questions/downloads/Open_Evening_Questions_Year_10_and_11.pptx
+++ b/morning-registration-activities/open-evening-questions/downloads/Open_Evening_Questions_Year_10_and_11.pptx
@@ -3314,7 +3314,7 @@
                 </a:solidFill>
                 <a:latin typeface="Karla"/>
               </a:rPr>
-              <a:t>Open evening questions, one kind a morning, and a sheet to take with you.</a:t>
+              <a:t>A week of practice, and a list of questions to take with you.</a:t>
             </a:r>
           </a:p>
         </p:txBody>
@@ -3327,8 +3327,8 @@
         </p:nvSpPr>
         <p:spPr>
           <a:xfrm>
-            <a:off x="685800" y="1883664"/>
-            <a:ext cx="2395728" cy="2066543"/>
+            <a:off x="685800" y="1901952"/>
+            <a:ext cx="1364284" cy="2103120"/>
           </a:xfrm>
           <a:prstGeom prst="rect">
             <a:avLst/>
@@ -3365,82 +3365,14 @@
       </p:sp>
       <p:sp>
         <p:nvSpPr>
-          <p:cNvPr id="8" name="Oval 7"/>
-          <p:cNvSpPr/>
-          <p:nvPr/>
-        </p:nvSpPr>
-        <p:spPr>
-          <a:xfrm>
-            <a:off x="1554480" y="2029968"/>
-            <a:ext cx="658368" cy="658368"/>
-          </a:xfrm>
-          <a:prstGeom prst="ellipse">
-            <a:avLst/>
-          </a:prstGeom>
-          <a:solidFill>
-            <a:srgbClr val="4A7331"/>
-          </a:solidFill>
-          <a:ln>
-            <a:noFill/>
-          </a:ln>
-          <a:effectLst/>
-        </p:spPr>
-        <p:style>
-          <a:lnRef idx="1">
-            <a:schemeClr val="accent1"/>
-          </a:lnRef>
-          <a:fillRef idx="3">
-            <a:schemeClr val="accent1"/>
-          </a:fillRef>
-          <a:effectRef idx="2">
-            <a:schemeClr val="accent1"/>
-          </a:effectRef>
-          <a:fontRef idx="minor">
-            <a:schemeClr val="lt1"/>
-          </a:fontRef>
-        </p:style>
-        <p:txBody>
-          <a:bodyPr rtlCol="0" anchor="ctr"/>
-          <a:lstStyle/>
-          <a:p>
-            <a:pPr algn="ctr"/>
-          </a:p>
-        </p:txBody>
-      </p:sp>
-      <p:pic>
-        <p:nvPicPr>
-          <p:cNvPr id="9" name="Picture 8" descr="askbubble.png"/>
-          <p:cNvPicPr>
-            <a:picLocks noChangeAspect="1"/>
-          </p:cNvPicPr>
-          <p:nvPr/>
-        </p:nvPicPr>
-        <p:blipFill>
-          <a:blip r:embed="rId2"/>
-          <a:stretch>
-            <a:fillRect/>
-          </a:stretch>
-        </p:blipFill>
-        <p:spPr>
-          <a:xfrm>
-            <a:off x="1691640" y="2167128"/>
-            <a:ext cx="384048" cy="384048"/>
-          </a:xfrm>
-          <a:prstGeom prst="rect">
-            <a:avLst/>
-          </a:prstGeom>
-        </p:spPr>
-      </p:pic>
-      <p:sp>
-        <p:nvSpPr>
-          <p:cNvPr id="10" name="TextBox 9"/>
+          <p:cNvPr id="8" name="TextBox 7"/>
           <p:cNvSpPr txBox="1"/>
           <p:nvPr/>
         </p:nvSpPr>
         <p:spPr>
           <a:xfrm>
-            <a:off x="813816" y="2798064"/>
-            <a:ext cx="2139696" cy="475488"/>
+            <a:off x="685800" y="2121408"/>
+            <a:ext cx="1364284" cy="256032"/>
           </a:xfrm>
           <a:prstGeom prst="rect">
             <a:avLst/>
@@ -3462,17 +3394,85 @@
               </a:spcAft>
             </a:pPr>
             <a:r>
-              <a:rPr sz="1350" b="1" i="0">
-                <a:solidFill>
-                  <a:srgbClr val="4A7331"/>
-                </a:solidFill>
-                <a:latin typeface="Libre Caslon Display"/>
-              </a:rPr>
-              <a:t>One kind of question a morning</a:t>
-            </a:r>
-          </a:p>
-        </p:txBody>
-      </p:sp>
+              <a:rPr sz="1150" b="1" i="0" spc="140">
+                <a:solidFill>
+                  <a:srgbClr val="7BA060"/>
+                </a:solidFill>
+                <a:latin typeface="Karla"/>
+              </a:rPr>
+              <a:t>MON</a:t>
+            </a:r>
+          </a:p>
+        </p:txBody>
+      </p:sp>
+      <p:sp>
+        <p:nvSpPr>
+          <p:cNvPr id="9" name="Oval 8"/>
+          <p:cNvSpPr/>
+          <p:nvPr/>
+        </p:nvSpPr>
+        <p:spPr>
+          <a:xfrm>
+            <a:off x="956462" y="2478024"/>
+            <a:ext cx="822960" cy="822960"/>
+          </a:xfrm>
+          <a:prstGeom prst="ellipse">
+            <a:avLst/>
+          </a:prstGeom>
+          <a:solidFill>
+            <a:srgbClr val="4A7331"/>
+          </a:solidFill>
+          <a:ln>
+            <a:noFill/>
+          </a:ln>
+          <a:effectLst/>
+        </p:spPr>
+        <p:style>
+          <a:lnRef idx="1">
+            <a:schemeClr val="accent1"/>
+          </a:lnRef>
+          <a:fillRef idx="3">
+            <a:schemeClr val="accent1"/>
+          </a:fillRef>
+          <a:effectRef idx="2">
+            <a:schemeClr val="accent1"/>
+          </a:effectRef>
+          <a:fontRef idx="minor">
+            <a:schemeClr val="lt1"/>
+          </a:fontRef>
+        </p:style>
+        <p:txBody>
+          <a:bodyPr rtlCol="0" anchor="ctr"/>
+          <a:lstStyle/>
+          <a:p>
+            <a:pPr algn="ctr"/>
+          </a:p>
+        </p:txBody>
+      </p:sp>
+      <p:pic>
+        <p:nvPicPr>
+          <p:cNvPr id="10" name="Picture 9" descr="rank.png"/>
+          <p:cNvPicPr>
+            <a:picLocks noChangeAspect="1"/>
+          </p:cNvPicPr>
+          <p:nvPr/>
+        </p:nvPicPr>
+        <p:blipFill>
+          <a:blip r:embed="rId2"/>
+          <a:stretch>
+            <a:fillRect/>
+          </a:stretch>
+        </p:blipFill>
+        <p:spPr>
+          <a:xfrm>
+            <a:off x="1130198" y="2651760"/>
+            <a:ext cx="475488" cy="475488"/>
+          </a:xfrm>
+          <a:prstGeom prst="rect">
+            <a:avLst/>
+          </a:prstGeom>
+        </p:spPr>
+      </p:pic>
       <p:sp>
         <p:nvSpPr>
           <p:cNvPr id="11" name="TextBox 10"/>
@@ -3481,8 +3481,8 @@
         </p:nvSpPr>
         <p:spPr>
           <a:xfrm>
-            <a:off x="850392" y="3291840"/>
-            <a:ext cx="2066544" cy="548639"/>
+            <a:off x="813816" y="3456432"/>
+            <a:ext cx="1108252" cy="786384"/>
           </a:xfrm>
           <a:prstGeom prst="rect">
             <a:avLst/>
@@ -3504,13 +3504,13 @@
               </a:spcAft>
             </a:pPr>
             <a:r>
-              <a:rPr sz="1050" b="0" i="0">
-                <a:solidFill>
-                  <a:srgbClr val="5C6552"/>
-                </a:solidFill>
-                <a:latin typeface="Karla"/>
-              </a:rPr>
-              <a:t>The course, the day, the people, the money, and what could go wrong.</a:t>
+              <a:rPr sz="1350" b="1" i="0">
+                <a:solidFill>
+                  <a:srgbClr val="4A7331"/>
+                </a:solidFill>
+                <a:latin typeface="Libre Caslon Display"/>
+              </a:rPr>
+              <a:t>Rank them</a:t>
             </a:r>
           </a:p>
         </p:txBody>
@@ -3523,8 +3523,8 @@
         </p:nvSpPr>
         <p:spPr>
           <a:xfrm>
-            <a:off x="3374136" y="1883664"/>
-            <a:ext cx="2395728" cy="2066543"/>
+            <a:off x="2287828" y="1901952"/>
+            <a:ext cx="1364284" cy="2103120"/>
           </a:xfrm>
           <a:prstGeom prst="rect">
             <a:avLst/>
@@ -3561,82 +3561,14 @@
       </p:sp>
       <p:sp>
         <p:nvSpPr>
-          <p:cNvPr id="13" name="Oval 12"/>
-          <p:cNvSpPr/>
-          <p:nvPr/>
-        </p:nvSpPr>
-        <p:spPr>
-          <a:xfrm>
-            <a:off x="4242816" y="2029968"/>
-            <a:ext cx="658368" cy="658368"/>
-          </a:xfrm>
-          <a:prstGeom prst="ellipse">
-            <a:avLst/>
-          </a:prstGeom>
-          <a:solidFill>
-            <a:srgbClr val="4A7331"/>
-          </a:solidFill>
-          <a:ln>
-            <a:noFill/>
-          </a:ln>
-          <a:effectLst/>
-        </p:spPr>
-        <p:style>
-          <a:lnRef idx="1">
-            <a:schemeClr val="accent1"/>
-          </a:lnRef>
-          <a:fillRef idx="3">
-            <a:schemeClr val="accent1"/>
-          </a:fillRef>
-          <a:effectRef idx="2">
-            <a:schemeClr val="accent1"/>
-          </a:effectRef>
-          <a:fontRef idx="minor">
-            <a:schemeClr val="lt1"/>
-          </a:fontRef>
-        </p:style>
-        <p:txBody>
-          <a:bodyPr rtlCol="0" anchor="ctr"/>
-          <a:lstStyle/>
-          <a:p>
-            <a:pPr algn="ctr"/>
-          </a:p>
-        </p:txBody>
-      </p:sp>
-      <p:pic>
-        <p:nvPicPr>
-          <p:cNvPr id="14" name="Picture 13" descr="twopeople.png"/>
-          <p:cNvPicPr>
-            <a:picLocks noChangeAspect="1"/>
-          </p:cNvPicPr>
-          <p:nvPr/>
-        </p:nvPicPr>
-        <p:blipFill>
-          <a:blip r:embed="rId3"/>
-          <a:stretch>
-            <a:fillRect/>
-          </a:stretch>
-        </p:blipFill>
-        <p:spPr>
-          <a:xfrm>
-            <a:off x="4379976" y="2167128"/>
-            <a:ext cx="384048" cy="384048"/>
-          </a:xfrm>
-          <a:prstGeom prst="rect">
-            <a:avLst/>
-          </a:prstGeom>
-        </p:spPr>
-      </p:pic>
-      <p:sp>
-        <p:nvSpPr>
-          <p:cNvPr id="15" name="TextBox 14"/>
+          <p:cNvPr id="13" name="TextBox 12"/>
           <p:cNvSpPr txBox="1"/>
           <p:nvPr/>
         </p:nvSpPr>
         <p:spPr>
           <a:xfrm>
-            <a:off x="3502152" y="2798064"/>
-            <a:ext cx="2139696" cy="475488"/>
+            <a:off x="2287828" y="2121408"/>
+            <a:ext cx="1364284" cy="256032"/>
           </a:xfrm>
           <a:prstGeom prst="rect">
             <a:avLst/>
@@ -3658,17 +3590,85 @@
               </a:spcAft>
             </a:pPr>
             <a:r>
-              <a:rPr sz="1350" b="1" i="0">
-                <a:solidFill>
-                  <a:srgbClr val="4A7331"/>
-                </a:solidFill>
-                <a:latin typeface="Libre Caslon Display"/>
-              </a:rPr>
-              <a:t>The form adds its own</a:t>
-            </a:r>
-          </a:p>
-        </p:txBody>
-      </p:sp>
+              <a:rPr sz="1150" b="1" i="0" spc="140">
+                <a:solidFill>
+                  <a:srgbClr val="7BA060"/>
+                </a:solidFill>
+                <a:latin typeface="Karla"/>
+              </a:rPr>
+              <a:t>TUE</a:t>
+            </a:r>
+          </a:p>
+        </p:txBody>
+      </p:sp>
+      <p:sp>
+        <p:nvSpPr>
+          <p:cNvPr id="14" name="Oval 13"/>
+          <p:cNvSpPr/>
+          <p:nvPr/>
+        </p:nvSpPr>
+        <p:spPr>
+          <a:xfrm>
+            <a:off x="2558491" y="2478024"/>
+            <a:ext cx="822960" cy="822960"/>
+          </a:xfrm>
+          <a:prstGeom prst="ellipse">
+            <a:avLst/>
+          </a:prstGeom>
+          <a:solidFill>
+            <a:srgbClr val="4A7331"/>
+          </a:solidFill>
+          <a:ln>
+            <a:noFill/>
+          </a:ln>
+          <a:effectLst/>
+        </p:spPr>
+        <p:style>
+          <a:lnRef idx="1">
+            <a:schemeClr val="accent1"/>
+          </a:lnRef>
+          <a:fillRef idx="3">
+            <a:schemeClr val="accent1"/>
+          </a:fillRef>
+          <a:effectRef idx="2">
+            <a:schemeClr val="accent1"/>
+          </a:effectRef>
+          <a:fontRef idx="minor">
+            <a:schemeClr val="lt1"/>
+          </a:fontRef>
+        </p:style>
+        <p:txBody>
+          <a:bodyPr rtlCol="0" anchor="ctr"/>
+          <a:lstStyle/>
+          <a:p>
+            <a:pPr algn="ctr"/>
+          </a:p>
+        </p:txBody>
+      </p:sp>
+      <p:pic>
+        <p:nvPicPr>
+          <p:cNvPr id="15" name="Picture 14" descr="rank.png"/>
+          <p:cNvPicPr>
+            <a:picLocks noChangeAspect="1"/>
+          </p:cNvPicPr>
+          <p:nvPr/>
+        </p:nvPicPr>
+        <p:blipFill>
+          <a:blip r:embed="rId2"/>
+          <a:stretch>
+            <a:fillRect/>
+          </a:stretch>
+        </p:blipFill>
+        <p:spPr>
+          <a:xfrm>
+            <a:off x="2732227" y="2651760"/>
+            <a:ext cx="475488" cy="475488"/>
+          </a:xfrm>
+          <a:prstGeom prst="rect">
+            <a:avLst/>
+          </a:prstGeom>
+        </p:spPr>
+      </p:pic>
       <p:sp>
         <p:nvSpPr>
           <p:cNvPr id="16" name="TextBox 15"/>
@@ -3677,8 +3677,8 @@
         </p:nvSpPr>
         <p:spPr>
           <a:xfrm>
-            <a:off x="3538728" y="3291840"/>
-            <a:ext cx="2066544" cy="548639"/>
+            <a:off x="2415844" y="3456432"/>
+            <a:ext cx="1108252" cy="786384"/>
           </a:xfrm>
           <a:prstGeom prst="rect">
             <a:avLst/>
@@ -3700,13 +3700,13 @@
               </a:spcAft>
             </a:pPr>
             <a:r>
-              <a:rPr sz="1050" b="0" i="0">
-                <a:solidFill>
-                  <a:srgbClr val="5C6552"/>
-                </a:solidFill>
-                <a:latin typeface="Karla"/>
-              </a:rPr>
-              <a:t>Two or three from the room go on the board and onto the sheet.</a:t>
+              <a:rPr sz="1350" b="1" i="0">
+                <a:solidFill>
+                  <a:srgbClr val="4A7331"/>
+                </a:solidFill>
+                <a:latin typeface="Libre Caslon Display"/>
+              </a:rPr>
+              <a:t>Rank them</a:t>
             </a:r>
           </a:p>
         </p:txBody>
@@ -3719,8 +3719,8 @@
         </p:nvSpPr>
         <p:spPr>
           <a:xfrm>
-            <a:off x="6062472" y="1883664"/>
-            <a:ext cx="2395728" cy="2066543"/>
+            <a:off x="3889857" y="1901952"/>
+            <a:ext cx="1364284" cy="2103120"/>
           </a:xfrm>
           <a:prstGeom prst="rect">
             <a:avLst/>
@@ -3757,82 +3757,14 @@
       </p:sp>
       <p:sp>
         <p:nvSpPr>
-          <p:cNvPr id="18" name="Oval 17"/>
-          <p:cNvSpPr/>
-          <p:nvPr/>
-        </p:nvSpPr>
-        <p:spPr>
-          <a:xfrm>
-            <a:off x="6931151" y="2029968"/>
-            <a:ext cx="658368" cy="658368"/>
-          </a:xfrm>
-          <a:prstGeom prst="ellipse">
-            <a:avLst/>
-          </a:prstGeom>
-          <a:solidFill>
-            <a:srgbClr val="4A7331"/>
-          </a:solidFill>
-          <a:ln>
-            <a:noFill/>
-          </a:ln>
-          <a:effectLst/>
-        </p:spPr>
-        <p:style>
-          <a:lnRef idx="1">
-            <a:schemeClr val="accent1"/>
-          </a:lnRef>
-          <a:fillRef idx="3">
-            <a:schemeClr val="accent1"/>
-          </a:fillRef>
-          <a:effectRef idx="2">
-            <a:schemeClr val="accent1"/>
-          </a:effectRef>
-          <a:fontRef idx="minor">
-            <a:schemeClr val="lt1"/>
-          </a:fontRef>
-        </p:style>
-        <p:txBody>
-          <a:bodyPr rtlCol="0" anchor="ctr"/>
-          <a:lstStyle/>
-          <a:p>
-            <a:pPr algn="ctr"/>
-          </a:p>
-        </p:txBody>
-      </p:sp>
-      <p:pic>
-        <p:nvPicPr>
-          <p:cNvPr id="19" name="Picture 18" descr="cards.png"/>
-          <p:cNvPicPr>
-            <a:picLocks noChangeAspect="1"/>
-          </p:cNvPicPr>
-          <p:nvPr/>
-        </p:nvPicPr>
-        <p:blipFill>
-          <a:blip r:embed="rId4"/>
-          <a:stretch>
-            <a:fillRect/>
-          </a:stretch>
-        </p:blipFill>
-        <p:spPr>
-          <a:xfrm>
-            <a:off x="7068312" y="2167128"/>
-            <a:ext cx="384048" cy="384048"/>
-          </a:xfrm>
-          <a:prstGeom prst="rect">
-            <a:avLst/>
-          </a:prstGeom>
-        </p:spPr>
-      </p:pic>
-      <p:sp>
-        <p:nvSpPr>
-          <p:cNvPr id="20" name="TextBox 19"/>
+          <p:cNvPr id="18" name="TextBox 17"/>
           <p:cNvSpPr txBox="1"/>
           <p:nvPr/>
         </p:nvSpPr>
         <p:spPr>
           <a:xfrm>
-            <a:off x="6190488" y="2798064"/>
-            <a:ext cx="2139696" cy="475488"/>
+            <a:off x="3889857" y="2121408"/>
+            <a:ext cx="1364284" cy="256032"/>
           </a:xfrm>
           <a:prstGeom prst="rect">
             <a:avLst/>
@@ -3854,17 +3786,85 @@
               </a:spcAft>
             </a:pPr>
             <a:r>
-              <a:rPr sz="1350" b="1" i="0">
-                <a:solidFill>
-                  <a:srgbClr val="4A7331"/>
-                </a:solidFill>
-                <a:latin typeface="Libre Caslon Display"/>
-              </a:rPr>
-              <a:t>The sheet goes in the bag</a:t>
-            </a:r>
-          </a:p>
-        </p:txBody>
-      </p:sp>
+              <a:rPr sz="1150" b="1" i="0" spc="140">
+                <a:solidFill>
+                  <a:srgbClr val="7BA060"/>
+                </a:solidFill>
+                <a:latin typeface="Karla"/>
+              </a:rPr>
+              <a:t>WED</a:t>
+            </a:r>
+          </a:p>
+        </p:txBody>
+      </p:sp>
+      <p:sp>
+        <p:nvSpPr>
+          <p:cNvPr id="19" name="Oval 18"/>
+          <p:cNvSpPr/>
+          <p:nvPr/>
+        </p:nvSpPr>
+        <p:spPr>
+          <a:xfrm>
+            <a:off x="4160520" y="2478024"/>
+            <a:ext cx="822960" cy="822960"/>
+          </a:xfrm>
+          <a:prstGeom prst="ellipse">
+            <a:avLst/>
+          </a:prstGeom>
+          <a:solidFill>
+            <a:srgbClr val="4A7331"/>
+          </a:solidFill>
+          <a:ln>
+            <a:noFill/>
+          </a:ln>
+          <a:effectLst/>
+        </p:spPr>
+        <p:style>
+          <a:lnRef idx="1">
+            <a:schemeClr val="accent1"/>
+          </a:lnRef>
+          <a:fillRef idx="3">
+            <a:schemeClr val="accent1"/>
+          </a:fillRef>
+          <a:effectRef idx="2">
+            <a:schemeClr val="accent1"/>
+          </a:effectRef>
+          <a:fontRef idx="minor">
+            <a:schemeClr val="lt1"/>
+          </a:fontRef>
+        </p:style>
+        <p:txBody>
+          <a:bodyPr rtlCol="0" anchor="ctr"/>
+          <a:lstStyle/>
+          <a:p>
+            <a:pPr algn="ctr"/>
+          </a:p>
+        </p:txBody>
+      </p:sp>
+      <p:pic>
+        <p:nvPicPr>
+          <p:cNvPr id="20" name="Picture 19" descr="asktwice.png"/>
+          <p:cNvPicPr>
+            <a:picLocks noChangeAspect="1"/>
+          </p:cNvPicPr>
+          <p:nvPr/>
+        </p:nvPicPr>
+        <p:blipFill>
+          <a:blip r:embed="rId3"/>
+          <a:stretch>
+            <a:fillRect/>
+          </a:stretch>
+        </p:blipFill>
+        <p:spPr>
+          <a:xfrm>
+            <a:off x="4334256" y="2651760"/>
+            <a:ext cx="475488" cy="475488"/>
+          </a:xfrm>
+          <a:prstGeom prst="rect">
+            <a:avLst/>
+          </a:prstGeom>
+        </p:spPr>
+      </p:pic>
       <p:sp>
         <p:nvSpPr>
           <p:cNvPr id="21" name="TextBox 20"/>
@@ -3873,8 +3873,8 @@
         </p:nvSpPr>
         <p:spPr>
           <a:xfrm>
-            <a:off x="6227064" y="3291840"/>
-            <a:ext cx="2066544" cy="548639"/>
+            <a:off x="4017873" y="3456432"/>
+            <a:ext cx="1108252" cy="786384"/>
           </a:xfrm>
           <a:prstGeom prst="rect">
             <a:avLst/>
@@ -3896,27 +3896,71 @@
               </a:spcAft>
             </a:pPr>
             <a:r>
-              <a:rPr sz="1050" b="0" i="0">
-                <a:solidFill>
-                  <a:srgbClr val="5C6552"/>
-                </a:solidFill>
-                <a:latin typeface="Karla"/>
-              </a:rPr>
-              <a:t>Fifteen questions, the form’s own underneath, and a line for each answer.</a:t>
-            </a:r>
-          </a:p>
-        </p:txBody>
-      </p:sp>
-      <p:sp>
-        <p:nvSpPr>
-          <p:cNvPr id="22" name="TextBox 21"/>
+              <a:rPr sz="1350" b="1" i="0">
+                <a:solidFill>
+                  <a:srgbClr val="4A7331"/>
+                </a:solidFill>
+                <a:latin typeface="Libre Caslon Display"/>
+              </a:rPr>
+              <a:t>Ask it for real</a:t>
+            </a:r>
+          </a:p>
+        </p:txBody>
+      </p:sp>
+      <p:sp>
+        <p:nvSpPr>
+          <p:cNvPr id="22" name="Rectangle 21"/>
+          <p:cNvSpPr/>
+          <p:nvPr/>
+        </p:nvSpPr>
+        <p:spPr>
+          <a:xfrm>
+            <a:off x="5491886" y="1901952"/>
+            <a:ext cx="1364284" cy="2103120"/>
+          </a:xfrm>
+          <a:prstGeom prst="rect">
+            <a:avLst/>
+          </a:prstGeom>
+          <a:solidFill>
+            <a:srgbClr val="FFFDF7"/>
+          </a:solidFill>
+          <a:ln>
+            <a:noFill/>
+          </a:ln>
+          <a:effectLst/>
+        </p:spPr>
+        <p:style>
+          <a:lnRef idx="1">
+            <a:schemeClr val="accent1"/>
+          </a:lnRef>
+          <a:fillRef idx="3">
+            <a:schemeClr val="accent1"/>
+          </a:fillRef>
+          <a:effectRef idx="2">
+            <a:schemeClr val="accent1"/>
+          </a:effectRef>
+          <a:fontRef idx="minor">
+            <a:schemeClr val="lt1"/>
+          </a:fontRef>
+        </p:style>
+        <p:txBody>
+          <a:bodyPr rtlCol="0" anchor="ctr"/>
+          <a:lstStyle/>
+          <a:p>
+            <a:pPr algn="ctr"/>
+          </a:p>
+        </p:txBody>
+      </p:sp>
+      <p:sp>
+        <p:nvSpPr>
+          <p:cNvPr id="23" name="TextBox 22"/>
           <p:cNvSpPr txBox="1"/>
           <p:nvPr/>
         </p:nvSpPr>
         <p:spPr>
           <a:xfrm>
-            <a:off x="685800" y="4023360"/>
-            <a:ext cx="7772400" cy="310896"/>
+            <a:off x="5491886" y="2121408"/>
+            <a:ext cx="1364284" cy="256032"/>
           </a:xfrm>
           <a:prstGeom prst="rect">
             <a:avLst/>
@@ -3938,20 +3982,260 @@
               </a:spcAft>
             </a:pPr>
             <a:r>
-              <a:rPr sz="1050" b="0" i="0">
-                <a:solidFill>
-                  <a:srgbClr val="8B9179"/>
+              <a:rPr sz="1150" b="1" i="0" spc="140">
+                <a:solidFill>
+                  <a:srgbClr val="7BA060"/>
                 </a:solidFill>
                 <a:latin typeface="Karla"/>
               </a:rPr>
-              <a:t>Needs: the open evening sheet from the resource pack, one per student, and a pen.</a:t>
-            </a:r>
+              <a:t>THU</a:t>
+            </a:r>
+          </a:p>
+        </p:txBody>
+      </p:sp>
+      <p:sp>
+        <p:nvSpPr>
+          <p:cNvPr id="24" name="Oval 23"/>
+          <p:cNvSpPr/>
+          <p:nvPr/>
+        </p:nvSpPr>
+        <p:spPr>
+          <a:xfrm>
+            <a:off x="5762548" y="2478024"/>
+            <a:ext cx="822960" cy="822960"/>
+          </a:xfrm>
+          <a:prstGeom prst="ellipse">
+            <a:avLst/>
+          </a:prstGeom>
+          <a:solidFill>
+            <a:srgbClr val="4A7331"/>
+          </a:solidFill>
+          <a:ln>
+            <a:noFill/>
+          </a:ln>
+          <a:effectLst/>
+        </p:spPr>
+        <p:style>
+          <a:lnRef idx="1">
+            <a:schemeClr val="accent1"/>
+          </a:lnRef>
+          <a:fillRef idx="3">
+            <a:schemeClr val="accent1"/>
+          </a:fillRef>
+          <a:effectRef idx="2">
+            <a:schemeClr val="accent1"/>
+          </a:effectRef>
+          <a:fontRef idx="minor">
+            <a:schemeClr val="lt1"/>
+          </a:fontRef>
+        </p:style>
+        <p:txBody>
+          <a:bodyPr rtlCol="0" anchor="ctr"/>
+          <a:lstStyle/>
+          <a:p>
+            <a:pPr algn="ctr"/>
           </a:p>
         </p:txBody>
       </p:sp>
       <p:pic>
         <p:nvPicPr>
-          <p:cNvPr id="23" name="Picture 22" descr="logo-mark.png"/>
+          <p:cNvPr id="25" name="Picture 24" descr="stall.png"/>
+          <p:cNvPicPr>
+            <a:picLocks noChangeAspect="1"/>
+          </p:cNvPicPr>
+          <p:nvPr/>
+        </p:nvPicPr>
+        <p:blipFill>
+          <a:blip r:embed="rId4"/>
+          <a:stretch>
+            <a:fillRect/>
+          </a:stretch>
+        </p:blipFill>
+        <p:spPr>
+          <a:xfrm>
+            <a:off x="5936284" y="2651760"/>
+            <a:ext cx="475488" cy="475488"/>
+          </a:xfrm>
+          <a:prstGeom prst="rect">
+            <a:avLst/>
+          </a:prstGeom>
+        </p:spPr>
+      </p:pic>
+      <p:sp>
+        <p:nvSpPr>
+          <p:cNvPr id="26" name="TextBox 25"/>
+          <p:cNvSpPr txBox="1"/>
+          <p:nvPr/>
+        </p:nvSpPr>
+        <p:spPr>
+          <a:xfrm>
+            <a:off x="5619902" y="3456432"/>
+            <a:ext cx="1108252" cy="786384"/>
+          </a:xfrm>
+          <a:prstGeom prst="rect">
+            <a:avLst/>
+          </a:prstGeom>
+          <a:noFill/>
+        </p:spPr>
+        <p:txBody>
+          <a:bodyPr wrap="square" anchor="t" lIns="0" rIns="0" tIns="0" bIns="0">
+            <a:spAutoFit/>
+          </a:bodyPr>
+          <a:lstStyle/>
+          <a:p>
+            <a:pPr algn="ctr">
+              <a:lnSpc>
+                <a:spcPct val="125000"/>
+              </a:lnSpc>
+              <a:spcAft>
+                <a:spcPts val="0"/>
+              </a:spcAft>
+            </a:pPr>
+            <a:r>
+              <a:rPr sz="1350" b="1" i="0">
+                <a:solidFill>
+                  <a:srgbClr val="4A7331"/>
+                </a:solidFill>
+                <a:latin typeface="Libre Caslon Display"/>
+              </a:rPr>
+              <a:t>Set up</a:t>
+            </a:r>
+          </a:p>
+        </p:txBody>
+      </p:sp>
+      <p:sp>
+        <p:nvSpPr>
+          <p:cNvPr id="27" name="Rectangle 26"/>
+          <p:cNvSpPr/>
+          <p:nvPr/>
+        </p:nvSpPr>
+        <p:spPr>
+          <a:xfrm>
+            <a:off x="7093915" y="1901952"/>
+            <a:ext cx="1364284" cy="2103120"/>
+          </a:xfrm>
+          <a:prstGeom prst="rect">
+            <a:avLst/>
+          </a:prstGeom>
+          <a:solidFill>
+            <a:srgbClr val="FFFDF7"/>
+          </a:solidFill>
+          <a:ln>
+            <a:noFill/>
+          </a:ln>
+          <a:effectLst/>
+        </p:spPr>
+        <p:style>
+          <a:lnRef idx="1">
+            <a:schemeClr val="accent1"/>
+          </a:lnRef>
+          <a:fillRef idx="3">
+            <a:schemeClr val="accent1"/>
+          </a:fillRef>
+          <a:effectRef idx="2">
+            <a:schemeClr val="accent1"/>
+          </a:effectRef>
+          <a:fontRef idx="minor">
+            <a:schemeClr val="lt1"/>
+          </a:fontRef>
+        </p:style>
+        <p:txBody>
+          <a:bodyPr rtlCol="0" anchor="ctr"/>
+          <a:lstStyle/>
+          <a:p>
+            <a:pPr algn="ctr"/>
+          </a:p>
+        </p:txBody>
+      </p:sp>
+      <p:sp>
+        <p:nvSpPr>
+          <p:cNvPr id="28" name="TextBox 27"/>
+          <p:cNvSpPr txBox="1"/>
+          <p:nvPr/>
+        </p:nvSpPr>
+        <p:spPr>
+          <a:xfrm>
+            <a:off x="7093915" y="2121408"/>
+            <a:ext cx="1364284" cy="256032"/>
+          </a:xfrm>
+          <a:prstGeom prst="rect">
+            <a:avLst/>
+          </a:prstGeom>
+          <a:noFill/>
+        </p:spPr>
+        <p:txBody>
+          <a:bodyPr wrap="square" anchor="t" lIns="0" rIns="0" tIns="0" bIns="0">
+            <a:spAutoFit/>
+          </a:bodyPr>
+          <a:lstStyle/>
+          <a:p>
+            <a:pPr algn="ctr">
+              <a:lnSpc>
+                <a:spcPct val="125000"/>
+              </a:lnSpc>
+              <a:spcAft>
+                <a:spcPts val="0"/>
+              </a:spcAft>
+            </a:pPr>
+            <a:r>
+              <a:rPr sz="1150" b="1" i="0" spc="140">
+                <a:solidFill>
+                  <a:srgbClr val="7BA060"/>
+                </a:solidFill>
+                <a:latin typeface="Karla"/>
+              </a:rPr>
+              <a:t>FRI</a:t>
+            </a:r>
+          </a:p>
+        </p:txBody>
+      </p:sp>
+      <p:sp>
+        <p:nvSpPr>
+          <p:cNvPr id="29" name="Oval 28"/>
+          <p:cNvSpPr/>
+          <p:nvPr/>
+        </p:nvSpPr>
+        <p:spPr>
+          <a:xfrm>
+            <a:off x="7364577" y="2478024"/>
+            <a:ext cx="822960" cy="822960"/>
+          </a:xfrm>
+          <a:prstGeom prst="ellipse">
+            <a:avLst/>
+          </a:prstGeom>
+          <a:solidFill>
+            <a:srgbClr val="4A7331"/>
+          </a:solidFill>
+          <a:ln>
+            <a:noFill/>
+          </a:ln>
+          <a:effectLst/>
+        </p:spPr>
+        <p:style>
+          <a:lnRef idx="1">
+            <a:schemeClr val="accent1"/>
+          </a:lnRef>
+          <a:fillRef idx="3">
+            <a:schemeClr val="accent1"/>
+          </a:fillRef>
+          <a:effectRef idx="2">
+            <a:schemeClr val="accent1"/>
+          </a:effectRef>
+          <a:fontRef idx="minor">
+            <a:schemeClr val="lt1"/>
+          </a:fontRef>
+        </p:style>
+        <p:txBody>
+          <a:bodyPr rtlCol="0" anchor="ctr"/>
+          <a:lstStyle/>
+          <a:p>
+            <a:pPr algn="ctr"/>
+          </a:p>
+        </p:txBody>
+      </p:sp>
+      <p:pic>
+        <p:nvPicPr>
+          <p:cNvPr id="30" name="Picture 29" descr="twopeople.png"/>
           <p:cNvPicPr>
             <a:picLocks noChangeAspect="1"/>
           </p:cNvPicPr>
@@ -3965,6 +4249,114 @@
         </p:blipFill>
         <p:spPr>
           <a:xfrm>
+            <a:off x="7538313" y="2651760"/>
+            <a:ext cx="475488" cy="475488"/>
+          </a:xfrm>
+          <a:prstGeom prst="rect">
+            <a:avLst/>
+          </a:prstGeom>
+        </p:spPr>
+      </p:pic>
+      <p:sp>
+        <p:nvSpPr>
+          <p:cNvPr id="31" name="TextBox 30"/>
+          <p:cNvSpPr txBox="1"/>
+          <p:nvPr/>
+        </p:nvSpPr>
+        <p:spPr>
+          <a:xfrm>
+            <a:off x="7221931" y="3456432"/>
+            <a:ext cx="1108252" cy="786384"/>
+          </a:xfrm>
+          <a:prstGeom prst="rect">
+            <a:avLst/>
+          </a:prstGeom>
+          <a:noFill/>
+        </p:spPr>
+        <p:txBody>
+          <a:bodyPr wrap="square" anchor="t" lIns="0" rIns="0" tIns="0" bIns="0">
+            <a:spAutoFit/>
+          </a:bodyPr>
+          <a:lstStyle/>
+          <a:p>
+            <a:pPr algn="ctr">
+              <a:lnSpc>
+                <a:spcPct val="125000"/>
+              </a:lnSpc>
+              <a:spcAft>
+                <a:spcPts val="0"/>
+              </a:spcAft>
+            </a:pPr>
+            <a:r>
+              <a:rPr sz="1350" b="1" i="0">
+                <a:solidFill>
+                  <a:srgbClr val="4A7331"/>
+                </a:solidFill>
+                <a:latin typeface="Libre Caslon Display"/>
+              </a:rPr>
+              <a:t>The open evening</a:t>
+            </a:r>
+          </a:p>
+        </p:txBody>
+      </p:sp>
+      <p:sp>
+        <p:nvSpPr>
+          <p:cNvPr id="32" name="TextBox 31"/>
+          <p:cNvSpPr txBox="1"/>
+          <p:nvPr/>
+        </p:nvSpPr>
+        <p:spPr>
+          <a:xfrm>
+            <a:off x="685800" y="4169663"/>
+            <a:ext cx="7772400" cy="274320"/>
+          </a:xfrm>
+          <a:prstGeom prst="rect">
+            <a:avLst/>
+          </a:prstGeom>
+          <a:noFill/>
+        </p:spPr>
+        <p:txBody>
+          <a:bodyPr wrap="square" anchor="t" lIns="0" rIns="0" tIns="0" bIns="0">
+            <a:spAutoFit/>
+          </a:bodyPr>
+          <a:lstStyle/>
+          <a:p>
+            <a:pPr algn="ctr">
+              <a:lnSpc>
+                <a:spcPct val="125000"/>
+              </a:lnSpc>
+              <a:spcAft>
+                <a:spcPts val="0"/>
+              </a:spcAft>
+            </a:pPr>
+            <a:r>
+              <a:rPr sz="1050" b="0" i="0">
+                <a:solidFill>
+                  <a:srgbClr val="8B9179"/>
+                </a:solidFill>
+                <a:latin typeface="Karla"/>
+              </a:rPr>
+              <a:t>Needs: the question sheet, one per student, and the answer cards and stall cards from the pack.</a:t>
+            </a:r>
+          </a:p>
+        </p:txBody>
+      </p:sp>
+      <p:pic>
+        <p:nvPicPr>
+          <p:cNvPr id="33" name="Picture 32" descr="logo-mark.png"/>
+          <p:cNvPicPr>
+            <a:picLocks noChangeAspect="1"/>
+          </p:cNvPicPr>
+          <p:nvPr/>
+        </p:nvPicPr>
+        <p:blipFill>
+          <a:blip r:embed="rId6"/>
+          <a:stretch>
+            <a:fillRect/>
+          </a:stretch>
+        </p:blipFill>
+        <p:spPr>
+          <a:xfrm>
             <a:off x="384048" y="4727448"/>
             <a:ext cx="158374" cy="182880"/>
           </a:xfrm>
@@ -3975,7 +4367,7 @@
       </p:pic>
       <p:sp>
         <p:nvSpPr>
-          <p:cNvPr id="24" name="TextBox 23"/>
+          <p:cNvPr id="34" name="TextBox 33"/>
           <p:cNvSpPr txBox="1"/>
           <p:nvPr/>
         </p:nvSpPr>
@@ -4017,7 +4409,7 @@
       </p:sp>
       <p:sp>
         <p:nvSpPr>
-          <p:cNvPr id="25" name="TextBox 24"/>
+          <p:cNvPr id="35" name="TextBox 34"/>
           <p:cNvSpPr txBox="1"/>
           <p:nvPr/>
         </p:nvSpPr>
@@ -4156,111 +4548,21 @@
                 </a:solidFill>
                 <a:latin typeface="Karla"/>
               </a:rPr>
-              <a:t>QUESTIONS TO ASK AT AN OPEN EVENING  ·  MORNING 1</a:t>
-            </a:r>
-          </a:p>
-        </p:txBody>
-      </p:sp>
-      <p:sp>
-        <p:nvSpPr>
-          <p:cNvPr id="4" name="Rounded Rectangle 3"/>
-          <p:cNvSpPr/>
-          <p:nvPr/>
-        </p:nvSpPr>
-        <p:spPr>
-          <a:xfrm>
-            <a:off x="685800" y="841248"/>
-            <a:ext cx="7772400" cy="3017520"/>
-          </a:xfrm>
-          <a:prstGeom prst="roundRect">
-            <a:avLst>
-              <a:gd name="adj" fmla="val 6000"/>
-            </a:avLst>
-          </a:prstGeom>
-          <a:solidFill>
-            <a:srgbClr val="EEF4EA"/>
-          </a:solidFill>
-          <a:ln>
-            <a:noFill/>
-          </a:ln>
-          <a:effectLst/>
-        </p:spPr>
-        <p:style>
-          <a:lnRef idx="1">
-            <a:schemeClr val="accent1"/>
-          </a:lnRef>
-          <a:fillRef idx="3">
-            <a:schemeClr val="accent1"/>
-          </a:fillRef>
-          <a:effectRef idx="2">
-            <a:schemeClr val="accent1"/>
-          </a:effectRef>
-          <a:fontRef idx="minor">
-            <a:schemeClr val="lt1"/>
-          </a:fontRef>
-        </p:style>
-        <p:txBody>
-          <a:bodyPr rtlCol="0" anchor="ctr"/>
-          <a:lstStyle/>
-          <a:p>
-            <a:pPr algn="ctr"/>
-          </a:p>
-        </p:txBody>
-      </p:sp>
-      <p:sp>
-        <p:nvSpPr>
-          <p:cNvPr id="5" name="Rectangle 4"/>
-          <p:cNvSpPr/>
-          <p:nvPr/>
-        </p:nvSpPr>
-        <p:spPr>
-          <a:xfrm>
-            <a:off x="685800" y="841248"/>
-            <a:ext cx="7772400" cy="54864"/>
-          </a:xfrm>
-          <a:prstGeom prst="rect">
-            <a:avLst/>
-          </a:prstGeom>
-          <a:solidFill>
-            <a:srgbClr val="7BA060"/>
-          </a:solidFill>
-          <a:ln>
-            <a:noFill/>
-          </a:ln>
-          <a:effectLst/>
-        </p:spPr>
-        <p:style>
-          <a:lnRef idx="1">
-            <a:schemeClr val="accent1"/>
-          </a:lnRef>
-          <a:fillRef idx="3">
-            <a:schemeClr val="accent1"/>
-          </a:fillRef>
-          <a:effectRef idx="2">
-            <a:schemeClr val="accent1"/>
-          </a:effectRef>
-          <a:fontRef idx="minor">
-            <a:schemeClr val="lt1"/>
-          </a:fontRef>
-        </p:style>
-        <p:txBody>
-          <a:bodyPr rtlCol="0" anchor="ctr"/>
-          <a:lstStyle/>
-          <a:p>
-            <a:pPr algn="ctr"/>
-          </a:p>
-        </p:txBody>
-      </p:sp>
-      <p:sp>
-        <p:nvSpPr>
-          <p:cNvPr id="6" name="TextBox 5"/>
+              <a:t>QUESTIONS TO ASK AT AN OPEN EVENING  ·  MONDAY</a:t>
+            </a:r>
+          </a:p>
+        </p:txBody>
+      </p:sp>
+      <p:sp>
+        <p:nvSpPr>
+          <p:cNvPr id="4" name="TextBox 3"/>
           <p:cNvSpPr txBox="1"/>
           <p:nvPr/>
         </p:nvSpPr>
         <p:spPr>
           <a:xfrm>
-            <a:off x="1051560" y="1115568"/>
-            <a:ext cx="7040880" cy="512064"/>
+            <a:off x="685800" y="749808"/>
+            <a:ext cx="7772400" cy="512064"/>
           </a:xfrm>
           <a:prstGeom prst="rect">
             <a:avLst/>
@@ -4282,33 +4584,77 @@
               </a:spcAft>
             </a:pPr>
             <a:r>
-              <a:rPr sz="2800" b="1" i="0">
-                <a:solidFill>
-                  <a:srgbClr val="4A7331"/>
+              <a:rPr sz="3000" b="1" i="0">
+                <a:solidFill>
+                  <a:srgbClr val="2E3436"/>
                 </a:solidFill>
                 <a:latin typeface="Libre Caslon Display"/>
               </a:rPr>
-              <a:t>About the course</a:t>
-            </a:r>
-          </a:p>
-        </p:txBody>
-      </p:sp>
-      <p:sp>
-        <p:nvSpPr>
-          <p:cNvPr id="7" name="Oval 6"/>
+              <a:t>Rank them</a:t>
+            </a:r>
+          </a:p>
+        </p:txBody>
+      </p:sp>
+      <p:sp>
+        <p:nvSpPr>
+          <p:cNvPr id="5" name="TextBox 4"/>
+          <p:cNvSpPr txBox="1"/>
+          <p:nvPr/>
+        </p:nvSpPr>
+        <p:spPr>
+          <a:xfrm>
+            <a:off x="685800" y="1280160"/>
+            <a:ext cx="7772400" cy="274320"/>
+          </a:xfrm>
+          <a:prstGeom prst="rect">
+            <a:avLst/>
+          </a:prstGeom>
+          <a:noFill/>
+        </p:spPr>
+        <p:txBody>
+          <a:bodyPr wrap="square" anchor="t" lIns="0" rIns="0" tIns="0" bIns="0">
+            <a:spAutoFit/>
+          </a:bodyPr>
+          <a:lstStyle/>
+          <a:p>
+            <a:pPr algn="l">
+              <a:lnSpc>
+                <a:spcPct val="125000"/>
+              </a:lnSpc>
+              <a:spcAft>
+                <a:spcPts val="0"/>
+              </a:spcAft>
+            </a:pPr>
+            <a:r>
+              <a:rPr sz="1400" b="0" i="1">
+                <a:solidFill>
+                  <a:srgbClr val="7BA060"/>
+                </a:solidFill>
+                <a:latin typeface="Karla"/>
+              </a:rPr>
+              <a:t>The course, the day and the people.</a:t>
+            </a:r>
+          </a:p>
+        </p:txBody>
+      </p:sp>
+      <p:sp>
+        <p:nvSpPr>
+          <p:cNvPr id="6" name="Rounded Rectangle 5"/>
           <p:cNvSpPr/>
           <p:nvPr/>
         </p:nvSpPr>
         <p:spPr>
           <a:xfrm>
-            <a:off x="1106424" y="1883664"/>
-            <a:ext cx="109728" cy="109728"/>
-          </a:xfrm>
-          <a:prstGeom prst="ellipse">
-            <a:avLst/>
+            <a:off x="685800" y="1682496"/>
+            <a:ext cx="7772400" cy="1993392"/>
+          </a:xfrm>
+          <a:prstGeom prst="roundRect">
+            <a:avLst>
+              <a:gd name="adj" fmla="val 5000"/>
+            </a:avLst>
           </a:prstGeom>
           <a:solidFill>
-            <a:srgbClr val="7BA060"/>
+            <a:srgbClr val="EEF4EA"/>
           </a:solidFill>
           <a:ln>
             <a:noFill/>
@@ -4339,62 +4685,22 @@
       </p:sp>
       <p:sp>
         <p:nvSpPr>
-          <p:cNvPr id="8" name="TextBox 7"/>
-          <p:cNvSpPr txBox="1"/>
-          <p:nvPr/>
-        </p:nvSpPr>
-        <p:spPr>
-          <a:xfrm>
-            <a:off x="1399032" y="1810512"/>
-            <a:ext cx="6583680" cy="247650"/>
-          </a:xfrm>
-          <a:prstGeom prst="rect">
-            <a:avLst/>
-          </a:prstGeom>
-          <a:noFill/>
-        </p:spPr>
-        <p:txBody>
-          <a:bodyPr wrap="square" anchor="t" lIns="0" rIns="0" tIns="0" bIns="0">
-            <a:spAutoFit/>
-          </a:bodyPr>
-          <a:lstStyle/>
-          <a:p>
-            <a:pPr algn="l">
-              <a:lnSpc>
-                <a:spcPct val="130000"/>
-              </a:lnSpc>
-              <a:spcAft>
-                <a:spcPts val="0"/>
-              </a:spcAft>
-            </a:pPr>
-            <a:r>
-              <a:rPr sz="1500" b="0" i="0">
-                <a:solidFill>
-                  <a:srgbClr val="2E3436"/>
-                </a:solidFill>
-                <a:latin typeface="Karla"/>
-              </a:rPr>
-              <a:t>How is it assessed: exams, coursework, or both?</a:t>
-            </a:r>
-          </a:p>
-        </p:txBody>
-      </p:sp>
-      <p:sp>
-        <p:nvSpPr>
-          <p:cNvPr id="9" name="Oval 8"/>
+          <p:cNvPr id="7" name="Rounded Rectangle 6"/>
           <p:cNvSpPr/>
           <p:nvPr/>
         </p:nvSpPr>
         <p:spPr>
           <a:xfrm>
-            <a:off x="1106424" y="2277618"/>
-            <a:ext cx="109728" cy="109728"/>
-          </a:xfrm>
-          <a:prstGeom prst="ellipse">
-            <a:avLst/>
+            <a:off x="923544" y="1828800"/>
+            <a:ext cx="274320" cy="274320"/>
+          </a:xfrm>
+          <a:prstGeom prst="roundRect">
+            <a:avLst>
+              <a:gd name="adj" fmla="val 15000"/>
+            </a:avLst>
           </a:prstGeom>
           <a:solidFill>
-            <a:srgbClr val="7BA060"/>
+            <a:srgbClr val="FFFDF7"/>
           </a:solidFill>
           <a:ln>
             <a:noFill/>
@@ -4425,142 +4731,14 @@
       </p:sp>
       <p:sp>
         <p:nvSpPr>
-          <p:cNvPr id="10" name="TextBox 9"/>
+          <p:cNvPr id="8" name="TextBox 7"/>
           <p:cNvSpPr txBox="1"/>
           <p:nvPr/>
         </p:nvSpPr>
         <p:spPr>
           <a:xfrm>
-            <a:off x="1399032" y="2204466"/>
-            <a:ext cx="6583680" cy="247650"/>
-          </a:xfrm>
-          <a:prstGeom prst="rect">
-            <a:avLst/>
-          </a:prstGeom>
-          <a:noFill/>
-        </p:spPr>
-        <p:txBody>
-          <a:bodyPr wrap="square" anchor="t" lIns="0" rIns="0" tIns="0" bIns="0">
-            <a:spAutoFit/>
-          </a:bodyPr>
-          <a:lstStyle/>
-          <a:p>
-            <a:pPr algn="l">
-              <a:lnSpc>
-                <a:spcPct val="130000"/>
-              </a:lnSpc>
-              <a:spcAft>
-                <a:spcPts val="0"/>
-              </a:spcAft>
-            </a:pPr>
-            <a:r>
-              <a:rPr sz="1500" b="0" i="0">
-                <a:solidFill>
-                  <a:srgbClr val="2E3436"/>
-                </a:solidFill>
-                <a:latin typeface="Karla"/>
-              </a:rPr>
-              <a:t>What did last year’s students go on to do?</a:t>
-            </a:r>
-          </a:p>
-        </p:txBody>
-      </p:sp>
-      <p:sp>
-        <p:nvSpPr>
-          <p:cNvPr id="11" name="Oval 10"/>
-          <p:cNvSpPr/>
-          <p:nvPr/>
-        </p:nvSpPr>
-        <p:spPr>
-          <a:xfrm>
-            <a:off x="1106424" y="2671572"/>
-            <a:ext cx="109728" cy="109728"/>
-          </a:xfrm>
-          <a:prstGeom prst="ellipse">
-            <a:avLst/>
-          </a:prstGeom>
-          <a:solidFill>
-            <a:srgbClr val="7BA060"/>
-          </a:solidFill>
-          <a:ln>
-            <a:noFill/>
-          </a:ln>
-          <a:effectLst/>
-        </p:spPr>
-        <p:style>
-          <a:lnRef idx="1">
-            <a:schemeClr val="accent1"/>
-          </a:lnRef>
-          <a:fillRef idx="3">
-            <a:schemeClr val="accent1"/>
-          </a:fillRef>
-          <a:effectRef idx="2">
-            <a:schemeClr val="accent1"/>
-          </a:effectRef>
-          <a:fontRef idx="minor">
-            <a:schemeClr val="lt1"/>
-          </a:fontRef>
-        </p:style>
-        <p:txBody>
-          <a:bodyPr rtlCol="0" anchor="ctr"/>
-          <a:lstStyle/>
-          <a:p>
-            <a:pPr algn="ctr"/>
-          </a:p>
-        </p:txBody>
-      </p:sp>
-      <p:sp>
-        <p:nvSpPr>
-          <p:cNvPr id="12" name="TextBox 11"/>
-          <p:cNvSpPr txBox="1"/>
-          <p:nvPr/>
-        </p:nvSpPr>
-        <p:spPr>
-          <a:xfrm>
-            <a:off x="1399032" y="2598420"/>
-            <a:ext cx="6583680" cy="247650"/>
-          </a:xfrm>
-          <a:prstGeom prst="rect">
-            <a:avLst/>
-          </a:prstGeom>
-          <a:noFill/>
-        </p:spPr>
-        <p:txBody>
-          <a:bodyPr wrap="square" anchor="t" lIns="0" rIns="0" tIns="0" bIns="0">
-            <a:spAutoFit/>
-          </a:bodyPr>
-          <a:lstStyle/>
-          <a:p>
-            <a:pPr algn="l">
-              <a:lnSpc>
-                <a:spcPct val="130000"/>
-              </a:lnSpc>
-              <a:spcAft>
-                <a:spcPts val="0"/>
-              </a:spcAft>
-            </a:pPr>
-            <a:r>
-              <a:rPr sz="1500" b="0" i="0">
-                <a:solidFill>
-                  <a:srgbClr val="2E3436"/>
-                </a:solidFill>
-                <a:latin typeface="Karla"/>
-              </a:rPr>
-              <a:t>What does a normal week of this course look like?</a:t>
-            </a:r>
-          </a:p>
-        </p:txBody>
-      </p:sp>
-      <p:sp>
-        <p:nvSpPr>
-          <p:cNvPr id="13" name="TextBox 12"/>
-          <p:cNvSpPr txBox="1"/>
-          <p:nvPr/>
-        </p:nvSpPr>
-        <p:spPr>
-          <a:xfrm>
-            <a:off x="685800" y="4041648"/>
-            <a:ext cx="7772400" cy="310896"/>
+            <a:off x="923544" y="1869948"/>
+            <a:ext cx="274320" cy="201168"/>
           </a:xfrm>
           <a:prstGeom prst="rect">
             <a:avLst/>
@@ -4582,20 +4760,1012 @@
               </a:spcAft>
             </a:pPr>
             <a:r>
-              <a:rPr sz="1150" b="0" i="1">
-                <a:solidFill>
-                  <a:srgbClr val="5C6552"/>
+              <a:rPr sz="1100" b="1" i="0">
+                <a:solidFill>
+                  <a:srgbClr val="7BA060"/>
                 </a:solidFill>
                 <a:latin typeface="Karla"/>
               </a:rPr>
-              <a:t>Add one of your own. The best question is the one you actually want the answer to.</a:t>
+              <a:t>?</a:t>
+            </a:r>
+          </a:p>
+        </p:txBody>
+      </p:sp>
+      <p:sp>
+        <p:nvSpPr>
+          <p:cNvPr id="9" name="TextBox 8"/>
+          <p:cNvSpPr txBox="1"/>
+          <p:nvPr/>
+        </p:nvSpPr>
+        <p:spPr>
+          <a:xfrm>
+            <a:off x="1399032" y="1837943"/>
+            <a:ext cx="6766560" cy="274320"/>
+          </a:xfrm>
+          <a:prstGeom prst="rect">
+            <a:avLst/>
+          </a:prstGeom>
+          <a:noFill/>
+        </p:spPr>
+        <p:txBody>
+          <a:bodyPr wrap="square" anchor="t" lIns="0" rIns="0" tIns="0" bIns="0">
+            <a:spAutoFit/>
+          </a:bodyPr>
+          <a:lstStyle/>
+          <a:p>
+            <a:pPr algn="l">
+              <a:lnSpc>
+                <a:spcPct val="120000"/>
+              </a:lnSpc>
+              <a:spcAft>
+                <a:spcPts val="0"/>
+              </a:spcAft>
+            </a:pPr>
+            <a:r>
+              <a:rPr sz="1400" b="0" i="0">
+                <a:solidFill>
+                  <a:srgbClr val="2E3436"/>
+                </a:solidFill>
+                <a:latin typeface="Karla"/>
+              </a:rPr>
+              <a:t>How is it assessed: exams, coursework, or both?</a:t>
+            </a:r>
+          </a:p>
+        </p:txBody>
+      </p:sp>
+      <p:sp>
+        <p:nvSpPr>
+          <p:cNvPr id="10" name="Rounded Rectangle 9"/>
+          <p:cNvSpPr/>
+          <p:nvPr/>
+        </p:nvSpPr>
+        <p:spPr>
+          <a:xfrm>
+            <a:off x="923544" y="2185416"/>
+            <a:ext cx="274320" cy="274320"/>
+          </a:xfrm>
+          <a:prstGeom prst="roundRect">
+            <a:avLst>
+              <a:gd name="adj" fmla="val 15000"/>
+            </a:avLst>
+          </a:prstGeom>
+          <a:solidFill>
+            <a:srgbClr val="FFFDF7"/>
+          </a:solidFill>
+          <a:ln>
+            <a:noFill/>
+          </a:ln>
+          <a:effectLst/>
+        </p:spPr>
+        <p:style>
+          <a:lnRef idx="1">
+            <a:schemeClr val="accent1"/>
+          </a:lnRef>
+          <a:fillRef idx="3">
+            <a:schemeClr val="accent1"/>
+          </a:fillRef>
+          <a:effectRef idx="2">
+            <a:schemeClr val="accent1"/>
+          </a:effectRef>
+          <a:fontRef idx="minor">
+            <a:schemeClr val="lt1"/>
+          </a:fontRef>
+        </p:style>
+        <p:txBody>
+          <a:bodyPr rtlCol="0" anchor="ctr"/>
+          <a:lstStyle/>
+          <a:p>
+            <a:pPr algn="ctr"/>
+          </a:p>
+        </p:txBody>
+      </p:sp>
+      <p:sp>
+        <p:nvSpPr>
+          <p:cNvPr id="11" name="TextBox 10"/>
+          <p:cNvSpPr txBox="1"/>
+          <p:nvPr/>
+        </p:nvSpPr>
+        <p:spPr>
+          <a:xfrm>
+            <a:off x="923544" y="2226564"/>
+            <a:ext cx="274320" cy="201168"/>
+          </a:xfrm>
+          <a:prstGeom prst="rect">
+            <a:avLst/>
+          </a:prstGeom>
+          <a:noFill/>
+        </p:spPr>
+        <p:txBody>
+          <a:bodyPr wrap="square" anchor="t" lIns="0" rIns="0" tIns="0" bIns="0">
+            <a:spAutoFit/>
+          </a:bodyPr>
+          <a:lstStyle/>
+          <a:p>
+            <a:pPr algn="ctr">
+              <a:lnSpc>
+                <a:spcPct val="125000"/>
+              </a:lnSpc>
+              <a:spcAft>
+                <a:spcPts val="0"/>
+              </a:spcAft>
+            </a:pPr>
+            <a:r>
+              <a:rPr sz="1100" b="1" i="0">
+                <a:solidFill>
+                  <a:srgbClr val="7BA060"/>
+                </a:solidFill>
+                <a:latin typeface="Karla"/>
+              </a:rPr>
+              <a:t>?</a:t>
+            </a:r>
+          </a:p>
+        </p:txBody>
+      </p:sp>
+      <p:sp>
+        <p:nvSpPr>
+          <p:cNvPr id="12" name="TextBox 11"/>
+          <p:cNvSpPr txBox="1"/>
+          <p:nvPr/>
+        </p:nvSpPr>
+        <p:spPr>
+          <a:xfrm>
+            <a:off x="1399032" y="2194560"/>
+            <a:ext cx="6766560" cy="274320"/>
+          </a:xfrm>
+          <a:prstGeom prst="rect">
+            <a:avLst/>
+          </a:prstGeom>
+          <a:noFill/>
+        </p:spPr>
+        <p:txBody>
+          <a:bodyPr wrap="square" anchor="t" lIns="0" rIns="0" tIns="0" bIns="0">
+            <a:spAutoFit/>
+          </a:bodyPr>
+          <a:lstStyle/>
+          <a:p>
+            <a:pPr algn="l">
+              <a:lnSpc>
+                <a:spcPct val="120000"/>
+              </a:lnSpc>
+              <a:spcAft>
+                <a:spcPts val="0"/>
+              </a:spcAft>
+            </a:pPr>
+            <a:r>
+              <a:rPr sz="1400" b="0" i="0">
+                <a:solidFill>
+                  <a:srgbClr val="2E3436"/>
+                </a:solidFill>
+                <a:latin typeface="Karla"/>
+              </a:rPr>
+              <a:t>What did last year’s students go on to do?</a:t>
+            </a:r>
+          </a:p>
+        </p:txBody>
+      </p:sp>
+      <p:sp>
+        <p:nvSpPr>
+          <p:cNvPr id="13" name="Rounded Rectangle 12"/>
+          <p:cNvSpPr/>
+          <p:nvPr/>
+        </p:nvSpPr>
+        <p:spPr>
+          <a:xfrm>
+            <a:off x="923544" y="2542032"/>
+            <a:ext cx="274320" cy="274320"/>
+          </a:xfrm>
+          <a:prstGeom prst="roundRect">
+            <a:avLst>
+              <a:gd name="adj" fmla="val 15000"/>
+            </a:avLst>
+          </a:prstGeom>
+          <a:solidFill>
+            <a:srgbClr val="FFFDF7"/>
+          </a:solidFill>
+          <a:ln>
+            <a:noFill/>
+          </a:ln>
+          <a:effectLst/>
+        </p:spPr>
+        <p:style>
+          <a:lnRef idx="1">
+            <a:schemeClr val="accent1"/>
+          </a:lnRef>
+          <a:fillRef idx="3">
+            <a:schemeClr val="accent1"/>
+          </a:fillRef>
+          <a:effectRef idx="2">
+            <a:schemeClr val="accent1"/>
+          </a:effectRef>
+          <a:fontRef idx="minor">
+            <a:schemeClr val="lt1"/>
+          </a:fontRef>
+        </p:style>
+        <p:txBody>
+          <a:bodyPr rtlCol="0" anchor="ctr"/>
+          <a:lstStyle/>
+          <a:p>
+            <a:pPr algn="ctr"/>
+          </a:p>
+        </p:txBody>
+      </p:sp>
+      <p:sp>
+        <p:nvSpPr>
+          <p:cNvPr id="14" name="TextBox 13"/>
+          <p:cNvSpPr txBox="1"/>
+          <p:nvPr/>
+        </p:nvSpPr>
+        <p:spPr>
+          <a:xfrm>
+            <a:off x="923544" y="2583180"/>
+            <a:ext cx="274320" cy="201168"/>
+          </a:xfrm>
+          <a:prstGeom prst="rect">
+            <a:avLst/>
+          </a:prstGeom>
+          <a:noFill/>
+        </p:spPr>
+        <p:txBody>
+          <a:bodyPr wrap="square" anchor="t" lIns="0" rIns="0" tIns="0" bIns="0">
+            <a:spAutoFit/>
+          </a:bodyPr>
+          <a:lstStyle/>
+          <a:p>
+            <a:pPr algn="ctr">
+              <a:lnSpc>
+                <a:spcPct val="125000"/>
+              </a:lnSpc>
+              <a:spcAft>
+                <a:spcPts val="0"/>
+              </a:spcAft>
+            </a:pPr>
+            <a:r>
+              <a:rPr sz="1100" b="1" i="0">
+                <a:solidFill>
+                  <a:srgbClr val="7BA060"/>
+                </a:solidFill>
+                <a:latin typeface="Karla"/>
+              </a:rPr>
+              <a:t>?</a:t>
+            </a:r>
+          </a:p>
+        </p:txBody>
+      </p:sp>
+      <p:sp>
+        <p:nvSpPr>
+          <p:cNvPr id="15" name="TextBox 14"/>
+          <p:cNvSpPr txBox="1"/>
+          <p:nvPr/>
+        </p:nvSpPr>
+        <p:spPr>
+          <a:xfrm>
+            <a:off x="1399032" y="2551176"/>
+            <a:ext cx="6766560" cy="274320"/>
+          </a:xfrm>
+          <a:prstGeom prst="rect">
+            <a:avLst/>
+          </a:prstGeom>
+          <a:noFill/>
+        </p:spPr>
+        <p:txBody>
+          <a:bodyPr wrap="square" anchor="t" lIns="0" rIns="0" tIns="0" bIns="0">
+            <a:spAutoFit/>
+          </a:bodyPr>
+          <a:lstStyle/>
+          <a:p>
+            <a:pPr algn="l">
+              <a:lnSpc>
+                <a:spcPct val="120000"/>
+              </a:lnSpc>
+              <a:spcAft>
+                <a:spcPts val="0"/>
+              </a:spcAft>
+            </a:pPr>
+            <a:r>
+              <a:rPr sz="1400" b="0" i="0">
+                <a:solidFill>
+                  <a:srgbClr val="2E3436"/>
+                </a:solidFill>
+                <a:latin typeface="Karla"/>
+              </a:rPr>
+              <a:t>How many hours a week am I in lessons, and what happens in the gaps?</a:t>
+            </a:r>
+          </a:p>
+        </p:txBody>
+      </p:sp>
+      <p:sp>
+        <p:nvSpPr>
+          <p:cNvPr id="16" name="Rounded Rectangle 15"/>
+          <p:cNvSpPr/>
+          <p:nvPr/>
+        </p:nvSpPr>
+        <p:spPr>
+          <a:xfrm>
+            <a:off x="923544" y="2898648"/>
+            <a:ext cx="274320" cy="274320"/>
+          </a:xfrm>
+          <a:prstGeom prst="roundRect">
+            <a:avLst>
+              <a:gd name="adj" fmla="val 15000"/>
+            </a:avLst>
+          </a:prstGeom>
+          <a:solidFill>
+            <a:srgbClr val="FFFDF7"/>
+          </a:solidFill>
+          <a:ln>
+            <a:noFill/>
+          </a:ln>
+          <a:effectLst/>
+        </p:spPr>
+        <p:style>
+          <a:lnRef idx="1">
+            <a:schemeClr val="accent1"/>
+          </a:lnRef>
+          <a:fillRef idx="3">
+            <a:schemeClr val="accent1"/>
+          </a:fillRef>
+          <a:effectRef idx="2">
+            <a:schemeClr val="accent1"/>
+          </a:effectRef>
+          <a:fontRef idx="minor">
+            <a:schemeClr val="lt1"/>
+          </a:fontRef>
+        </p:style>
+        <p:txBody>
+          <a:bodyPr rtlCol="0" anchor="ctr"/>
+          <a:lstStyle/>
+          <a:p>
+            <a:pPr algn="ctr"/>
+          </a:p>
+        </p:txBody>
+      </p:sp>
+      <p:sp>
+        <p:nvSpPr>
+          <p:cNvPr id="17" name="TextBox 16"/>
+          <p:cNvSpPr txBox="1"/>
+          <p:nvPr/>
+        </p:nvSpPr>
+        <p:spPr>
+          <a:xfrm>
+            <a:off x="923544" y="2939796"/>
+            <a:ext cx="274320" cy="201168"/>
+          </a:xfrm>
+          <a:prstGeom prst="rect">
+            <a:avLst/>
+          </a:prstGeom>
+          <a:noFill/>
+        </p:spPr>
+        <p:txBody>
+          <a:bodyPr wrap="square" anchor="t" lIns="0" rIns="0" tIns="0" bIns="0">
+            <a:spAutoFit/>
+          </a:bodyPr>
+          <a:lstStyle/>
+          <a:p>
+            <a:pPr algn="ctr">
+              <a:lnSpc>
+                <a:spcPct val="125000"/>
+              </a:lnSpc>
+              <a:spcAft>
+                <a:spcPts val="0"/>
+              </a:spcAft>
+            </a:pPr>
+            <a:r>
+              <a:rPr sz="1100" b="1" i="0">
+                <a:solidFill>
+                  <a:srgbClr val="7BA060"/>
+                </a:solidFill>
+                <a:latin typeface="Karla"/>
+              </a:rPr>
+              <a:t>?</a:t>
+            </a:r>
+          </a:p>
+        </p:txBody>
+      </p:sp>
+      <p:sp>
+        <p:nvSpPr>
+          <p:cNvPr id="18" name="TextBox 17"/>
+          <p:cNvSpPr txBox="1"/>
+          <p:nvPr/>
+        </p:nvSpPr>
+        <p:spPr>
+          <a:xfrm>
+            <a:off x="1399032" y="2907792"/>
+            <a:ext cx="6766560" cy="274320"/>
+          </a:xfrm>
+          <a:prstGeom prst="rect">
+            <a:avLst/>
+          </a:prstGeom>
+          <a:noFill/>
+        </p:spPr>
+        <p:txBody>
+          <a:bodyPr wrap="square" anchor="t" lIns="0" rIns="0" tIns="0" bIns="0">
+            <a:spAutoFit/>
+          </a:bodyPr>
+          <a:lstStyle/>
+          <a:p>
+            <a:pPr algn="l">
+              <a:lnSpc>
+                <a:spcPct val="120000"/>
+              </a:lnSpc>
+              <a:spcAft>
+                <a:spcPts val="0"/>
+              </a:spcAft>
+            </a:pPr>
+            <a:r>
+              <a:rPr sz="1400" b="0" i="0">
+                <a:solidFill>
+                  <a:srgbClr val="2E3436"/>
+                </a:solidFill>
+                <a:latin typeface="Karla"/>
+              </a:rPr>
+              <a:t>Who would I go to if I was struggling?</a:t>
+            </a:r>
+          </a:p>
+        </p:txBody>
+      </p:sp>
+      <p:sp>
+        <p:nvSpPr>
+          <p:cNvPr id="19" name="Rounded Rectangle 18"/>
+          <p:cNvSpPr/>
+          <p:nvPr/>
+        </p:nvSpPr>
+        <p:spPr>
+          <a:xfrm>
+            <a:off x="923544" y="3255264"/>
+            <a:ext cx="274320" cy="274320"/>
+          </a:xfrm>
+          <a:prstGeom prst="roundRect">
+            <a:avLst>
+              <a:gd name="adj" fmla="val 15000"/>
+            </a:avLst>
+          </a:prstGeom>
+          <a:solidFill>
+            <a:srgbClr val="FFFDF7"/>
+          </a:solidFill>
+          <a:ln>
+            <a:noFill/>
+          </a:ln>
+          <a:effectLst/>
+        </p:spPr>
+        <p:style>
+          <a:lnRef idx="1">
+            <a:schemeClr val="accent1"/>
+          </a:lnRef>
+          <a:fillRef idx="3">
+            <a:schemeClr val="accent1"/>
+          </a:fillRef>
+          <a:effectRef idx="2">
+            <a:schemeClr val="accent1"/>
+          </a:effectRef>
+          <a:fontRef idx="minor">
+            <a:schemeClr val="lt1"/>
+          </a:fontRef>
+        </p:style>
+        <p:txBody>
+          <a:bodyPr rtlCol="0" anchor="ctr"/>
+          <a:lstStyle/>
+          <a:p>
+            <a:pPr algn="ctr"/>
+          </a:p>
+        </p:txBody>
+      </p:sp>
+      <p:sp>
+        <p:nvSpPr>
+          <p:cNvPr id="20" name="TextBox 19"/>
+          <p:cNvSpPr txBox="1"/>
+          <p:nvPr/>
+        </p:nvSpPr>
+        <p:spPr>
+          <a:xfrm>
+            <a:off x="923544" y="3296412"/>
+            <a:ext cx="274320" cy="201168"/>
+          </a:xfrm>
+          <a:prstGeom prst="rect">
+            <a:avLst/>
+          </a:prstGeom>
+          <a:noFill/>
+        </p:spPr>
+        <p:txBody>
+          <a:bodyPr wrap="square" anchor="t" lIns="0" rIns="0" tIns="0" bIns="0">
+            <a:spAutoFit/>
+          </a:bodyPr>
+          <a:lstStyle/>
+          <a:p>
+            <a:pPr algn="ctr">
+              <a:lnSpc>
+                <a:spcPct val="125000"/>
+              </a:lnSpc>
+              <a:spcAft>
+                <a:spcPts val="0"/>
+              </a:spcAft>
+            </a:pPr>
+            <a:r>
+              <a:rPr sz="1100" b="1" i="0">
+                <a:solidFill>
+                  <a:srgbClr val="7BA060"/>
+                </a:solidFill>
+                <a:latin typeface="Karla"/>
+              </a:rPr>
+              <a:t>?</a:t>
+            </a:r>
+          </a:p>
+        </p:txBody>
+      </p:sp>
+      <p:sp>
+        <p:nvSpPr>
+          <p:cNvPr id="21" name="TextBox 20"/>
+          <p:cNvSpPr txBox="1"/>
+          <p:nvPr/>
+        </p:nvSpPr>
+        <p:spPr>
+          <a:xfrm>
+            <a:off x="1399032" y="3264408"/>
+            <a:ext cx="6766560" cy="274320"/>
+          </a:xfrm>
+          <a:prstGeom prst="rect">
+            <a:avLst/>
+          </a:prstGeom>
+          <a:noFill/>
+        </p:spPr>
+        <p:txBody>
+          <a:bodyPr wrap="square" anchor="t" lIns="0" rIns="0" tIns="0" bIns="0">
+            <a:spAutoFit/>
+          </a:bodyPr>
+          <a:lstStyle/>
+          <a:p>
+            <a:pPr algn="l">
+              <a:lnSpc>
+                <a:spcPct val="120000"/>
+              </a:lnSpc>
+              <a:spcAft>
+                <a:spcPts val="0"/>
+              </a:spcAft>
+            </a:pPr>
+            <a:r>
+              <a:rPr sz="1400" b="0" i="0">
+                <a:solidFill>
+                  <a:srgbClr val="2E3436"/>
+                </a:solidFill>
+                <a:latin typeface="Karla"/>
+              </a:rPr>
+              <a:t>Do students who did not come from this school settle in?</a:t>
+            </a:r>
+          </a:p>
+        </p:txBody>
+      </p:sp>
+      <p:sp>
+        <p:nvSpPr>
+          <p:cNvPr id="22" name="Rounded Rectangle 21"/>
+          <p:cNvSpPr/>
+          <p:nvPr/>
+        </p:nvSpPr>
+        <p:spPr>
+          <a:xfrm>
+            <a:off x="685800" y="3822191"/>
+            <a:ext cx="7772400" cy="603504"/>
+          </a:xfrm>
+          <a:prstGeom prst="roundRect">
+            <a:avLst>
+              <a:gd name="adj" fmla="val 12000"/>
+            </a:avLst>
+          </a:prstGeom>
+          <a:solidFill>
+            <a:srgbClr val="4A7331"/>
+          </a:solidFill>
+          <a:ln>
+            <a:noFill/>
+          </a:ln>
+          <a:effectLst/>
+        </p:spPr>
+        <p:style>
+          <a:lnRef idx="1">
+            <a:schemeClr val="accent1"/>
+          </a:lnRef>
+          <a:fillRef idx="3">
+            <a:schemeClr val="accent1"/>
+          </a:fillRef>
+          <a:effectRef idx="2">
+            <a:schemeClr val="accent1"/>
+          </a:effectRef>
+          <a:fontRef idx="minor">
+            <a:schemeClr val="lt1"/>
+          </a:fontRef>
+        </p:style>
+        <p:txBody>
+          <a:bodyPr rtlCol="0" anchor="ctr"/>
+          <a:lstStyle/>
+          <a:p>
+            <a:pPr algn="ctr"/>
+          </a:p>
+        </p:txBody>
+      </p:sp>
+      <p:sp>
+        <p:nvSpPr>
+          <p:cNvPr id="23" name="Oval 22"/>
+          <p:cNvSpPr/>
+          <p:nvPr/>
+        </p:nvSpPr>
+        <p:spPr>
+          <a:xfrm>
+            <a:off x="923544" y="3986783"/>
+            <a:ext cx="274320" cy="274320"/>
+          </a:xfrm>
+          <a:prstGeom prst="ellipse">
+            <a:avLst/>
+          </a:prstGeom>
+          <a:solidFill>
+            <a:srgbClr val="EEF4EA"/>
+          </a:solidFill>
+          <a:ln>
+            <a:noFill/>
+          </a:ln>
+          <a:effectLst/>
+        </p:spPr>
+        <p:style>
+          <a:lnRef idx="1">
+            <a:schemeClr val="accent1"/>
+          </a:lnRef>
+          <a:fillRef idx="3">
+            <a:schemeClr val="accent1"/>
+          </a:fillRef>
+          <a:effectRef idx="2">
+            <a:schemeClr val="accent1"/>
+          </a:effectRef>
+          <a:fontRef idx="minor">
+            <a:schemeClr val="lt1"/>
+          </a:fontRef>
+        </p:style>
+        <p:txBody>
+          <a:bodyPr rtlCol="0" anchor="ctr"/>
+          <a:lstStyle/>
+          <a:p>
+            <a:pPr algn="ctr"/>
+          </a:p>
+        </p:txBody>
+      </p:sp>
+      <p:sp>
+        <p:nvSpPr>
+          <p:cNvPr id="24" name="TextBox 23"/>
+          <p:cNvSpPr txBox="1"/>
+          <p:nvPr/>
+        </p:nvSpPr>
+        <p:spPr>
+          <a:xfrm>
+            <a:off x="923544" y="4032504"/>
+            <a:ext cx="274320" cy="201168"/>
+          </a:xfrm>
+          <a:prstGeom prst="rect">
+            <a:avLst/>
+          </a:prstGeom>
+          <a:noFill/>
+        </p:spPr>
+        <p:txBody>
+          <a:bodyPr wrap="square" anchor="t" lIns="0" rIns="0" tIns="0" bIns="0">
+            <a:spAutoFit/>
+          </a:bodyPr>
+          <a:lstStyle/>
+          <a:p>
+            <a:pPr algn="ctr">
+              <a:lnSpc>
+                <a:spcPct val="125000"/>
+              </a:lnSpc>
+              <a:spcAft>
+                <a:spcPts val="0"/>
+              </a:spcAft>
+            </a:pPr>
+            <a:r>
+              <a:rPr sz="1050" b="1" i="0">
+                <a:solidFill>
+                  <a:srgbClr val="4A7331"/>
+                </a:solidFill>
+                <a:latin typeface="Karla"/>
+              </a:rPr>
+              <a:t>1</a:t>
+            </a:r>
+          </a:p>
+        </p:txBody>
+      </p:sp>
+      <p:sp>
+        <p:nvSpPr>
+          <p:cNvPr id="25" name="TextBox 24"/>
+          <p:cNvSpPr txBox="1"/>
+          <p:nvPr/>
+        </p:nvSpPr>
+        <p:spPr>
+          <a:xfrm>
+            <a:off x="1289304" y="3948684"/>
+            <a:ext cx="2011680" cy="350520"/>
+          </a:xfrm>
+          <a:prstGeom prst="rect">
+            <a:avLst/>
+          </a:prstGeom>
+          <a:noFill/>
+        </p:spPr>
+        <p:txBody>
+          <a:bodyPr wrap="square" anchor="ctr" lIns="0" rIns="0" tIns="0" bIns="0">
+            <a:spAutoFit/>
+          </a:bodyPr>
+          <a:lstStyle/>
+          <a:p>
+            <a:pPr algn="l">
+              <a:lnSpc>
+                <a:spcPct val="120000"/>
+              </a:lnSpc>
+              <a:spcAft>
+                <a:spcPts val="0"/>
+              </a:spcAft>
+            </a:pPr>
+            <a:r>
+              <a:rPr sz="1150" b="0" i="0">
+                <a:solidFill>
+                  <a:srgbClr val="FFFDF7"/>
+                </a:solidFill>
+                <a:latin typeface="Karla"/>
+              </a:rPr>
+              <a:t>Rank them on your sheet, 1 for must ask</a:t>
+            </a:r>
+          </a:p>
+        </p:txBody>
+      </p:sp>
+      <p:sp>
+        <p:nvSpPr>
+          <p:cNvPr id="26" name="Oval 25"/>
+          <p:cNvSpPr/>
+          <p:nvPr/>
+        </p:nvSpPr>
+        <p:spPr>
+          <a:xfrm>
+            <a:off x="3355848" y="3986783"/>
+            <a:ext cx="274320" cy="274320"/>
+          </a:xfrm>
+          <a:prstGeom prst="ellipse">
+            <a:avLst/>
+          </a:prstGeom>
+          <a:solidFill>
+            <a:srgbClr val="EEF4EA"/>
+          </a:solidFill>
+          <a:ln>
+            <a:noFill/>
+          </a:ln>
+          <a:effectLst/>
+        </p:spPr>
+        <p:style>
+          <a:lnRef idx="1">
+            <a:schemeClr val="accent1"/>
+          </a:lnRef>
+          <a:fillRef idx="3">
+            <a:schemeClr val="accent1"/>
+          </a:fillRef>
+          <a:effectRef idx="2">
+            <a:schemeClr val="accent1"/>
+          </a:effectRef>
+          <a:fontRef idx="minor">
+            <a:schemeClr val="lt1"/>
+          </a:fontRef>
+        </p:style>
+        <p:txBody>
+          <a:bodyPr rtlCol="0" anchor="ctr"/>
+          <a:lstStyle/>
+          <a:p>
+            <a:pPr algn="ctr"/>
+          </a:p>
+        </p:txBody>
+      </p:sp>
+      <p:sp>
+        <p:nvSpPr>
+          <p:cNvPr id="27" name="TextBox 26"/>
+          <p:cNvSpPr txBox="1"/>
+          <p:nvPr/>
+        </p:nvSpPr>
+        <p:spPr>
+          <a:xfrm>
+            <a:off x="3355848" y="4032504"/>
+            <a:ext cx="274320" cy="201168"/>
+          </a:xfrm>
+          <a:prstGeom prst="rect">
+            <a:avLst/>
+          </a:prstGeom>
+          <a:noFill/>
+        </p:spPr>
+        <p:txBody>
+          <a:bodyPr wrap="square" anchor="t" lIns="0" rIns="0" tIns="0" bIns="0">
+            <a:spAutoFit/>
+          </a:bodyPr>
+          <a:lstStyle/>
+          <a:p>
+            <a:pPr algn="ctr">
+              <a:lnSpc>
+                <a:spcPct val="125000"/>
+              </a:lnSpc>
+              <a:spcAft>
+                <a:spcPts val="0"/>
+              </a:spcAft>
+            </a:pPr>
+            <a:r>
+              <a:rPr sz="1050" b="1" i="0">
+                <a:solidFill>
+                  <a:srgbClr val="4A7331"/>
+                </a:solidFill>
+                <a:latin typeface="Karla"/>
+              </a:rPr>
+              <a:t>2</a:t>
+            </a:r>
+          </a:p>
+        </p:txBody>
+      </p:sp>
+      <p:sp>
+        <p:nvSpPr>
+          <p:cNvPr id="28" name="TextBox 27"/>
+          <p:cNvSpPr txBox="1"/>
+          <p:nvPr/>
+        </p:nvSpPr>
+        <p:spPr>
+          <a:xfrm>
+            <a:off x="3721608" y="3948684"/>
+            <a:ext cx="2011680" cy="350520"/>
+          </a:xfrm>
+          <a:prstGeom prst="rect">
+            <a:avLst/>
+          </a:prstGeom>
+          <a:noFill/>
+        </p:spPr>
+        <p:txBody>
+          <a:bodyPr wrap="square" anchor="ctr" lIns="0" rIns="0" tIns="0" bIns="0">
+            <a:spAutoFit/>
+          </a:bodyPr>
+          <a:lstStyle/>
+          <a:p>
+            <a:pPr algn="l">
+              <a:lnSpc>
+                <a:spcPct val="120000"/>
+              </a:lnSpc>
+              <a:spcAft>
+                <a:spcPts val="0"/>
+              </a:spcAft>
+            </a:pPr>
+            <a:r>
+              <a:rPr sz="1150" b="0" i="0">
+                <a:solidFill>
+                  <a:srgbClr val="FFFDF7"/>
+                </a:solidFill>
+                <a:latin typeface="Karla"/>
+              </a:rPr>
+              <a:t>Add one question of your own</a:t>
+            </a:r>
+          </a:p>
+        </p:txBody>
+      </p:sp>
+      <p:sp>
+        <p:nvSpPr>
+          <p:cNvPr id="29" name="Oval 28"/>
+          <p:cNvSpPr/>
+          <p:nvPr/>
+        </p:nvSpPr>
+        <p:spPr>
+          <a:xfrm>
+            <a:off x="5788152" y="3986783"/>
+            <a:ext cx="274320" cy="274320"/>
+          </a:xfrm>
+          <a:prstGeom prst="ellipse">
+            <a:avLst/>
+          </a:prstGeom>
+          <a:solidFill>
+            <a:srgbClr val="EEF4EA"/>
+          </a:solidFill>
+          <a:ln>
+            <a:noFill/>
+          </a:ln>
+          <a:effectLst/>
+        </p:spPr>
+        <p:style>
+          <a:lnRef idx="1">
+            <a:schemeClr val="accent1"/>
+          </a:lnRef>
+          <a:fillRef idx="3">
+            <a:schemeClr val="accent1"/>
+          </a:fillRef>
+          <a:effectRef idx="2">
+            <a:schemeClr val="accent1"/>
+          </a:effectRef>
+          <a:fontRef idx="minor">
+            <a:schemeClr val="lt1"/>
+          </a:fontRef>
+        </p:style>
+        <p:txBody>
+          <a:bodyPr rtlCol="0" anchor="ctr"/>
+          <a:lstStyle/>
+          <a:p>
+            <a:pPr algn="ctr"/>
+          </a:p>
+        </p:txBody>
+      </p:sp>
+      <p:sp>
+        <p:nvSpPr>
+          <p:cNvPr id="30" name="TextBox 29"/>
+          <p:cNvSpPr txBox="1"/>
+          <p:nvPr/>
+        </p:nvSpPr>
+        <p:spPr>
+          <a:xfrm>
+            <a:off x="5788152" y="4032504"/>
+            <a:ext cx="274320" cy="201168"/>
+          </a:xfrm>
+          <a:prstGeom prst="rect">
+            <a:avLst/>
+          </a:prstGeom>
+          <a:noFill/>
+        </p:spPr>
+        <p:txBody>
+          <a:bodyPr wrap="square" anchor="t" lIns="0" rIns="0" tIns="0" bIns="0">
+            <a:spAutoFit/>
+          </a:bodyPr>
+          <a:lstStyle/>
+          <a:p>
+            <a:pPr algn="ctr">
+              <a:lnSpc>
+                <a:spcPct val="125000"/>
+              </a:lnSpc>
+              <a:spcAft>
+                <a:spcPts val="0"/>
+              </a:spcAft>
+            </a:pPr>
+            <a:r>
+              <a:rPr sz="1050" b="1" i="0">
+                <a:solidFill>
+                  <a:srgbClr val="4A7331"/>
+                </a:solidFill>
+                <a:latin typeface="Karla"/>
+              </a:rPr>
+              <a:t>3</a:t>
+            </a:r>
+          </a:p>
+        </p:txBody>
+      </p:sp>
+      <p:sp>
+        <p:nvSpPr>
+          <p:cNvPr id="31" name="TextBox 30"/>
+          <p:cNvSpPr txBox="1"/>
+          <p:nvPr/>
+        </p:nvSpPr>
+        <p:spPr>
+          <a:xfrm>
+            <a:off x="6153912" y="3948684"/>
+            <a:ext cx="2011680" cy="350520"/>
+          </a:xfrm>
+          <a:prstGeom prst="rect">
+            <a:avLst/>
+          </a:prstGeom>
+          <a:noFill/>
+        </p:spPr>
+        <p:txBody>
+          <a:bodyPr wrap="square" anchor="ctr" lIns="0" rIns="0" tIns="0" bIns="0">
+            <a:spAutoFit/>
+          </a:bodyPr>
+          <a:lstStyle/>
+          <a:p>
+            <a:pPr algn="l">
+              <a:lnSpc>
+                <a:spcPct val="120000"/>
+              </a:lnSpc>
+              <a:spcAft>
+                <a:spcPts val="0"/>
+              </a:spcAft>
+            </a:pPr>
+            <a:r>
+              <a:rPr sz="1150" b="0" i="0">
+                <a:solidFill>
+                  <a:srgbClr val="FFFDF7"/>
+                </a:solidFill>
+                <a:latin typeface="Karla"/>
+              </a:rPr>
+              <a:t>Compare with the person next to you</a:t>
             </a:r>
           </a:p>
         </p:txBody>
       </p:sp>
       <p:pic>
         <p:nvPicPr>
-          <p:cNvPr id="14" name="Picture 13" descr="logo-mark.png"/>
+          <p:cNvPr id="32" name="Picture 31" descr="logo-mark.png"/>
           <p:cNvPicPr>
             <a:picLocks noChangeAspect="1"/>
           </p:cNvPicPr>
@@ -4619,7 +5789,7 @@
       </p:pic>
       <p:sp>
         <p:nvSpPr>
-          <p:cNvPr id="15" name="TextBox 14"/>
+          <p:cNvPr id="33" name="TextBox 32"/>
           <p:cNvSpPr txBox="1"/>
           <p:nvPr/>
         </p:nvSpPr>
@@ -4661,7 +5831,7 @@
       </p:sp>
       <p:sp>
         <p:nvSpPr>
-          <p:cNvPr id="16" name="TextBox 15"/>
+          <p:cNvPr id="34" name="TextBox 33"/>
           <p:cNvSpPr txBox="1"/>
           <p:nvPr/>
         </p:nvSpPr>
@@ -4800,111 +5970,21 @@
                 </a:solidFill>
                 <a:latin typeface="Karla"/>
               </a:rPr>
-              <a:t>QUESTIONS TO ASK AT AN OPEN EVENING  ·  MORNING 2</a:t>
-            </a:r>
-          </a:p>
-        </p:txBody>
-      </p:sp>
-      <p:sp>
-        <p:nvSpPr>
-          <p:cNvPr id="4" name="Rounded Rectangle 3"/>
-          <p:cNvSpPr/>
-          <p:nvPr/>
-        </p:nvSpPr>
-        <p:spPr>
-          <a:xfrm>
-            <a:off x="685800" y="841248"/>
-            <a:ext cx="7772400" cy="3017520"/>
-          </a:xfrm>
-          <a:prstGeom prst="roundRect">
-            <a:avLst>
-              <a:gd name="adj" fmla="val 6000"/>
-            </a:avLst>
-          </a:prstGeom>
-          <a:solidFill>
-            <a:srgbClr val="EEF4EA"/>
-          </a:solidFill>
-          <a:ln>
-            <a:noFill/>
-          </a:ln>
-          <a:effectLst/>
-        </p:spPr>
-        <p:style>
-          <a:lnRef idx="1">
-            <a:schemeClr val="accent1"/>
-          </a:lnRef>
-          <a:fillRef idx="3">
-            <a:schemeClr val="accent1"/>
-          </a:fillRef>
-          <a:effectRef idx="2">
-            <a:schemeClr val="accent1"/>
-          </a:effectRef>
-          <a:fontRef idx="minor">
-            <a:schemeClr val="lt1"/>
-          </a:fontRef>
-        </p:style>
-        <p:txBody>
-          <a:bodyPr rtlCol="0" anchor="ctr"/>
-          <a:lstStyle/>
-          <a:p>
-            <a:pPr algn="ctr"/>
-          </a:p>
-        </p:txBody>
-      </p:sp>
-      <p:sp>
-        <p:nvSpPr>
-          <p:cNvPr id="5" name="Rectangle 4"/>
-          <p:cNvSpPr/>
-          <p:nvPr/>
-        </p:nvSpPr>
-        <p:spPr>
-          <a:xfrm>
-            <a:off x="685800" y="841248"/>
-            <a:ext cx="7772400" cy="54864"/>
-          </a:xfrm>
-          <a:prstGeom prst="rect">
-            <a:avLst/>
-          </a:prstGeom>
-          <a:solidFill>
-            <a:srgbClr val="7BA060"/>
-          </a:solidFill>
-          <a:ln>
-            <a:noFill/>
-          </a:ln>
-          <a:effectLst/>
-        </p:spPr>
-        <p:style>
-          <a:lnRef idx="1">
-            <a:schemeClr val="accent1"/>
-          </a:lnRef>
-          <a:fillRef idx="3">
-            <a:schemeClr val="accent1"/>
-          </a:fillRef>
-          <a:effectRef idx="2">
-            <a:schemeClr val="accent1"/>
-          </a:effectRef>
-          <a:fontRef idx="minor">
-            <a:schemeClr val="lt1"/>
-          </a:fontRef>
-        </p:style>
-        <p:txBody>
-          <a:bodyPr rtlCol="0" anchor="ctr"/>
-          <a:lstStyle/>
-          <a:p>
-            <a:pPr algn="ctr"/>
-          </a:p>
-        </p:txBody>
-      </p:sp>
-      <p:sp>
-        <p:nvSpPr>
-          <p:cNvPr id="6" name="TextBox 5"/>
+              <a:t>QUESTIONS TO ASK AT AN OPEN EVENING  ·  TUESDAY</a:t>
+            </a:r>
+          </a:p>
+        </p:txBody>
+      </p:sp>
+      <p:sp>
+        <p:nvSpPr>
+          <p:cNvPr id="4" name="TextBox 3"/>
           <p:cNvSpPr txBox="1"/>
           <p:nvPr/>
         </p:nvSpPr>
         <p:spPr>
           <a:xfrm>
-            <a:off x="1051560" y="1115568"/>
-            <a:ext cx="7040880" cy="512064"/>
+            <a:off x="685800" y="749808"/>
+            <a:ext cx="7772400" cy="512064"/>
           </a:xfrm>
           <a:prstGeom prst="rect">
             <a:avLst/>
@@ -4926,33 +6006,77 @@
               </a:spcAft>
             </a:pPr>
             <a:r>
-              <a:rPr sz="2800" b="1" i="0">
-                <a:solidFill>
-                  <a:srgbClr val="4A7331"/>
+              <a:rPr sz="3000" b="1" i="0">
+                <a:solidFill>
+                  <a:srgbClr val="2E3436"/>
                 </a:solidFill>
                 <a:latin typeface="Libre Caslon Display"/>
               </a:rPr>
-              <a:t>About the day</a:t>
-            </a:r>
-          </a:p>
-        </p:txBody>
-      </p:sp>
-      <p:sp>
-        <p:nvSpPr>
-          <p:cNvPr id="7" name="Oval 6"/>
+              <a:t>Rank them</a:t>
+            </a:r>
+          </a:p>
+        </p:txBody>
+      </p:sp>
+      <p:sp>
+        <p:nvSpPr>
+          <p:cNvPr id="5" name="TextBox 4"/>
+          <p:cNvSpPr txBox="1"/>
+          <p:nvPr/>
+        </p:nvSpPr>
+        <p:spPr>
+          <a:xfrm>
+            <a:off x="685800" y="1280160"/>
+            <a:ext cx="7772400" cy="274320"/>
+          </a:xfrm>
+          <a:prstGeom prst="rect">
+            <a:avLst/>
+          </a:prstGeom>
+          <a:noFill/>
+        </p:spPr>
+        <p:txBody>
+          <a:bodyPr wrap="square" anchor="t" lIns="0" rIns="0" tIns="0" bIns="0">
+            <a:spAutoFit/>
+          </a:bodyPr>
+          <a:lstStyle/>
+          <a:p>
+            <a:pPr algn="l">
+              <a:lnSpc>
+                <a:spcPct val="125000"/>
+              </a:lnSpc>
+              <a:spcAft>
+                <a:spcPts val="0"/>
+              </a:spcAft>
+            </a:pPr>
+            <a:r>
+              <a:rPr sz="1400" b="0" i="1">
+                <a:solidFill>
+                  <a:srgbClr val="7BA060"/>
+                </a:solidFill>
+                <a:latin typeface="Karla"/>
+              </a:rPr>
+              <a:t>Money, getting there, and if it goes wrong.</a:t>
+            </a:r>
+          </a:p>
+        </p:txBody>
+      </p:sp>
+      <p:sp>
+        <p:nvSpPr>
+          <p:cNvPr id="6" name="Rounded Rectangle 5"/>
           <p:cNvSpPr/>
           <p:nvPr/>
         </p:nvSpPr>
         <p:spPr>
           <a:xfrm>
-            <a:off x="1106424" y="1883664"/>
-            <a:ext cx="109728" cy="109728"/>
-          </a:xfrm>
-          <a:prstGeom prst="ellipse">
-            <a:avLst/>
+            <a:off x="685800" y="1682496"/>
+            <a:ext cx="7772400" cy="1993392"/>
+          </a:xfrm>
+          <a:prstGeom prst="roundRect">
+            <a:avLst>
+              <a:gd name="adj" fmla="val 5000"/>
+            </a:avLst>
           </a:prstGeom>
           <a:solidFill>
-            <a:srgbClr val="7BA060"/>
+            <a:srgbClr val="EEF4EA"/>
           </a:solidFill>
           <a:ln>
             <a:noFill/>
@@ -4983,62 +6107,22 @@
       </p:sp>
       <p:sp>
         <p:nvSpPr>
-          <p:cNvPr id="8" name="TextBox 7"/>
-          <p:cNvSpPr txBox="1"/>
-          <p:nvPr/>
-        </p:nvSpPr>
-        <p:spPr>
-          <a:xfrm>
-            <a:off x="1399032" y="1810512"/>
-            <a:ext cx="6583680" cy="495300"/>
-          </a:xfrm>
-          <a:prstGeom prst="rect">
-            <a:avLst/>
-          </a:prstGeom>
-          <a:noFill/>
-        </p:spPr>
-        <p:txBody>
-          <a:bodyPr wrap="square" anchor="t" lIns="0" rIns="0" tIns="0" bIns="0">
-            <a:spAutoFit/>
-          </a:bodyPr>
-          <a:lstStyle/>
-          <a:p>
-            <a:pPr algn="l">
-              <a:lnSpc>
-                <a:spcPct val="130000"/>
-              </a:lnSpc>
-              <a:spcAft>
-                <a:spcPts val="0"/>
-              </a:spcAft>
-            </a:pPr>
-            <a:r>
-              <a:rPr sz="1500" b="0" i="0">
-                <a:solidFill>
-                  <a:srgbClr val="2E3436"/>
-                </a:solidFill>
-                <a:latin typeface="Karla"/>
-              </a:rPr>
-              <a:t>How many hours a week am I in lessons, and what happens in the gaps?</a:t>
-            </a:r>
-          </a:p>
-        </p:txBody>
-      </p:sp>
-      <p:sp>
-        <p:nvSpPr>
-          <p:cNvPr id="9" name="Oval 8"/>
+          <p:cNvPr id="7" name="Rounded Rectangle 6"/>
           <p:cNvSpPr/>
           <p:nvPr/>
         </p:nvSpPr>
         <p:spPr>
           <a:xfrm>
-            <a:off x="1106424" y="2525268"/>
-            <a:ext cx="109728" cy="109728"/>
-          </a:xfrm>
-          <a:prstGeom prst="ellipse">
-            <a:avLst/>
+            <a:off x="923544" y="1828800"/>
+            <a:ext cx="274320" cy="274320"/>
+          </a:xfrm>
+          <a:prstGeom prst="roundRect">
+            <a:avLst>
+              <a:gd name="adj" fmla="val 15000"/>
+            </a:avLst>
           </a:prstGeom>
           <a:solidFill>
-            <a:srgbClr val="7BA060"/>
+            <a:srgbClr val="FFFDF7"/>
           </a:solidFill>
           <a:ln>
             <a:noFill/>
@@ -5069,142 +6153,14 @@
       </p:sp>
       <p:sp>
         <p:nvSpPr>
-          <p:cNvPr id="10" name="TextBox 9"/>
+          <p:cNvPr id="8" name="TextBox 7"/>
           <p:cNvSpPr txBox="1"/>
           <p:nvPr/>
         </p:nvSpPr>
         <p:spPr>
           <a:xfrm>
-            <a:off x="1399032" y="2452116"/>
-            <a:ext cx="6583680" cy="247650"/>
-          </a:xfrm>
-          <a:prstGeom prst="rect">
-            <a:avLst/>
-          </a:prstGeom>
-          <a:noFill/>
-        </p:spPr>
-        <p:txBody>
-          <a:bodyPr wrap="square" anchor="t" lIns="0" rIns="0" tIns="0" bIns="0">
-            <a:spAutoFit/>
-          </a:bodyPr>
-          <a:lstStyle/>
-          <a:p>
-            <a:pPr algn="l">
-              <a:lnSpc>
-                <a:spcPct val="130000"/>
-              </a:lnSpc>
-              <a:spcAft>
-                <a:spcPts val="0"/>
-              </a:spcAft>
-            </a:pPr>
-            <a:r>
-              <a:rPr sz="1500" b="0" i="0">
-                <a:solidFill>
-                  <a:srgbClr val="2E3436"/>
-                </a:solidFill>
-                <a:latin typeface="Karla"/>
-              </a:rPr>
-              <a:t>Where do students go when they have a free period?</a:t>
-            </a:r>
-          </a:p>
-        </p:txBody>
-      </p:sp>
-      <p:sp>
-        <p:nvSpPr>
-          <p:cNvPr id="11" name="Oval 10"/>
-          <p:cNvSpPr/>
-          <p:nvPr/>
-        </p:nvSpPr>
-        <p:spPr>
-          <a:xfrm>
-            <a:off x="1106424" y="2919222"/>
-            <a:ext cx="109728" cy="109728"/>
-          </a:xfrm>
-          <a:prstGeom prst="ellipse">
-            <a:avLst/>
-          </a:prstGeom>
-          <a:solidFill>
-            <a:srgbClr val="7BA060"/>
-          </a:solidFill>
-          <a:ln>
-            <a:noFill/>
-          </a:ln>
-          <a:effectLst/>
-        </p:spPr>
-        <p:style>
-          <a:lnRef idx="1">
-            <a:schemeClr val="accent1"/>
-          </a:lnRef>
-          <a:fillRef idx="3">
-            <a:schemeClr val="accent1"/>
-          </a:fillRef>
-          <a:effectRef idx="2">
-            <a:schemeClr val="accent1"/>
-          </a:effectRef>
-          <a:fontRef idx="minor">
-            <a:schemeClr val="lt1"/>
-          </a:fontRef>
-        </p:style>
-        <p:txBody>
-          <a:bodyPr rtlCol="0" anchor="ctr"/>
-          <a:lstStyle/>
-          <a:p>
-            <a:pPr algn="ctr"/>
-          </a:p>
-        </p:txBody>
-      </p:sp>
-      <p:sp>
-        <p:nvSpPr>
-          <p:cNvPr id="12" name="TextBox 11"/>
-          <p:cNvSpPr txBox="1"/>
-          <p:nvPr/>
-        </p:nvSpPr>
-        <p:spPr>
-          <a:xfrm>
-            <a:off x="1399032" y="2846070"/>
-            <a:ext cx="6583680" cy="247650"/>
-          </a:xfrm>
-          <a:prstGeom prst="rect">
-            <a:avLst/>
-          </a:prstGeom>
-          <a:noFill/>
-        </p:spPr>
-        <p:txBody>
-          <a:bodyPr wrap="square" anchor="t" lIns="0" rIns="0" tIns="0" bIns="0">
-            <a:spAutoFit/>
-          </a:bodyPr>
-          <a:lstStyle/>
-          <a:p>
-            <a:pPr algn="l">
-              <a:lnSpc>
-                <a:spcPct val="130000"/>
-              </a:lnSpc>
-              <a:spcAft>
-                <a:spcPts val="0"/>
-              </a:spcAft>
-            </a:pPr>
-            <a:r>
-              <a:rPr sz="1500" b="0" i="0">
-                <a:solidFill>
-                  <a:srgbClr val="2E3436"/>
-                </a:solidFill>
-                <a:latin typeface="Karla"/>
-              </a:rPr>
-              <a:t>What time does the day start and finish?</a:t>
-            </a:r>
-          </a:p>
-        </p:txBody>
-      </p:sp>
-      <p:sp>
-        <p:nvSpPr>
-          <p:cNvPr id="13" name="TextBox 12"/>
-          <p:cNvSpPr txBox="1"/>
-          <p:nvPr/>
-        </p:nvSpPr>
-        <p:spPr>
-          <a:xfrm>
-            <a:off x="685800" y="4041648"/>
-            <a:ext cx="7772400" cy="310896"/>
+            <a:off x="923544" y="1869948"/>
+            <a:ext cx="274320" cy="201168"/>
           </a:xfrm>
           <a:prstGeom prst="rect">
             <a:avLst/>
@@ -5226,20 +6182,1012 @@
               </a:spcAft>
             </a:pPr>
             <a:r>
-              <a:rPr sz="1150" b="0" i="1">
-                <a:solidFill>
-                  <a:srgbClr val="5C6552"/>
+              <a:rPr sz="1100" b="1" i="0">
+                <a:solidFill>
+                  <a:srgbClr val="7BA060"/>
                 </a:solidFill>
                 <a:latin typeface="Karla"/>
               </a:rPr>
-              <a:t>Add one of your own. The best question is the one you actually want the answer to.</a:t>
+              <a:t>?</a:t>
+            </a:r>
+          </a:p>
+        </p:txBody>
+      </p:sp>
+      <p:sp>
+        <p:nvSpPr>
+          <p:cNvPr id="9" name="TextBox 8"/>
+          <p:cNvSpPr txBox="1"/>
+          <p:nvPr/>
+        </p:nvSpPr>
+        <p:spPr>
+          <a:xfrm>
+            <a:off x="1399032" y="1837943"/>
+            <a:ext cx="6766560" cy="274320"/>
+          </a:xfrm>
+          <a:prstGeom prst="rect">
+            <a:avLst/>
+          </a:prstGeom>
+          <a:noFill/>
+        </p:spPr>
+        <p:txBody>
+          <a:bodyPr wrap="square" anchor="t" lIns="0" rIns="0" tIns="0" bIns="0">
+            <a:spAutoFit/>
+          </a:bodyPr>
+          <a:lstStyle/>
+          <a:p>
+            <a:pPr algn="l">
+              <a:lnSpc>
+                <a:spcPct val="120000"/>
+              </a:lnSpc>
+              <a:spcAft>
+                <a:spcPts val="0"/>
+              </a:spcAft>
+            </a:pPr>
+            <a:r>
+              <a:rPr sz="1400" b="0" i="0">
+                <a:solidFill>
+                  <a:srgbClr val="2E3436"/>
+                </a:solidFill>
+                <a:latin typeface="Karla"/>
+              </a:rPr>
+              <a:t>Is there any cost for trips, books or equipment?</a:t>
+            </a:r>
+          </a:p>
+        </p:txBody>
+      </p:sp>
+      <p:sp>
+        <p:nvSpPr>
+          <p:cNvPr id="10" name="Rounded Rectangle 9"/>
+          <p:cNvSpPr/>
+          <p:nvPr/>
+        </p:nvSpPr>
+        <p:spPr>
+          <a:xfrm>
+            <a:off x="923544" y="2185416"/>
+            <a:ext cx="274320" cy="274320"/>
+          </a:xfrm>
+          <a:prstGeom prst="roundRect">
+            <a:avLst>
+              <a:gd name="adj" fmla="val 15000"/>
+            </a:avLst>
+          </a:prstGeom>
+          <a:solidFill>
+            <a:srgbClr val="FFFDF7"/>
+          </a:solidFill>
+          <a:ln>
+            <a:noFill/>
+          </a:ln>
+          <a:effectLst/>
+        </p:spPr>
+        <p:style>
+          <a:lnRef idx="1">
+            <a:schemeClr val="accent1"/>
+          </a:lnRef>
+          <a:fillRef idx="3">
+            <a:schemeClr val="accent1"/>
+          </a:fillRef>
+          <a:effectRef idx="2">
+            <a:schemeClr val="accent1"/>
+          </a:effectRef>
+          <a:fontRef idx="minor">
+            <a:schemeClr val="lt1"/>
+          </a:fontRef>
+        </p:style>
+        <p:txBody>
+          <a:bodyPr rtlCol="0" anchor="ctr"/>
+          <a:lstStyle/>
+          <a:p>
+            <a:pPr algn="ctr"/>
+          </a:p>
+        </p:txBody>
+      </p:sp>
+      <p:sp>
+        <p:nvSpPr>
+          <p:cNvPr id="11" name="TextBox 10"/>
+          <p:cNvSpPr txBox="1"/>
+          <p:nvPr/>
+        </p:nvSpPr>
+        <p:spPr>
+          <a:xfrm>
+            <a:off x="923544" y="2226564"/>
+            <a:ext cx="274320" cy="201168"/>
+          </a:xfrm>
+          <a:prstGeom prst="rect">
+            <a:avLst/>
+          </a:prstGeom>
+          <a:noFill/>
+        </p:spPr>
+        <p:txBody>
+          <a:bodyPr wrap="square" anchor="t" lIns="0" rIns="0" tIns="0" bIns="0">
+            <a:spAutoFit/>
+          </a:bodyPr>
+          <a:lstStyle/>
+          <a:p>
+            <a:pPr algn="ctr">
+              <a:lnSpc>
+                <a:spcPct val="125000"/>
+              </a:lnSpc>
+              <a:spcAft>
+                <a:spcPts val="0"/>
+              </a:spcAft>
+            </a:pPr>
+            <a:r>
+              <a:rPr sz="1100" b="1" i="0">
+                <a:solidFill>
+                  <a:srgbClr val="7BA060"/>
+                </a:solidFill>
+                <a:latin typeface="Karla"/>
+              </a:rPr>
+              <a:t>?</a:t>
+            </a:r>
+          </a:p>
+        </p:txBody>
+      </p:sp>
+      <p:sp>
+        <p:nvSpPr>
+          <p:cNvPr id="12" name="TextBox 11"/>
+          <p:cNvSpPr txBox="1"/>
+          <p:nvPr/>
+        </p:nvSpPr>
+        <p:spPr>
+          <a:xfrm>
+            <a:off x="1399032" y="2194560"/>
+            <a:ext cx="6766560" cy="274320"/>
+          </a:xfrm>
+          <a:prstGeom prst="rect">
+            <a:avLst/>
+          </a:prstGeom>
+          <a:noFill/>
+        </p:spPr>
+        <p:txBody>
+          <a:bodyPr wrap="square" anchor="t" lIns="0" rIns="0" tIns="0" bIns="0">
+            <a:spAutoFit/>
+          </a:bodyPr>
+          <a:lstStyle/>
+          <a:p>
+            <a:pPr algn="l">
+              <a:lnSpc>
+                <a:spcPct val="120000"/>
+              </a:lnSpc>
+              <a:spcAft>
+                <a:spcPts val="0"/>
+              </a:spcAft>
+            </a:pPr>
+            <a:r>
+              <a:rPr sz="1400" b="0" i="0">
+                <a:solidFill>
+                  <a:srgbClr val="2E3436"/>
+                </a:solidFill>
+                <a:latin typeface="Karla"/>
+              </a:rPr>
+              <a:t>Is there a bursary or any help with costs, and how do I apply?</a:t>
+            </a:r>
+          </a:p>
+        </p:txBody>
+      </p:sp>
+      <p:sp>
+        <p:nvSpPr>
+          <p:cNvPr id="13" name="Rounded Rectangle 12"/>
+          <p:cNvSpPr/>
+          <p:nvPr/>
+        </p:nvSpPr>
+        <p:spPr>
+          <a:xfrm>
+            <a:off x="923544" y="2542032"/>
+            <a:ext cx="274320" cy="274320"/>
+          </a:xfrm>
+          <a:prstGeom prst="roundRect">
+            <a:avLst>
+              <a:gd name="adj" fmla="val 15000"/>
+            </a:avLst>
+          </a:prstGeom>
+          <a:solidFill>
+            <a:srgbClr val="FFFDF7"/>
+          </a:solidFill>
+          <a:ln>
+            <a:noFill/>
+          </a:ln>
+          <a:effectLst/>
+        </p:spPr>
+        <p:style>
+          <a:lnRef idx="1">
+            <a:schemeClr val="accent1"/>
+          </a:lnRef>
+          <a:fillRef idx="3">
+            <a:schemeClr val="accent1"/>
+          </a:fillRef>
+          <a:effectRef idx="2">
+            <a:schemeClr val="accent1"/>
+          </a:effectRef>
+          <a:fontRef idx="minor">
+            <a:schemeClr val="lt1"/>
+          </a:fontRef>
+        </p:style>
+        <p:txBody>
+          <a:bodyPr rtlCol="0" anchor="ctr"/>
+          <a:lstStyle/>
+          <a:p>
+            <a:pPr algn="ctr"/>
+          </a:p>
+        </p:txBody>
+      </p:sp>
+      <p:sp>
+        <p:nvSpPr>
+          <p:cNvPr id="14" name="TextBox 13"/>
+          <p:cNvSpPr txBox="1"/>
+          <p:nvPr/>
+        </p:nvSpPr>
+        <p:spPr>
+          <a:xfrm>
+            <a:off x="923544" y="2583180"/>
+            <a:ext cx="274320" cy="201168"/>
+          </a:xfrm>
+          <a:prstGeom prst="rect">
+            <a:avLst/>
+          </a:prstGeom>
+          <a:noFill/>
+        </p:spPr>
+        <p:txBody>
+          <a:bodyPr wrap="square" anchor="t" lIns="0" rIns="0" tIns="0" bIns="0">
+            <a:spAutoFit/>
+          </a:bodyPr>
+          <a:lstStyle/>
+          <a:p>
+            <a:pPr algn="ctr">
+              <a:lnSpc>
+                <a:spcPct val="125000"/>
+              </a:lnSpc>
+              <a:spcAft>
+                <a:spcPts val="0"/>
+              </a:spcAft>
+            </a:pPr>
+            <a:r>
+              <a:rPr sz="1100" b="1" i="0">
+                <a:solidFill>
+                  <a:srgbClr val="7BA060"/>
+                </a:solidFill>
+                <a:latin typeface="Karla"/>
+              </a:rPr>
+              <a:t>?</a:t>
+            </a:r>
+          </a:p>
+        </p:txBody>
+      </p:sp>
+      <p:sp>
+        <p:nvSpPr>
+          <p:cNvPr id="15" name="TextBox 14"/>
+          <p:cNvSpPr txBox="1"/>
+          <p:nvPr/>
+        </p:nvSpPr>
+        <p:spPr>
+          <a:xfrm>
+            <a:off x="1399032" y="2551176"/>
+            <a:ext cx="6766560" cy="274320"/>
+          </a:xfrm>
+          <a:prstGeom prst="rect">
+            <a:avLst/>
+          </a:prstGeom>
+          <a:noFill/>
+        </p:spPr>
+        <p:txBody>
+          <a:bodyPr wrap="square" anchor="t" lIns="0" rIns="0" tIns="0" bIns="0">
+            <a:spAutoFit/>
+          </a:bodyPr>
+          <a:lstStyle/>
+          <a:p>
+            <a:pPr algn="l">
+              <a:lnSpc>
+                <a:spcPct val="120000"/>
+              </a:lnSpc>
+              <a:spcAft>
+                <a:spcPts val="0"/>
+              </a:spcAft>
+            </a:pPr>
+            <a:r>
+              <a:rPr sz="1400" b="0" i="0">
+                <a:solidFill>
+                  <a:srgbClr val="2E3436"/>
+                </a:solidFill>
+                <a:latin typeface="Karla"/>
+              </a:rPr>
+              <a:t>How do most students get here in the morning?</a:t>
+            </a:r>
+          </a:p>
+        </p:txBody>
+      </p:sp>
+      <p:sp>
+        <p:nvSpPr>
+          <p:cNvPr id="16" name="Rounded Rectangle 15"/>
+          <p:cNvSpPr/>
+          <p:nvPr/>
+        </p:nvSpPr>
+        <p:spPr>
+          <a:xfrm>
+            <a:off x="923544" y="2898648"/>
+            <a:ext cx="274320" cy="274320"/>
+          </a:xfrm>
+          <a:prstGeom prst="roundRect">
+            <a:avLst>
+              <a:gd name="adj" fmla="val 15000"/>
+            </a:avLst>
+          </a:prstGeom>
+          <a:solidFill>
+            <a:srgbClr val="FFFDF7"/>
+          </a:solidFill>
+          <a:ln>
+            <a:noFill/>
+          </a:ln>
+          <a:effectLst/>
+        </p:spPr>
+        <p:style>
+          <a:lnRef idx="1">
+            <a:schemeClr val="accent1"/>
+          </a:lnRef>
+          <a:fillRef idx="3">
+            <a:schemeClr val="accent1"/>
+          </a:fillRef>
+          <a:effectRef idx="2">
+            <a:schemeClr val="accent1"/>
+          </a:effectRef>
+          <a:fontRef idx="minor">
+            <a:schemeClr val="lt1"/>
+          </a:fontRef>
+        </p:style>
+        <p:txBody>
+          <a:bodyPr rtlCol="0" anchor="ctr"/>
+          <a:lstStyle/>
+          <a:p>
+            <a:pPr algn="ctr"/>
+          </a:p>
+        </p:txBody>
+      </p:sp>
+      <p:sp>
+        <p:nvSpPr>
+          <p:cNvPr id="17" name="TextBox 16"/>
+          <p:cNvSpPr txBox="1"/>
+          <p:nvPr/>
+        </p:nvSpPr>
+        <p:spPr>
+          <a:xfrm>
+            <a:off x="923544" y="2939796"/>
+            <a:ext cx="274320" cy="201168"/>
+          </a:xfrm>
+          <a:prstGeom prst="rect">
+            <a:avLst/>
+          </a:prstGeom>
+          <a:noFill/>
+        </p:spPr>
+        <p:txBody>
+          <a:bodyPr wrap="square" anchor="t" lIns="0" rIns="0" tIns="0" bIns="0">
+            <a:spAutoFit/>
+          </a:bodyPr>
+          <a:lstStyle/>
+          <a:p>
+            <a:pPr algn="ctr">
+              <a:lnSpc>
+                <a:spcPct val="125000"/>
+              </a:lnSpc>
+              <a:spcAft>
+                <a:spcPts val="0"/>
+              </a:spcAft>
+            </a:pPr>
+            <a:r>
+              <a:rPr sz="1100" b="1" i="0">
+                <a:solidFill>
+                  <a:srgbClr val="7BA060"/>
+                </a:solidFill>
+                <a:latin typeface="Karla"/>
+              </a:rPr>
+              <a:t>?</a:t>
+            </a:r>
+          </a:p>
+        </p:txBody>
+      </p:sp>
+      <p:sp>
+        <p:nvSpPr>
+          <p:cNvPr id="18" name="TextBox 17"/>
+          <p:cNvSpPr txBox="1"/>
+          <p:nvPr/>
+        </p:nvSpPr>
+        <p:spPr>
+          <a:xfrm>
+            <a:off x="1399032" y="2907792"/>
+            <a:ext cx="6766560" cy="274320"/>
+          </a:xfrm>
+          <a:prstGeom prst="rect">
+            <a:avLst/>
+          </a:prstGeom>
+          <a:noFill/>
+        </p:spPr>
+        <p:txBody>
+          <a:bodyPr wrap="square" anchor="t" lIns="0" rIns="0" tIns="0" bIns="0">
+            <a:spAutoFit/>
+          </a:bodyPr>
+          <a:lstStyle/>
+          <a:p>
+            <a:pPr algn="l">
+              <a:lnSpc>
+                <a:spcPct val="120000"/>
+              </a:lnSpc>
+              <a:spcAft>
+                <a:spcPts val="0"/>
+              </a:spcAft>
+            </a:pPr>
+            <a:r>
+              <a:rPr sz="1400" b="0" i="0">
+                <a:solidFill>
+                  <a:srgbClr val="2E3436"/>
+                </a:solidFill>
+                <a:latin typeface="Karla"/>
+              </a:rPr>
+              <a:t>Can I change courses, and until when?</a:t>
+            </a:r>
+          </a:p>
+        </p:txBody>
+      </p:sp>
+      <p:sp>
+        <p:nvSpPr>
+          <p:cNvPr id="19" name="Rounded Rectangle 18"/>
+          <p:cNvSpPr/>
+          <p:nvPr/>
+        </p:nvSpPr>
+        <p:spPr>
+          <a:xfrm>
+            <a:off x="923544" y="3255264"/>
+            <a:ext cx="274320" cy="274320"/>
+          </a:xfrm>
+          <a:prstGeom prst="roundRect">
+            <a:avLst>
+              <a:gd name="adj" fmla="val 15000"/>
+            </a:avLst>
+          </a:prstGeom>
+          <a:solidFill>
+            <a:srgbClr val="FFFDF7"/>
+          </a:solidFill>
+          <a:ln>
+            <a:noFill/>
+          </a:ln>
+          <a:effectLst/>
+        </p:spPr>
+        <p:style>
+          <a:lnRef idx="1">
+            <a:schemeClr val="accent1"/>
+          </a:lnRef>
+          <a:fillRef idx="3">
+            <a:schemeClr val="accent1"/>
+          </a:fillRef>
+          <a:effectRef idx="2">
+            <a:schemeClr val="accent1"/>
+          </a:effectRef>
+          <a:fontRef idx="minor">
+            <a:schemeClr val="lt1"/>
+          </a:fontRef>
+        </p:style>
+        <p:txBody>
+          <a:bodyPr rtlCol="0" anchor="ctr"/>
+          <a:lstStyle/>
+          <a:p>
+            <a:pPr algn="ctr"/>
+          </a:p>
+        </p:txBody>
+      </p:sp>
+      <p:sp>
+        <p:nvSpPr>
+          <p:cNvPr id="20" name="TextBox 19"/>
+          <p:cNvSpPr txBox="1"/>
+          <p:nvPr/>
+        </p:nvSpPr>
+        <p:spPr>
+          <a:xfrm>
+            <a:off x="923544" y="3296412"/>
+            <a:ext cx="274320" cy="201168"/>
+          </a:xfrm>
+          <a:prstGeom prst="rect">
+            <a:avLst/>
+          </a:prstGeom>
+          <a:noFill/>
+        </p:spPr>
+        <p:txBody>
+          <a:bodyPr wrap="square" anchor="t" lIns="0" rIns="0" tIns="0" bIns="0">
+            <a:spAutoFit/>
+          </a:bodyPr>
+          <a:lstStyle/>
+          <a:p>
+            <a:pPr algn="ctr">
+              <a:lnSpc>
+                <a:spcPct val="125000"/>
+              </a:lnSpc>
+              <a:spcAft>
+                <a:spcPts val="0"/>
+              </a:spcAft>
+            </a:pPr>
+            <a:r>
+              <a:rPr sz="1100" b="1" i="0">
+                <a:solidFill>
+                  <a:srgbClr val="7BA060"/>
+                </a:solidFill>
+                <a:latin typeface="Karla"/>
+              </a:rPr>
+              <a:t>?</a:t>
+            </a:r>
+          </a:p>
+        </p:txBody>
+      </p:sp>
+      <p:sp>
+        <p:nvSpPr>
+          <p:cNvPr id="21" name="TextBox 20"/>
+          <p:cNvSpPr txBox="1"/>
+          <p:nvPr/>
+        </p:nvSpPr>
+        <p:spPr>
+          <a:xfrm>
+            <a:off x="1399032" y="3264408"/>
+            <a:ext cx="6766560" cy="274320"/>
+          </a:xfrm>
+          <a:prstGeom prst="rect">
+            <a:avLst/>
+          </a:prstGeom>
+          <a:noFill/>
+        </p:spPr>
+        <p:txBody>
+          <a:bodyPr wrap="square" anchor="t" lIns="0" rIns="0" tIns="0" bIns="0">
+            <a:spAutoFit/>
+          </a:bodyPr>
+          <a:lstStyle/>
+          <a:p>
+            <a:pPr algn="l">
+              <a:lnSpc>
+                <a:spcPct val="120000"/>
+              </a:lnSpc>
+              <a:spcAft>
+                <a:spcPts val="0"/>
+              </a:spcAft>
+            </a:pPr>
+            <a:r>
+              <a:rPr sz="1400" b="0" i="0">
+                <a:solidFill>
+                  <a:srgbClr val="2E3436"/>
+                </a:solidFill>
+                <a:latin typeface="Karla"/>
+              </a:rPr>
+              <a:t>What support is there if my grades are not what I hoped?</a:t>
+            </a:r>
+          </a:p>
+        </p:txBody>
+      </p:sp>
+      <p:sp>
+        <p:nvSpPr>
+          <p:cNvPr id="22" name="Rounded Rectangle 21"/>
+          <p:cNvSpPr/>
+          <p:nvPr/>
+        </p:nvSpPr>
+        <p:spPr>
+          <a:xfrm>
+            <a:off x="685800" y="3822191"/>
+            <a:ext cx="7772400" cy="603504"/>
+          </a:xfrm>
+          <a:prstGeom prst="roundRect">
+            <a:avLst>
+              <a:gd name="adj" fmla="val 12000"/>
+            </a:avLst>
+          </a:prstGeom>
+          <a:solidFill>
+            <a:srgbClr val="4A7331"/>
+          </a:solidFill>
+          <a:ln>
+            <a:noFill/>
+          </a:ln>
+          <a:effectLst/>
+        </p:spPr>
+        <p:style>
+          <a:lnRef idx="1">
+            <a:schemeClr val="accent1"/>
+          </a:lnRef>
+          <a:fillRef idx="3">
+            <a:schemeClr val="accent1"/>
+          </a:fillRef>
+          <a:effectRef idx="2">
+            <a:schemeClr val="accent1"/>
+          </a:effectRef>
+          <a:fontRef idx="minor">
+            <a:schemeClr val="lt1"/>
+          </a:fontRef>
+        </p:style>
+        <p:txBody>
+          <a:bodyPr rtlCol="0" anchor="ctr"/>
+          <a:lstStyle/>
+          <a:p>
+            <a:pPr algn="ctr"/>
+          </a:p>
+        </p:txBody>
+      </p:sp>
+      <p:sp>
+        <p:nvSpPr>
+          <p:cNvPr id="23" name="Oval 22"/>
+          <p:cNvSpPr/>
+          <p:nvPr/>
+        </p:nvSpPr>
+        <p:spPr>
+          <a:xfrm>
+            <a:off x="923544" y="3986783"/>
+            <a:ext cx="274320" cy="274320"/>
+          </a:xfrm>
+          <a:prstGeom prst="ellipse">
+            <a:avLst/>
+          </a:prstGeom>
+          <a:solidFill>
+            <a:srgbClr val="EEF4EA"/>
+          </a:solidFill>
+          <a:ln>
+            <a:noFill/>
+          </a:ln>
+          <a:effectLst/>
+        </p:spPr>
+        <p:style>
+          <a:lnRef idx="1">
+            <a:schemeClr val="accent1"/>
+          </a:lnRef>
+          <a:fillRef idx="3">
+            <a:schemeClr val="accent1"/>
+          </a:fillRef>
+          <a:effectRef idx="2">
+            <a:schemeClr val="accent1"/>
+          </a:effectRef>
+          <a:fontRef idx="minor">
+            <a:schemeClr val="lt1"/>
+          </a:fontRef>
+        </p:style>
+        <p:txBody>
+          <a:bodyPr rtlCol="0" anchor="ctr"/>
+          <a:lstStyle/>
+          <a:p>
+            <a:pPr algn="ctr"/>
+          </a:p>
+        </p:txBody>
+      </p:sp>
+      <p:sp>
+        <p:nvSpPr>
+          <p:cNvPr id="24" name="TextBox 23"/>
+          <p:cNvSpPr txBox="1"/>
+          <p:nvPr/>
+        </p:nvSpPr>
+        <p:spPr>
+          <a:xfrm>
+            <a:off x="923544" y="4032504"/>
+            <a:ext cx="274320" cy="201168"/>
+          </a:xfrm>
+          <a:prstGeom prst="rect">
+            <a:avLst/>
+          </a:prstGeom>
+          <a:noFill/>
+        </p:spPr>
+        <p:txBody>
+          <a:bodyPr wrap="square" anchor="t" lIns="0" rIns="0" tIns="0" bIns="0">
+            <a:spAutoFit/>
+          </a:bodyPr>
+          <a:lstStyle/>
+          <a:p>
+            <a:pPr algn="ctr">
+              <a:lnSpc>
+                <a:spcPct val="125000"/>
+              </a:lnSpc>
+              <a:spcAft>
+                <a:spcPts val="0"/>
+              </a:spcAft>
+            </a:pPr>
+            <a:r>
+              <a:rPr sz="1050" b="1" i="0">
+                <a:solidFill>
+                  <a:srgbClr val="4A7331"/>
+                </a:solidFill>
+                <a:latin typeface="Karla"/>
+              </a:rPr>
+              <a:t>1</a:t>
+            </a:r>
+          </a:p>
+        </p:txBody>
+      </p:sp>
+      <p:sp>
+        <p:nvSpPr>
+          <p:cNvPr id="25" name="TextBox 24"/>
+          <p:cNvSpPr txBox="1"/>
+          <p:nvPr/>
+        </p:nvSpPr>
+        <p:spPr>
+          <a:xfrm>
+            <a:off x="1289304" y="3948684"/>
+            <a:ext cx="2011680" cy="350520"/>
+          </a:xfrm>
+          <a:prstGeom prst="rect">
+            <a:avLst/>
+          </a:prstGeom>
+          <a:noFill/>
+        </p:spPr>
+        <p:txBody>
+          <a:bodyPr wrap="square" anchor="ctr" lIns="0" rIns="0" tIns="0" bIns="0">
+            <a:spAutoFit/>
+          </a:bodyPr>
+          <a:lstStyle/>
+          <a:p>
+            <a:pPr algn="l">
+              <a:lnSpc>
+                <a:spcPct val="120000"/>
+              </a:lnSpc>
+              <a:spcAft>
+                <a:spcPts val="0"/>
+              </a:spcAft>
+            </a:pPr>
+            <a:r>
+              <a:rPr sz="1150" b="0" i="0">
+                <a:solidFill>
+                  <a:srgbClr val="FFFDF7"/>
+                </a:solidFill>
+                <a:latin typeface="Karla"/>
+              </a:rPr>
+              <a:t>Rank them on your sheet, 1 for must ask</a:t>
+            </a:r>
+          </a:p>
+        </p:txBody>
+      </p:sp>
+      <p:sp>
+        <p:nvSpPr>
+          <p:cNvPr id="26" name="Oval 25"/>
+          <p:cNvSpPr/>
+          <p:nvPr/>
+        </p:nvSpPr>
+        <p:spPr>
+          <a:xfrm>
+            <a:off x="3355848" y="3986783"/>
+            <a:ext cx="274320" cy="274320"/>
+          </a:xfrm>
+          <a:prstGeom prst="ellipse">
+            <a:avLst/>
+          </a:prstGeom>
+          <a:solidFill>
+            <a:srgbClr val="EEF4EA"/>
+          </a:solidFill>
+          <a:ln>
+            <a:noFill/>
+          </a:ln>
+          <a:effectLst/>
+        </p:spPr>
+        <p:style>
+          <a:lnRef idx="1">
+            <a:schemeClr val="accent1"/>
+          </a:lnRef>
+          <a:fillRef idx="3">
+            <a:schemeClr val="accent1"/>
+          </a:fillRef>
+          <a:effectRef idx="2">
+            <a:schemeClr val="accent1"/>
+          </a:effectRef>
+          <a:fontRef idx="minor">
+            <a:schemeClr val="lt1"/>
+          </a:fontRef>
+        </p:style>
+        <p:txBody>
+          <a:bodyPr rtlCol="0" anchor="ctr"/>
+          <a:lstStyle/>
+          <a:p>
+            <a:pPr algn="ctr"/>
+          </a:p>
+        </p:txBody>
+      </p:sp>
+      <p:sp>
+        <p:nvSpPr>
+          <p:cNvPr id="27" name="TextBox 26"/>
+          <p:cNvSpPr txBox="1"/>
+          <p:nvPr/>
+        </p:nvSpPr>
+        <p:spPr>
+          <a:xfrm>
+            <a:off x="3355848" y="4032504"/>
+            <a:ext cx="274320" cy="201168"/>
+          </a:xfrm>
+          <a:prstGeom prst="rect">
+            <a:avLst/>
+          </a:prstGeom>
+          <a:noFill/>
+        </p:spPr>
+        <p:txBody>
+          <a:bodyPr wrap="square" anchor="t" lIns="0" rIns="0" tIns="0" bIns="0">
+            <a:spAutoFit/>
+          </a:bodyPr>
+          <a:lstStyle/>
+          <a:p>
+            <a:pPr algn="ctr">
+              <a:lnSpc>
+                <a:spcPct val="125000"/>
+              </a:lnSpc>
+              <a:spcAft>
+                <a:spcPts val="0"/>
+              </a:spcAft>
+            </a:pPr>
+            <a:r>
+              <a:rPr sz="1050" b="1" i="0">
+                <a:solidFill>
+                  <a:srgbClr val="4A7331"/>
+                </a:solidFill>
+                <a:latin typeface="Karla"/>
+              </a:rPr>
+              <a:t>2</a:t>
+            </a:r>
+          </a:p>
+        </p:txBody>
+      </p:sp>
+      <p:sp>
+        <p:nvSpPr>
+          <p:cNvPr id="28" name="TextBox 27"/>
+          <p:cNvSpPr txBox="1"/>
+          <p:nvPr/>
+        </p:nvSpPr>
+        <p:spPr>
+          <a:xfrm>
+            <a:off x="3721608" y="3948684"/>
+            <a:ext cx="2011680" cy="350520"/>
+          </a:xfrm>
+          <a:prstGeom prst="rect">
+            <a:avLst/>
+          </a:prstGeom>
+          <a:noFill/>
+        </p:spPr>
+        <p:txBody>
+          <a:bodyPr wrap="square" anchor="ctr" lIns="0" rIns="0" tIns="0" bIns="0">
+            <a:spAutoFit/>
+          </a:bodyPr>
+          <a:lstStyle/>
+          <a:p>
+            <a:pPr algn="l">
+              <a:lnSpc>
+                <a:spcPct val="120000"/>
+              </a:lnSpc>
+              <a:spcAft>
+                <a:spcPts val="0"/>
+              </a:spcAft>
+            </a:pPr>
+            <a:r>
+              <a:rPr sz="1150" b="0" i="0">
+                <a:solidFill>
+                  <a:srgbClr val="FFFDF7"/>
+                </a:solidFill>
+                <a:latin typeface="Karla"/>
+              </a:rPr>
+              <a:t>Add one question of your own</a:t>
+            </a:r>
+          </a:p>
+        </p:txBody>
+      </p:sp>
+      <p:sp>
+        <p:nvSpPr>
+          <p:cNvPr id="29" name="Oval 28"/>
+          <p:cNvSpPr/>
+          <p:nvPr/>
+        </p:nvSpPr>
+        <p:spPr>
+          <a:xfrm>
+            <a:off x="5788152" y="3986783"/>
+            <a:ext cx="274320" cy="274320"/>
+          </a:xfrm>
+          <a:prstGeom prst="ellipse">
+            <a:avLst/>
+          </a:prstGeom>
+          <a:solidFill>
+            <a:srgbClr val="EEF4EA"/>
+          </a:solidFill>
+          <a:ln>
+            <a:noFill/>
+          </a:ln>
+          <a:effectLst/>
+        </p:spPr>
+        <p:style>
+          <a:lnRef idx="1">
+            <a:schemeClr val="accent1"/>
+          </a:lnRef>
+          <a:fillRef idx="3">
+            <a:schemeClr val="accent1"/>
+          </a:fillRef>
+          <a:effectRef idx="2">
+            <a:schemeClr val="accent1"/>
+          </a:effectRef>
+          <a:fontRef idx="minor">
+            <a:schemeClr val="lt1"/>
+          </a:fontRef>
+        </p:style>
+        <p:txBody>
+          <a:bodyPr rtlCol="0" anchor="ctr"/>
+          <a:lstStyle/>
+          <a:p>
+            <a:pPr algn="ctr"/>
+          </a:p>
+        </p:txBody>
+      </p:sp>
+      <p:sp>
+        <p:nvSpPr>
+          <p:cNvPr id="30" name="TextBox 29"/>
+          <p:cNvSpPr txBox="1"/>
+          <p:nvPr/>
+        </p:nvSpPr>
+        <p:spPr>
+          <a:xfrm>
+            <a:off x="5788152" y="4032504"/>
+            <a:ext cx="274320" cy="201168"/>
+          </a:xfrm>
+          <a:prstGeom prst="rect">
+            <a:avLst/>
+          </a:prstGeom>
+          <a:noFill/>
+        </p:spPr>
+        <p:txBody>
+          <a:bodyPr wrap="square" anchor="t" lIns="0" rIns="0" tIns="0" bIns="0">
+            <a:spAutoFit/>
+          </a:bodyPr>
+          <a:lstStyle/>
+          <a:p>
+            <a:pPr algn="ctr">
+              <a:lnSpc>
+                <a:spcPct val="125000"/>
+              </a:lnSpc>
+              <a:spcAft>
+                <a:spcPts val="0"/>
+              </a:spcAft>
+            </a:pPr>
+            <a:r>
+              <a:rPr sz="1050" b="1" i="0">
+                <a:solidFill>
+                  <a:srgbClr val="4A7331"/>
+                </a:solidFill>
+                <a:latin typeface="Karla"/>
+              </a:rPr>
+              <a:t>3</a:t>
+            </a:r>
+          </a:p>
+        </p:txBody>
+      </p:sp>
+      <p:sp>
+        <p:nvSpPr>
+          <p:cNvPr id="31" name="TextBox 30"/>
+          <p:cNvSpPr txBox="1"/>
+          <p:nvPr/>
+        </p:nvSpPr>
+        <p:spPr>
+          <a:xfrm>
+            <a:off x="6153912" y="3948684"/>
+            <a:ext cx="2011680" cy="350520"/>
+          </a:xfrm>
+          <a:prstGeom prst="rect">
+            <a:avLst/>
+          </a:prstGeom>
+          <a:noFill/>
+        </p:spPr>
+        <p:txBody>
+          <a:bodyPr wrap="square" anchor="ctr" lIns="0" rIns="0" tIns="0" bIns="0">
+            <a:spAutoFit/>
+          </a:bodyPr>
+          <a:lstStyle/>
+          <a:p>
+            <a:pPr algn="l">
+              <a:lnSpc>
+                <a:spcPct val="120000"/>
+              </a:lnSpc>
+              <a:spcAft>
+                <a:spcPts val="0"/>
+              </a:spcAft>
+            </a:pPr>
+            <a:r>
+              <a:rPr sz="1150" b="0" i="0">
+                <a:solidFill>
+                  <a:srgbClr val="FFFDF7"/>
+                </a:solidFill>
+                <a:latin typeface="Karla"/>
+              </a:rPr>
+              <a:t>Copy your top five from the week onto the back</a:t>
             </a:r>
           </a:p>
         </p:txBody>
       </p:sp>
       <p:pic>
         <p:nvPicPr>
-          <p:cNvPr id="14" name="Picture 13" descr="logo-mark.png"/>
+          <p:cNvPr id="32" name="Picture 31" descr="logo-mark.png"/>
           <p:cNvPicPr>
             <a:picLocks noChangeAspect="1"/>
           </p:cNvPicPr>
@@ -5263,7 +7211,7 @@
       </p:pic>
       <p:sp>
         <p:nvSpPr>
-          <p:cNvPr id="15" name="TextBox 14"/>
+          <p:cNvPr id="33" name="TextBox 32"/>
           <p:cNvSpPr txBox="1"/>
           <p:nvPr/>
         </p:nvSpPr>
@@ -5305,7 +7253,7 @@
       </p:sp>
       <p:sp>
         <p:nvSpPr>
-          <p:cNvPr id="16" name="TextBox 15"/>
+          <p:cNvPr id="34" name="TextBox 33"/>
           <p:cNvSpPr txBox="1"/>
           <p:nvPr/>
         </p:nvSpPr>
@@ -5444,111 +7392,21 @@
                 </a:solidFill>
                 <a:latin typeface="Karla"/>
               </a:rPr>
-              <a:t>QUESTIONS TO ASK AT AN OPEN EVENING  ·  MORNING 3</a:t>
-            </a:r>
-          </a:p>
-        </p:txBody>
-      </p:sp>
-      <p:sp>
-        <p:nvSpPr>
-          <p:cNvPr id="4" name="Rounded Rectangle 3"/>
-          <p:cNvSpPr/>
-          <p:nvPr/>
-        </p:nvSpPr>
-        <p:spPr>
-          <a:xfrm>
-            <a:off x="685800" y="841248"/>
-            <a:ext cx="7772400" cy="3017520"/>
-          </a:xfrm>
-          <a:prstGeom prst="roundRect">
-            <a:avLst>
-              <a:gd name="adj" fmla="val 6000"/>
-            </a:avLst>
-          </a:prstGeom>
-          <a:solidFill>
-            <a:srgbClr val="EEF4EA"/>
-          </a:solidFill>
-          <a:ln>
-            <a:noFill/>
-          </a:ln>
-          <a:effectLst/>
-        </p:spPr>
-        <p:style>
-          <a:lnRef idx="1">
-            <a:schemeClr val="accent1"/>
-          </a:lnRef>
-          <a:fillRef idx="3">
-            <a:schemeClr val="accent1"/>
-          </a:fillRef>
-          <a:effectRef idx="2">
-            <a:schemeClr val="accent1"/>
-          </a:effectRef>
-          <a:fontRef idx="minor">
-            <a:schemeClr val="lt1"/>
-          </a:fontRef>
-        </p:style>
-        <p:txBody>
-          <a:bodyPr rtlCol="0" anchor="ctr"/>
-          <a:lstStyle/>
-          <a:p>
-            <a:pPr algn="ctr"/>
-          </a:p>
-        </p:txBody>
-      </p:sp>
-      <p:sp>
-        <p:nvSpPr>
-          <p:cNvPr id="5" name="Rectangle 4"/>
-          <p:cNvSpPr/>
-          <p:nvPr/>
-        </p:nvSpPr>
-        <p:spPr>
-          <a:xfrm>
-            <a:off x="685800" y="841248"/>
-            <a:ext cx="7772400" cy="54864"/>
-          </a:xfrm>
-          <a:prstGeom prst="rect">
-            <a:avLst/>
-          </a:prstGeom>
-          <a:solidFill>
-            <a:srgbClr val="7BA060"/>
-          </a:solidFill>
-          <a:ln>
-            <a:noFill/>
-          </a:ln>
-          <a:effectLst/>
-        </p:spPr>
-        <p:style>
-          <a:lnRef idx="1">
-            <a:schemeClr val="accent1"/>
-          </a:lnRef>
-          <a:fillRef idx="3">
-            <a:schemeClr val="accent1"/>
-          </a:fillRef>
-          <a:effectRef idx="2">
-            <a:schemeClr val="accent1"/>
-          </a:effectRef>
-          <a:fontRef idx="minor">
-            <a:schemeClr val="lt1"/>
-          </a:fontRef>
-        </p:style>
-        <p:txBody>
-          <a:bodyPr rtlCol="0" anchor="ctr"/>
-          <a:lstStyle/>
-          <a:p>
-            <a:pPr algn="ctr"/>
-          </a:p>
-        </p:txBody>
-      </p:sp>
-      <p:sp>
-        <p:nvSpPr>
-          <p:cNvPr id="6" name="TextBox 5"/>
+              <a:t>QUESTIONS TO ASK AT AN OPEN EVENING  ·  WEDNESDAY</a:t>
+            </a:r>
+          </a:p>
+        </p:txBody>
+      </p:sp>
+      <p:sp>
+        <p:nvSpPr>
+          <p:cNvPr id="4" name="TextBox 3"/>
           <p:cNvSpPr txBox="1"/>
           <p:nvPr/>
         </p:nvSpPr>
         <p:spPr>
           <a:xfrm>
-            <a:off x="1051560" y="1115568"/>
-            <a:ext cx="7040880" cy="512064"/>
+            <a:off x="685800" y="749808"/>
+            <a:ext cx="7772400" cy="512064"/>
           </a:xfrm>
           <a:prstGeom prst="rect">
             <a:avLst/>
@@ -5570,27 +7428,455 @@
               </a:spcAft>
             </a:pPr>
             <a:r>
-              <a:rPr sz="2800" b="1" i="0">
+              <a:rPr sz="3000" b="1" i="0">
+                <a:solidFill>
+                  <a:srgbClr val="2E3436"/>
+                </a:solidFill>
+                <a:latin typeface="Libre Caslon Display"/>
+              </a:rPr>
+              <a:t>Ask it for real</a:t>
+            </a:r>
+          </a:p>
+        </p:txBody>
+      </p:sp>
+      <p:sp>
+        <p:nvSpPr>
+          <p:cNvPr id="5" name="TextBox 4"/>
+          <p:cNvSpPr txBox="1"/>
+          <p:nvPr/>
+        </p:nvSpPr>
+        <p:spPr>
+          <a:xfrm>
+            <a:off x="685800" y="1280160"/>
+            <a:ext cx="7772400" cy="274320"/>
+          </a:xfrm>
+          <a:prstGeom prst="rect">
+            <a:avLst/>
+          </a:prstGeom>
+          <a:noFill/>
+        </p:spPr>
+        <p:txBody>
+          <a:bodyPr wrap="square" anchor="t" lIns="0" rIns="0" tIns="0" bIns="0">
+            <a:spAutoFit/>
+          </a:bodyPr>
+          <a:lstStyle/>
+          <a:p>
+            <a:pPr algn="l">
+              <a:lnSpc>
+                <a:spcPct val="125000"/>
+              </a:lnSpc>
+              <a:spcAft>
+                <a:spcPts val="0"/>
+              </a:spcAft>
+            </a:pPr>
+            <a:r>
+              <a:rPr sz="1400" b="0" i="1">
+                <a:solidFill>
+                  <a:srgbClr val="7BA060"/>
+                </a:solidFill>
+                <a:latin typeface="Karla"/>
+              </a:rPr>
+              <a:t>A vague answer is not an answer. Follow it up until you could write it down.</a:t>
+            </a:r>
+          </a:p>
+        </p:txBody>
+      </p:sp>
+      <p:sp>
+        <p:nvSpPr>
+          <p:cNvPr id="6" name="Rounded Rectangle 5"/>
+          <p:cNvSpPr/>
+          <p:nvPr/>
+        </p:nvSpPr>
+        <p:spPr>
+          <a:xfrm>
+            <a:off x="685800" y="1682496"/>
+            <a:ext cx="4343400" cy="1993392"/>
+          </a:xfrm>
+          <a:prstGeom prst="roundRect">
+            <a:avLst>
+              <a:gd name="adj" fmla="val 5000"/>
+            </a:avLst>
+          </a:prstGeom>
+          <a:solidFill>
+            <a:srgbClr val="EEF4EA"/>
+          </a:solidFill>
+          <a:ln>
+            <a:noFill/>
+          </a:ln>
+          <a:effectLst/>
+        </p:spPr>
+        <p:style>
+          <a:lnRef idx="1">
+            <a:schemeClr val="accent1"/>
+          </a:lnRef>
+          <a:fillRef idx="3">
+            <a:schemeClr val="accent1"/>
+          </a:fillRef>
+          <a:effectRef idx="2">
+            <a:schemeClr val="accent1"/>
+          </a:effectRef>
+          <a:fontRef idx="minor">
+            <a:schemeClr val="lt1"/>
+          </a:fontRef>
+        </p:style>
+        <p:txBody>
+          <a:bodyPr rtlCol="0" anchor="ctr"/>
+          <a:lstStyle/>
+          <a:p>
+            <a:pPr algn="ctr"/>
+          </a:p>
+        </p:txBody>
+      </p:sp>
+      <p:sp>
+        <p:nvSpPr>
+          <p:cNvPr id="7" name="TextBox 6"/>
+          <p:cNvSpPr txBox="1"/>
+          <p:nvPr/>
+        </p:nvSpPr>
+        <p:spPr>
+          <a:xfrm>
+            <a:off x="941832" y="1874519"/>
+            <a:ext cx="914400" cy="201168"/>
+          </a:xfrm>
+          <a:prstGeom prst="rect">
+            <a:avLst/>
+          </a:prstGeom>
+          <a:noFill/>
+        </p:spPr>
+        <p:txBody>
+          <a:bodyPr wrap="square" anchor="t" lIns="0" rIns="0" tIns="0" bIns="0">
+            <a:spAutoFit/>
+          </a:bodyPr>
+          <a:lstStyle/>
+          <a:p>
+            <a:pPr algn="l">
+              <a:lnSpc>
+                <a:spcPct val="125000"/>
+              </a:lnSpc>
+              <a:spcAft>
+                <a:spcPts val="0"/>
+              </a:spcAft>
+            </a:pPr>
+            <a:r>
+              <a:rPr sz="950" b="1" i="0" spc="120">
+                <a:solidFill>
+                  <a:srgbClr val="7BA060"/>
+                </a:solidFill>
+                <a:latin typeface="Karla"/>
+              </a:rPr>
+              <a:t>THEY SAY</a:t>
+            </a:r>
+          </a:p>
+        </p:txBody>
+      </p:sp>
+      <p:sp>
+        <p:nvSpPr>
+          <p:cNvPr id="8" name="TextBox 7"/>
+          <p:cNvSpPr txBox="1"/>
+          <p:nvPr/>
+        </p:nvSpPr>
+        <p:spPr>
+          <a:xfrm>
+            <a:off x="1819656" y="1847088"/>
+            <a:ext cx="2971800" cy="198119"/>
+          </a:xfrm>
+          <a:prstGeom prst="rect">
+            <a:avLst/>
+          </a:prstGeom>
+          <a:noFill/>
+        </p:spPr>
+        <p:txBody>
+          <a:bodyPr wrap="square" anchor="t" lIns="0" rIns="0" tIns="0" bIns="0">
+            <a:spAutoFit/>
+          </a:bodyPr>
+          <a:lstStyle/>
+          <a:p>
+            <a:pPr algn="l">
+              <a:lnSpc>
+                <a:spcPct val="120000"/>
+              </a:lnSpc>
+              <a:spcAft>
+                <a:spcPts val="0"/>
+              </a:spcAft>
+            </a:pPr>
+            <a:r>
+              <a:rPr sz="1300" b="0" i="0">
+                <a:solidFill>
+                  <a:srgbClr val="5C6552"/>
+                </a:solidFill>
+                <a:latin typeface="Karla"/>
+              </a:rPr>
+              <a:t>“There’s loads of support here.”</a:t>
+            </a:r>
+          </a:p>
+        </p:txBody>
+      </p:sp>
+      <p:sp>
+        <p:nvSpPr>
+          <p:cNvPr id="9" name="TextBox 8"/>
+          <p:cNvSpPr txBox="1"/>
+          <p:nvPr/>
+        </p:nvSpPr>
+        <p:spPr>
+          <a:xfrm>
+            <a:off x="941832" y="2295144"/>
+            <a:ext cx="914400" cy="201168"/>
+          </a:xfrm>
+          <a:prstGeom prst="rect">
+            <a:avLst/>
+          </a:prstGeom>
+          <a:noFill/>
+        </p:spPr>
+        <p:txBody>
+          <a:bodyPr wrap="square" anchor="t" lIns="0" rIns="0" tIns="0" bIns="0">
+            <a:spAutoFit/>
+          </a:bodyPr>
+          <a:lstStyle/>
+          <a:p>
+            <a:pPr algn="l">
+              <a:lnSpc>
+                <a:spcPct val="125000"/>
+              </a:lnSpc>
+              <a:spcAft>
+                <a:spcPts val="0"/>
+              </a:spcAft>
+            </a:pPr>
+            <a:r>
+              <a:rPr sz="950" b="1" i="0" spc="120">
                 <a:solidFill>
                   <a:srgbClr val="4A7331"/>
                 </a:solidFill>
+                <a:latin typeface="Karla"/>
+              </a:rPr>
+              <a:t>YOU ASK</a:t>
+            </a:r>
+          </a:p>
+        </p:txBody>
+      </p:sp>
+      <p:sp>
+        <p:nvSpPr>
+          <p:cNvPr id="10" name="TextBox 9"/>
+          <p:cNvSpPr txBox="1"/>
+          <p:nvPr/>
+        </p:nvSpPr>
+        <p:spPr>
+          <a:xfrm>
+            <a:off x="1819656" y="2267712"/>
+            <a:ext cx="2971800" cy="396239"/>
+          </a:xfrm>
+          <a:prstGeom prst="rect">
+            <a:avLst/>
+          </a:prstGeom>
+          <a:noFill/>
+        </p:spPr>
+        <p:txBody>
+          <a:bodyPr wrap="square" anchor="t" lIns="0" rIns="0" tIns="0" bIns="0">
+            <a:spAutoFit/>
+          </a:bodyPr>
+          <a:lstStyle/>
+          <a:p>
+            <a:pPr algn="l">
+              <a:lnSpc>
+                <a:spcPct val="120000"/>
+              </a:lnSpc>
+              <a:spcAft>
+                <a:spcPts val="0"/>
+              </a:spcAft>
+            </a:pPr>
+            <a:r>
+              <a:rPr sz="1300" b="1" i="0">
+                <a:solidFill>
+                  <a:srgbClr val="2E3436"/>
+                </a:solidFill>
+                <a:latin typeface="Karla"/>
+              </a:rPr>
+              <a:t>“Who exactly would I go to, and how?”</a:t>
+            </a:r>
+          </a:p>
+        </p:txBody>
+      </p:sp>
+      <p:sp>
+        <p:nvSpPr>
+          <p:cNvPr id="11" name="TextBox 10"/>
+          <p:cNvSpPr txBox="1"/>
+          <p:nvPr/>
+        </p:nvSpPr>
+        <p:spPr>
+          <a:xfrm>
+            <a:off x="941832" y="2837687"/>
+            <a:ext cx="914400" cy="201168"/>
+          </a:xfrm>
+          <a:prstGeom prst="rect">
+            <a:avLst/>
+          </a:prstGeom>
+          <a:noFill/>
+        </p:spPr>
+        <p:txBody>
+          <a:bodyPr wrap="square" anchor="t" lIns="0" rIns="0" tIns="0" bIns="0">
+            <a:spAutoFit/>
+          </a:bodyPr>
+          <a:lstStyle/>
+          <a:p>
+            <a:pPr algn="l">
+              <a:lnSpc>
+                <a:spcPct val="125000"/>
+              </a:lnSpc>
+              <a:spcAft>
+                <a:spcPts val="0"/>
+              </a:spcAft>
+            </a:pPr>
+            <a:r>
+              <a:rPr sz="950" b="1" i="0" spc="120">
+                <a:solidFill>
+                  <a:srgbClr val="7BA060"/>
+                </a:solidFill>
+                <a:latin typeface="Karla"/>
+              </a:rPr>
+              <a:t>THEY SAY</a:t>
+            </a:r>
+          </a:p>
+        </p:txBody>
+      </p:sp>
+      <p:sp>
+        <p:nvSpPr>
+          <p:cNvPr id="12" name="TextBox 11"/>
+          <p:cNvSpPr txBox="1"/>
+          <p:nvPr/>
+        </p:nvSpPr>
+        <p:spPr>
+          <a:xfrm>
+            <a:off x="1819656" y="2810256"/>
+            <a:ext cx="2971800" cy="396239"/>
+          </a:xfrm>
+          <a:prstGeom prst="rect">
+            <a:avLst/>
+          </a:prstGeom>
+          <a:noFill/>
+        </p:spPr>
+        <p:txBody>
+          <a:bodyPr wrap="square" anchor="t" lIns="0" rIns="0" tIns="0" bIns="0">
+            <a:spAutoFit/>
+          </a:bodyPr>
+          <a:lstStyle/>
+          <a:p>
+            <a:pPr algn="l">
+              <a:lnSpc>
+                <a:spcPct val="120000"/>
+              </a:lnSpc>
+              <a:spcAft>
+                <a:spcPts val="0"/>
+              </a:spcAft>
+            </a:pPr>
+            <a:r>
+              <a:rPr sz="1300" b="0" i="0">
+                <a:solidFill>
+                  <a:srgbClr val="5C6552"/>
+                </a:solidFill>
+                <a:latin typeface="Karla"/>
+              </a:rPr>
+              <a:t>“Your tutor first. You see them every week.”</a:t>
+            </a:r>
+          </a:p>
+        </p:txBody>
+      </p:sp>
+      <p:sp>
+        <p:nvSpPr>
+          <p:cNvPr id="13" name="Rounded Rectangle 12"/>
+          <p:cNvSpPr/>
+          <p:nvPr/>
+        </p:nvSpPr>
+        <p:spPr>
+          <a:xfrm>
+            <a:off x="5303520" y="1682496"/>
+            <a:ext cx="3154680" cy="1993392"/>
+          </a:xfrm>
+          <a:prstGeom prst="roundRect">
+            <a:avLst>
+              <a:gd name="adj" fmla="val 5000"/>
+            </a:avLst>
+          </a:prstGeom>
+          <a:solidFill>
+            <a:srgbClr val="EEF4EA"/>
+          </a:solidFill>
+          <a:ln>
+            <a:noFill/>
+          </a:ln>
+          <a:effectLst/>
+        </p:spPr>
+        <p:style>
+          <a:lnRef idx="1">
+            <a:schemeClr val="accent1"/>
+          </a:lnRef>
+          <a:fillRef idx="3">
+            <a:schemeClr val="accent1"/>
+          </a:fillRef>
+          <a:effectRef idx="2">
+            <a:schemeClr val="accent1"/>
+          </a:effectRef>
+          <a:fontRef idx="minor">
+            <a:schemeClr val="lt1"/>
+          </a:fontRef>
+        </p:style>
+        <p:txBody>
+          <a:bodyPr rtlCol="0" anchor="ctr"/>
+          <a:lstStyle/>
+          <a:p>
+            <a:pPr algn="ctr"/>
+          </a:p>
+        </p:txBody>
+      </p:sp>
+      <p:sp>
+        <p:nvSpPr>
+          <p:cNvPr id="14" name="TextBox 13"/>
+          <p:cNvSpPr txBox="1"/>
+          <p:nvPr/>
+        </p:nvSpPr>
+        <p:spPr>
+          <a:xfrm>
+            <a:off x="5541264" y="1828800"/>
+            <a:ext cx="2679192" cy="237744"/>
+          </a:xfrm>
+          <a:prstGeom prst="rect">
+            <a:avLst/>
+          </a:prstGeom>
+          <a:noFill/>
+        </p:spPr>
+        <p:txBody>
+          <a:bodyPr wrap="square" anchor="t" lIns="0" rIns="0" tIns="0" bIns="0">
+            <a:spAutoFit/>
+          </a:bodyPr>
+          <a:lstStyle/>
+          <a:p>
+            <a:pPr algn="l">
+              <a:lnSpc>
+                <a:spcPct val="125000"/>
+              </a:lnSpc>
+              <a:spcAft>
+                <a:spcPts val="0"/>
+              </a:spcAft>
+            </a:pPr>
+            <a:r>
+              <a:rPr sz="1350" b="1" i="0">
+                <a:solidFill>
+                  <a:srgbClr val="4A7331"/>
+                </a:solidFill>
                 <a:latin typeface="Libre Caslon Display"/>
               </a:rPr>
-              <a:t>About the people</a:t>
-            </a:r>
-          </a:p>
-        </p:txBody>
-      </p:sp>
-      <p:sp>
-        <p:nvSpPr>
-          <p:cNvPr id="7" name="Oval 6"/>
+              <a:t>Follow-ups that work</a:t>
+            </a:r>
+          </a:p>
+        </p:txBody>
+      </p:sp>
+      <p:sp>
+        <p:nvSpPr>
+          <p:cNvPr id="15" name="Oval 14"/>
           <p:cNvSpPr/>
           <p:nvPr/>
         </p:nvSpPr>
         <p:spPr>
           <a:xfrm>
-            <a:off x="1106424" y="1883664"/>
-            <a:ext cx="109728" cy="109728"/>
+            <a:off x="5568696" y="2276856"/>
+            <a:ext cx="91440" cy="91440"/>
           </a:xfrm>
           <a:prstGeom prst="ellipse">
             <a:avLst/>
@@ -5627,14 +7913,14 @@
       </p:sp>
       <p:sp>
         <p:nvSpPr>
-          <p:cNvPr id="8" name="TextBox 7"/>
+          <p:cNvPr id="16" name="TextBox 15"/>
           <p:cNvSpPr txBox="1"/>
           <p:nvPr/>
         </p:nvSpPr>
         <p:spPr>
           <a:xfrm>
-            <a:off x="1399032" y="1810512"/>
-            <a:ext cx="6583680" cy="247650"/>
+            <a:off x="5779008" y="2212848"/>
+            <a:ext cx="2551176" cy="274320"/>
           </a:xfrm>
           <a:prstGeom prst="rect">
             <a:avLst/>
@@ -5649,34 +7935,34 @@
           <a:p>
             <a:pPr algn="l">
               <a:lnSpc>
-                <a:spcPct val="130000"/>
+                <a:spcPct val="125000"/>
               </a:lnSpc>
               <a:spcAft>
                 <a:spcPts val="0"/>
               </a:spcAft>
             </a:pPr>
             <a:r>
-              <a:rPr sz="1500" b="0" i="0">
+              <a:rPr sz="1250" b="0" i="0">
                 <a:solidFill>
                   <a:srgbClr val="2E3436"/>
                 </a:solidFill>
                 <a:latin typeface="Karla"/>
               </a:rPr>
-              <a:t>Who would I go to if I was struggling?</a:t>
-            </a:r>
-          </a:p>
-        </p:txBody>
-      </p:sp>
-      <p:sp>
-        <p:nvSpPr>
-          <p:cNvPr id="9" name="Oval 8"/>
+              <a:t>Who, exactly?</a:t>
+            </a:r>
+          </a:p>
+        </p:txBody>
+      </p:sp>
+      <p:sp>
+        <p:nvSpPr>
+          <p:cNvPr id="17" name="Oval 16"/>
           <p:cNvSpPr/>
           <p:nvPr/>
         </p:nvSpPr>
         <p:spPr>
           <a:xfrm>
-            <a:off x="1106424" y="2277618"/>
-            <a:ext cx="109728" cy="109728"/>
+            <a:off x="5568696" y="2615184"/>
+            <a:ext cx="91440" cy="91440"/>
           </a:xfrm>
           <a:prstGeom prst="ellipse">
             <a:avLst/>
@@ -5713,14 +7999,14 @@
       </p:sp>
       <p:sp>
         <p:nvSpPr>
-          <p:cNvPr id="10" name="TextBox 9"/>
+          <p:cNvPr id="18" name="TextBox 17"/>
           <p:cNvSpPr txBox="1"/>
           <p:nvPr/>
         </p:nvSpPr>
         <p:spPr>
           <a:xfrm>
-            <a:off x="1399032" y="2204466"/>
-            <a:ext cx="6583680" cy="247650"/>
+            <a:off x="5779008" y="2551176"/>
+            <a:ext cx="2551176" cy="274320"/>
           </a:xfrm>
           <a:prstGeom prst="rect">
             <a:avLst/>
@@ -5735,34 +8021,34 @@
           <a:p>
             <a:pPr algn="l">
               <a:lnSpc>
-                <a:spcPct val="130000"/>
+                <a:spcPct val="125000"/>
               </a:lnSpc>
               <a:spcAft>
                 <a:spcPts val="0"/>
               </a:spcAft>
             </a:pPr>
             <a:r>
-              <a:rPr sz="1500" b="0" i="0">
+              <a:rPr sz="1250" b="0" i="0">
                 <a:solidFill>
                   <a:srgbClr val="2E3436"/>
                 </a:solidFill>
                 <a:latin typeface="Karla"/>
               </a:rPr>
-              <a:t>How many people are usually in a class?</a:t>
-            </a:r>
-          </a:p>
-        </p:txBody>
-      </p:sp>
-      <p:sp>
-        <p:nvSpPr>
-          <p:cNvPr id="11" name="Oval 10"/>
+              <a:t>How much?</a:t>
+            </a:r>
+          </a:p>
+        </p:txBody>
+      </p:sp>
+      <p:sp>
+        <p:nvSpPr>
+          <p:cNvPr id="19" name="Oval 18"/>
           <p:cNvSpPr/>
           <p:nvPr/>
         </p:nvSpPr>
         <p:spPr>
           <a:xfrm>
-            <a:off x="1106424" y="2671572"/>
-            <a:ext cx="109728" cy="109728"/>
+            <a:off x="5568696" y="2953512"/>
+            <a:ext cx="91440" cy="91440"/>
           </a:xfrm>
           <a:prstGeom prst="ellipse">
             <a:avLst/>
@@ -5799,14 +8085,14 @@
       </p:sp>
       <p:sp>
         <p:nvSpPr>
-          <p:cNvPr id="12" name="TextBox 11"/>
+          <p:cNvPr id="20" name="TextBox 19"/>
           <p:cNvSpPr txBox="1"/>
           <p:nvPr/>
         </p:nvSpPr>
         <p:spPr>
           <a:xfrm>
-            <a:off x="1399032" y="2598420"/>
-            <a:ext cx="6583680" cy="247650"/>
+            <a:off x="5779008" y="2889504"/>
+            <a:ext cx="2551176" cy="274320"/>
           </a:xfrm>
           <a:prstGeom prst="rect">
             <a:avLst/>
@@ -5821,34 +8107,210 @@
           <a:p>
             <a:pPr algn="l">
               <a:lnSpc>
-                <a:spcPct val="130000"/>
+                <a:spcPct val="125000"/>
               </a:lnSpc>
               <a:spcAft>
                 <a:spcPts val="0"/>
               </a:spcAft>
             </a:pPr>
             <a:r>
-              <a:rPr sz="1500" b="0" i="0">
+              <a:rPr sz="1250" b="0" i="0">
                 <a:solidFill>
                   <a:srgbClr val="2E3436"/>
                 </a:solidFill>
                 <a:latin typeface="Karla"/>
               </a:rPr>
-              <a:t>Do students who did not come from this school settle in?</a:t>
-            </a:r>
-          </a:p>
-        </p:txBody>
-      </p:sp>
-      <p:sp>
-        <p:nvSpPr>
-          <p:cNvPr id="13" name="TextBox 12"/>
+              <a:t>By when?</a:t>
+            </a:r>
+          </a:p>
+        </p:txBody>
+      </p:sp>
+      <p:sp>
+        <p:nvSpPr>
+          <p:cNvPr id="21" name="Oval 20"/>
+          <p:cNvSpPr/>
+          <p:nvPr/>
+        </p:nvSpPr>
+        <p:spPr>
+          <a:xfrm>
+            <a:off x="5568696" y="3291840"/>
+            <a:ext cx="91440" cy="91440"/>
+          </a:xfrm>
+          <a:prstGeom prst="ellipse">
+            <a:avLst/>
+          </a:prstGeom>
+          <a:solidFill>
+            <a:srgbClr val="7BA060"/>
+          </a:solidFill>
+          <a:ln>
+            <a:noFill/>
+          </a:ln>
+          <a:effectLst/>
+        </p:spPr>
+        <p:style>
+          <a:lnRef idx="1">
+            <a:schemeClr val="accent1"/>
+          </a:lnRef>
+          <a:fillRef idx="3">
+            <a:schemeClr val="accent1"/>
+          </a:fillRef>
+          <a:effectRef idx="2">
+            <a:schemeClr val="accent1"/>
+          </a:effectRef>
+          <a:fontRef idx="minor">
+            <a:schemeClr val="lt1"/>
+          </a:fontRef>
+        </p:style>
+        <p:txBody>
+          <a:bodyPr rtlCol="0" anchor="ctr"/>
+          <a:lstStyle/>
+          <a:p>
+            <a:pPr algn="ctr"/>
+          </a:p>
+        </p:txBody>
+      </p:sp>
+      <p:sp>
+        <p:nvSpPr>
+          <p:cNvPr id="22" name="TextBox 21"/>
           <p:cNvSpPr txBox="1"/>
           <p:nvPr/>
         </p:nvSpPr>
         <p:spPr>
           <a:xfrm>
-            <a:off x="685800" y="4041648"/>
-            <a:ext cx="7772400" cy="310896"/>
+            <a:off x="5779008" y="3227832"/>
+            <a:ext cx="2551176" cy="274320"/>
+          </a:xfrm>
+          <a:prstGeom prst="rect">
+            <a:avLst/>
+          </a:prstGeom>
+          <a:noFill/>
+        </p:spPr>
+        <p:txBody>
+          <a:bodyPr wrap="square" anchor="t" lIns="0" rIns="0" tIns="0" bIns="0">
+            <a:spAutoFit/>
+          </a:bodyPr>
+          <a:lstStyle/>
+          <a:p>
+            <a:pPr algn="l">
+              <a:lnSpc>
+                <a:spcPct val="125000"/>
+              </a:lnSpc>
+              <a:spcAft>
+                <a:spcPts val="0"/>
+              </a:spcAft>
+            </a:pPr>
+            <a:r>
+              <a:rPr sz="1250" b="0" i="0">
+                <a:solidFill>
+                  <a:srgbClr val="2E3436"/>
+                </a:solidFill>
+                <a:latin typeface="Karla"/>
+              </a:rPr>
+              <a:t>Can you give me an example?</a:t>
+            </a:r>
+          </a:p>
+        </p:txBody>
+      </p:sp>
+      <p:sp>
+        <p:nvSpPr>
+          <p:cNvPr id="23" name="Rounded Rectangle 22"/>
+          <p:cNvSpPr/>
+          <p:nvPr/>
+        </p:nvSpPr>
+        <p:spPr>
+          <a:xfrm>
+            <a:off x="685800" y="3822191"/>
+            <a:ext cx="7772400" cy="603504"/>
+          </a:xfrm>
+          <a:prstGeom prst="roundRect">
+            <a:avLst>
+              <a:gd name="adj" fmla="val 12000"/>
+            </a:avLst>
+          </a:prstGeom>
+          <a:solidFill>
+            <a:srgbClr val="4A7331"/>
+          </a:solidFill>
+          <a:ln>
+            <a:noFill/>
+          </a:ln>
+          <a:effectLst/>
+        </p:spPr>
+        <p:style>
+          <a:lnRef idx="1">
+            <a:schemeClr val="accent1"/>
+          </a:lnRef>
+          <a:fillRef idx="3">
+            <a:schemeClr val="accent1"/>
+          </a:fillRef>
+          <a:effectRef idx="2">
+            <a:schemeClr val="accent1"/>
+          </a:effectRef>
+          <a:fontRef idx="minor">
+            <a:schemeClr val="lt1"/>
+          </a:fontRef>
+        </p:style>
+        <p:txBody>
+          <a:bodyPr rtlCol="0" anchor="ctr"/>
+          <a:lstStyle/>
+          <a:p>
+            <a:pPr algn="ctr"/>
+          </a:p>
+        </p:txBody>
+      </p:sp>
+      <p:sp>
+        <p:nvSpPr>
+          <p:cNvPr id="24" name="Oval 23"/>
+          <p:cNvSpPr/>
+          <p:nvPr/>
+        </p:nvSpPr>
+        <p:spPr>
+          <a:xfrm>
+            <a:off x="923544" y="3986783"/>
+            <a:ext cx="274320" cy="274320"/>
+          </a:xfrm>
+          <a:prstGeom prst="ellipse">
+            <a:avLst/>
+          </a:prstGeom>
+          <a:solidFill>
+            <a:srgbClr val="EEF4EA"/>
+          </a:solidFill>
+          <a:ln>
+            <a:noFill/>
+          </a:ln>
+          <a:effectLst/>
+        </p:spPr>
+        <p:style>
+          <a:lnRef idx="1">
+            <a:schemeClr val="accent1"/>
+          </a:lnRef>
+          <a:fillRef idx="3">
+            <a:schemeClr val="accent1"/>
+          </a:fillRef>
+          <a:effectRef idx="2">
+            <a:schemeClr val="accent1"/>
+          </a:effectRef>
+          <a:fontRef idx="minor">
+            <a:schemeClr val="lt1"/>
+          </a:fontRef>
+        </p:style>
+        <p:txBody>
+          <a:bodyPr rtlCol="0" anchor="ctr"/>
+          <a:lstStyle/>
+          <a:p>
+            <a:pPr algn="ctr"/>
+          </a:p>
+        </p:txBody>
+      </p:sp>
+      <p:sp>
+        <p:nvSpPr>
+          <p:cNvPr id="25" name="TextBox 24"/>
+          <p:cNvSpPr txBox="1"/>
+          <p:nvPr/>
+        </p:nvSpPr>
+        <p:spPr>
+          <a:xfrm>
+            <a:off x="923544" y="4032504"/>
+            <a:ext cx="274320" cy="201168"/>
           </a:xfrm>
           <a:prstGeom prst="rect">
             <a:avLst/>
@@ -5870,20 +8332,318 @@
               </a:spcAft>
             </a:pPr>
             <a:r>
-              <a:rPr sz="1150" b="0" i="1">
-                <a:solidFill>
-                  <a:srgbClr val="5C6552"/>
+              <a:rPr sz="1050" b="1" i="0">
+                <a:solidFill>
+                  <a:srgbClr val="4A7331"/>
                 </a:solidFill>
                 <a:latin typeface="Karla"/>
               </a:rPr>
-              <a:t>Add one of your own. The best question is the one you actually want the answer to.</a:t>
+              <a:t>1</a:t>
+            </a:r>
+          </a:p>
+        </p:txBody>
+      </p:sp>
+      <p:sp>
+        <p:nvSpPr>
+          <p:cNvPr id="26" name="TextBox 25"/>
+          <p:cNvSpPr txBox="1"/>
+          <p:nvPr/>
+        </p:nvSpPr>
+        <p:spPr>
+          <a:xfrm>
+            <a:off x="1289304" y="3948684"/>
+            <a:ext cx="2011680" cy="350520"/>
+          </a:xfrm>
+          <a:prstGeom prst="rect">
+            <a:avLst/>
+          </a:prstGeom>
+          <a:noFill/>
+        </p:spPr>
+        <p:txBody>
+          <a:bodyPr wrap="square" anchor="ctr" lIns="0" rIns="0" tIns="0" bIns="0">
+            <a:spAutoFit/>
+          </a:bodyPr>
+          <a:lstStyle/>
+          <a:p>
+            <a:pPr algn="l">
+              <a:lnSpc>
+                <a:spcPct val="120000"/>
+              </a:lnSpc>
+              <a:spcAft>
+                <a:spcPts val="0"/>
+              </a:spcAft>
+            </a:pPr>
+            <a:r>
+              <a:rPr sz="1150" b="0" i="0">
+                <a:solidFill>
+                  <a:srgbClr val="FFFDF7"/>
+                </a:solidFill>
+                <a:latin typeface="Karla"/>
+              </a:rPr>
+              <a:t>In pairs, one reads a vague answer card</a:t>
+            </a:r>
+          </a:p>
+        </p:txBody>
+      </p:sp>
+      <p:sp>
+        <p:nvSpPr>
+          <p:cNvPr id="27" name="Oval 26"/>
+          <p:cNvSpPr/>
+          <p:nvPr/>
+        </p:nvSpPr>
+        <p:spPr>
+          <a:xfrm>
+            <a:off x="3355848" y="3986783"/>
+            <a:ext cx="274320" cy="274320"/>
+          </a:xfrm>
+          <a:prstGeom prst="ellipse">
+            <a:avLst/>
+          </a:prstGeom>
+          <a:solidFill>
+            <a:srgbClr val="EEF4EA"/>
+          </a:solidFill>
+          <a:ln>
+            <a:noFill/>
+          </a:ln>
+          <a:effectLst/>
+        </p:spPr>
+        <p:style>
+          <a:lnRef idx="1">
+            <a:schemeClr val="accent1"/>
+          </a:lnRef>
+          <a:fillRef idx="3">
+            <a:schemeClr val="accent1"/>
+          </a:fillRef>
+          <a:effectRef idx="2">
+            <a:schemeClr val="accent1"/>
+          </a:effectRef>
+          <a:fontRef idx="minor">
+            <a:schemeClr val="lt1"/>
+          </a:fontRef>
+        </p:style>
+        <p:txBody>
+          <a:bodyPr rtlCol="0" anchor="ctr"/>
+          <a:lstStyle/>
+          <a:p>
+            <a:pPr algn="ctr"/>
+          </a:p>
+        </p:txBody>
+      </p:sp>
+      <p:sp>
+        <p:nvSpPr>
+          <p:cNvPr id="28" name="TextBox 27"/>
+          <p:cNvSpPr txBox="1"/>
+          <p:nvPr/>
+        </p:nvSpPr>
+        <p:spPr>
+          <a:xfrm>
+            <a:off x="3355848" y="4032504"/>
+            <a:ext cx="274320" cy="201168"/>
+          </a:xfrm>
+          <a:prstGeom prst="rect">
+            <a:avLst/>
+          </a:prstGeom>
+          <a:noFill/>
+        </p:spPr>
+        <p:txBody>
+          <a:bodyPr wrap="square" anchor="t" lIns="0" rIns="0" tIns="0" bIns="0">
+            <a:spAutoFit/>
+          </a:bodyPr>
+          <a:lstStyle/>
+          <a:p>
+            <a:pPr algn="ctr">
+              <a:lnSpc>
+                <a:spcPct val="125000"/>
+              </a:lnSpc>
+              <a:spcAft>
+                <a:spcPts val="0"/>
+              </a:spcAft>
+            </a:pPr>
+            <a:r>
+              <a:rPr sz="1050" b="1" i="0">
+                <a:solidFill>
+                  <a:srgbClr val="4A7331"/>
+                </a:solidFill>
+                <a:latin typeface="Karla"/>
+              </a:rPr>
+              <a:t>2</a:t>
+            </a:r>
+          </a:p>
+        </p:txBody>
+      </p:sp>
+      <p:sp>
+        <p:nvSpPr>
+          <p:cNvPr id="29" name="TextBox 28"/>
+          <p:cNvSpPr txBox="1"/>
+          <p:nvPr/>
+        </p:nvSpPr>
+        <p:spPr>
+          <a:xfrm>
+            <a:off x="3721608" y="3948684"/>
+            <a:ext cx="2011680" cy="350520"/>
+          </a:xfrm>
+          <a:prstGeom prst="rect">
+            <a:avLst/>
+          </a:prstGeom>
+          <a:noFill/>
+        </p:spPr>
+        <p:txBody>
+          <a:bodyPr wrap="square" anchor="ctr" lIns="0" rIns="0" tIns="0" bIns="0">
+            <a:spAutoFit/>
+          </a:bodyPr>
+          <a:lstStyle/>
+          <a:p>
+            <a:pPr algn="l">
+              <a:lnSpc>
+                <a:spcPct val="120000"/>
+              </a:lnSpc>
+              <a:spcAft>
+                <a:spcPts val="0"/>
+              </a:spcAft>
+            </a:pPr>
+            <a:r>
+              <a:rPr sz="1150" b="0" i="0">
+                <a:solidFill>
+                  <a:srgbClr val="FFFDF7"/>
+                </a:solidFill>
+                <a:latin typeface="Karla"/>
+              </a:rPr>
+              <a:t>The other follows it up until it means something</a:t>
+            </a:r>
+          </a:p>
+        </p:txBody>
+      </p:sp>
+      <p:sp>
+        <p:nvSpPr>
+          <p:cNvPr id="30" name="Oval 29"/>
+          <p:cNvSpPr/>
+          <p:nvPr/>
+        </p:nvSpPr>
+        <p:spPr>
+          <a:xfrm>
+            <a:off x="5788152" y="3986783"/>
+            <a:ext cx="274320" cy="274320"/>
+          </a:xfrm>
+          <a:prstGeom prst="ellipse">
+            <a:avLst/>
+          </a:prstGeom>
+          <a:solidFill>
+            <a:srgbClr val="EEF4EA"/>
+          </a:solidFill>
+          <a:ln>
+            <a:noFill/>
+          </a:ln>
+          <a:effectLst/>
+        </p:spPr>
+        <p:style>
+          <a:lnRef idx="1">
+            <a:schemeClr val="accent1"/>
+          </a:lnRef>
+          <a:fillRef idx="3">
+            <a:schemeClr val="accent1"/>
+          </a:fillRef>
+          <a:effectRef idx="2">
+            <a:schemeClr val="accent1"/>
+          </a:effectRef>
+          <a:fontRef idx="minor">
+            <a:schemeClr val="lt1"/>
+          </a:fontRef>
+        </p:style>
+        <p:txBody>
+          <a:bodyPr rtlCol="0" anchor="ctr"/>
+          <a:lstStyle/>
+          <a:p>
+            <a:pPr algn="ctr"/>
+          </a:p>
+        </p:txBody>
+      </p:sp>
+      <p:sp>
+        <p:nvSpPr>
+          <p:cNvPr id="31" name="TextBox 30"/>
+          <p:cNvSpPr txBox="1"/>
+          <p:nvPr/>
+        </p:nvSpPr>
+        <p:spPr>
+          <a:xfrm>
+            <a:off x="5788152" y="4032504"/>
+            <a:ext cx="274320" cy="201168"/>
+          </a:xfrm>
+          <a:prstGeom prst="rect">
+            <a:avLst/>
+          </a:prstGeom>
+          <a:noFill/>
+        </p:spPr>
+        <p:txBody>
+          <a:bodyPr wrap="square" anchor="t" lIns="0" rIns="0" tIns="0" bIns="0">
+            <a:spAutoFit/>
+          </a:bodyPr>
+          <a:lstStyle/>
+          <a:p>
+            <a:pPr algn="ctr">
+              <a:lnSpc>
+                <a:spcPct val="125000"/>
+              </a:lnSpc>
+              <a:spcAft>
+                <a:spcPts val="0"/>
+              </a:spcAft>
+            </a:pPr>
+            <a:r>
+              <a:rPr sz="1050" b="1" i="0">
+                <a:solidFill>
+                  <a:srgbClr val="4A7331"/>
+                </a:solidFill>
+                <a:latin typeface="Karla"/>
+              </a:rPr>
+              <a:t>3</a:t>
+            </a:r>
+          </a:p>
+        </p:txBody>
+      </p:sp>
+      <p:sp>
+        <p:nvSpPr>
+          <p:cNvPr id="32" name="TextBox 31"/>
+          <p:cNvSpPr txBox="1"/>
+          <p:nvPr/>
+        </p:nvSpPr>
+        <p:spPr>
+          <a:xfrm>
+            <a:off x="6153912" y="3948684"/>
+            <a:ext cx="2011680" cy="350520"/>
+          </a:xfrm>
+          <a:prstGeom prst="rect">
+            <a:avLst/>
+          </a:prstGeom>
+          <a:noFill/>
+        </p:spPr>
+        <p:txBody>
+          <a:bodyPr wrap="square" anchor="ctr" lIns="0" rIns="0" tIns="0" bIns="0">
+            <a:spAutoFit/>
+          </a:bodyPr>
+          <a:lstStyle/>
+          <a:p>
+            <a:pPr algn="l">
+              <a:lnSpc>
+                <a:spcPct val="120000"/>
+              </a:lnSpc>
+              <a:spcAft>
+                <a:spcPts val="0"/>
+              </a:spcAft>
+            </a:pPr>
+            <a:r>
+              <a:rPr sz="1150" b="0" i="0">
+                <a:solidFill>
+                  <a:srgbClr val="FFFDF7"/>
+                </a:solidFill>
+                <a:latin typeface="Karla"/>
+              </a:rPr>
+              <a:t>Swap, and write your best follow-up on your sheet</a:t>
             </a:r>
           </a:p>
         </p:txBody>
       </p:sp>
       <p:pic>
         <p:nvPicPr>
-          <p:cNvPr id="14" name="Picture 13" descr="logo-mark.png"/>
+          <p:cNvPr id="33" name="Picture 32" descr="logo-mark.png"/>
           <p:cNvPicPr>
             <a:picLocks noChangeAspect="1"/>
           </p:cNvPicPr>
@@ -5907,7 +8667,7 @@
       </p:pic>
       <p:sp>
         <p:nvSpPr>
-          <p:cNvPr id="15" name="TextBox 14"/>
+          <p:cNvPr id="34" name="TextBox 33"/>
           <p:cNvSpPr txBox="1"/>
           <p:nvPr/>
         </p:nvSpPr>
@@ -5949,7 +8709,7 @@
       </p:sp>
       <p:sp>
         <p:nvSpPr>
-          <p:cNvPr id="16" name="TextBox 15"/>
+          <p:cNvPr id="35" name="TextBox 34"/>
           <p:cNvSpPr txBox="1"/>
           <p:nvPr/>
         </p:nvSpPr>
@@ -6088,111 +8848,21 @@
                 </a:solidFill>
                 <a:latin typeface="Karla"/>
               </a:rPr>
-              <a:t>QUESTIONS TO ASK AT AN OPEN EVENING  ·  MORNING 4</a:t>
-            </a:r>
-          </a:p>
-        </p:txBody>
-      </p:sp>
-      <p:sp>
-        <p:nvSpPr>
-          <p:cNvPr id="4" name="Rounded Rectangle 3"/>
-          <p:cNvSpPr/>
-          <p:nvPr/>
-        </p:nvSpPr>
-        <p:spPr>
-          <a:xfrm>
-            <a:off x="685800" y="841248"/>
-            <a:ext cx="7772400" cy="3017520"/>
-          </a:xfrm>
-          <a:prstGeom prst="roundRect">
-            <a:avLst>
-              <a:gd name="adj" fmla="val 6000"/>
-            </a:avLst>
-          </a:prstGeom>
-          <a:solidFill>
-            <a:srgbClr val="EEF4EA"/>
-          </a:solidFill>
-          <a:ln>
-            <a:noFill/>
-          </a:ln>
-          <a:effectLst/>
-        </p:spPr>
-        <p:style>
-          <a:lnRef idx="1">
-            <a:schemeClr val="accent1"/>
-          </a:lnRef>
-          <a:fillRef idx="3">
-            <a:schemeClr val="accent1"/>
-          </a:fillRef>
-          <a:effectRef idx="2">
-            <a:schemeClr val="accent1"/>
-          </a:effectRef>
-          <a:fontRef idx="minor">
-            <a:schemeClr val="lt1"/>
-          </a:fontRef>
-        </p:style>
-        <p:txBody>
-          <a:bodyPr rtlCol="0" anchor="ctr"/>
-          <a:lstStyle/>
-          <a:p>
-            <a:pPr algn="ctr"/>
-          </a:p>
-        </p:txBody>
-      </p:sp>
-      <p:sp>
-        <p:nvSpPr>
-          <p:cNvPr id="5" name="Rectangle 4"/>
-          <p:cNvSpPr/>
-          <p:nvPr/>
-        </p:nvSpPr>
-        <p:spPr>
-          <a:xfrm>
-            <a:off x="685800" y="841248"/>
-            <a:ext cx="7772400" cy="54864"/>
-          </a:xfrm>
-          <a:prstGeom prst="rect">
-            <a:avLst/>
-          </a:prstGeom>
-          <a:solidFill>
-            <a:srgbClr val="7BA060"/>
-          </a:solidFill>
-          <a:ln>
-            <a:noFill/>
-          </a:ln>
-          <a:effectLst/>
-        </p:spPr>
-        <p:style>
-          <a:lnRef idx="1">
-            <a:schemeClr val="accent1"/>
-          </a:lnRef>
-          <a:fillRef idx="3">
-            <a:schemeClr val="accent1"/>
-          </a:fillRef>
-          <a:effectRef idx="2">
-            <a:schemeClr val="accent1"/>
-          </a:effectRef>
-          <a:fontRef idx="minor">
-            <a:schemeClr val="lt1"/>
-          </a:fontRef>
-        </p:style>
-        <p:txBody>
-          <a:bodyPr rtlCol="0" anchor="ctr"/>
-          <a:lstStyle/>
-          <a:p>
-            <a:pPr algn="ctr"/>
-          </a:p>
-        </p:txBody>
-      </p:sp>
-      <p:sp>
-        <p:nvSpPr>
-          <p:cNvPr id="6" name="TextBox 5"/>
+              <a:t>QUESTIONS TO ASK AT AN OPEN EVENING  ·  THURSDAY</a:t>
+            </a:r>
+          </a:p>
+        </p:txBody>
+      </p:sp>
+      <p:sp>
+        <p:nvSpPr>
+          <p:cNvPr id="4" name="TextBox 3"/>
           <p:cNvSpPr txBox="1"/>
           <p:nvPr/>
         </p:nvSpPr>
         <p:spPr>
           <a:xfrm>
-            <a:off x="1051560" y="1115568"/>
-            <a:ext cx="7040880" cy="512064"/>
+            <a:off x="685800" y="749808"/>
+            <a:ext cx="7772400" cy="512064"/>
           </a:xfrm>
           <a:prstGeom prst="rect">
             <a:avLst/>
@@ -6214,33 +8884,77 @@
               </a:spcAft>
             </a:pPr>
             <a:r>
-              <a:rPr sz="2800" b="1" i="0">
-                <a:solidFill>
-                  <a:srgbClr val="4A7331"/>
+              <a:rPr sz="3000" b="1" i="0">
+                <a:solidFill>
+                  <a:srgbClr val="2E3436"/>
                 </a:solidFill>
                 <a:latin typeface="Libre Caslon Display"/>
               </a:rPr>
-              <a:t>About money and getting there</a:t>
-            </a:r>
-          </a:p>
-        </p:txBody>
-      </p:sp>
-      <p:sp>
-        <p:nvSpPr>
-          <p:cNvPr id="7" name="Oval 6"/>
+              <a:t>Set up the open evening</a:t>
+            </a:r>
+          </a:p>
+        </p:txBody>
+      </p:sp>
+      <p:sp>
+        <p:nvSpPr>
+          <p:cNvPr id="5" name="TextBox 4"/>
+          <p:cNvSpPr txBox="1"/>
+          <p:nvPr/>
+        </p:nvSpPr>
+        <p:spPr>
+          <a:xfrm>
+            <a:off x="685800" y="1280160"/>
+            <a:ext cx="7772400" cy="274320"/>
+          </a:xfrm>
+          <a:prstGeom prst="rect">
+            <a:avLst/>
+          </a:prstGeom>
+          <a:noFill/>
+        </p:spPr>
+        <p:txBody>
+          <a:bodyPr wrap="square" anchor="t" lIns="0" rIns="0" tIns="0" bIns="0">
+            <a:spAutoFit/>
+          </a:bodyPr>
+          <a:lstStyle/>
+          <a:p>
+            <a:pPr algn="l">
+              <a:lnSpc>
+                <a:spcPct val="125000"/>
+              </a:lnSpc>
+              <a:spcAft>
+                <a:spcPts val="0"/>
+              </a:spcAft>
+            </a:pPr>
+            <a:r>
+              <a:rPr sz="1400" b="0" i="1">
+                <a:solidFill>
+                  <a:srgbClr val="7BA060"/>
+                </a:solidFill>
+                <a:latin typeface="Karla"/>
+              </a:rPr>
+              <a:t>Four made-up places, and two people to run each one.</a:t>
+            </a:r>
+          </a:p>
+        </p:txBody>
+      </p:sp>
+      <p:sp>
+        <p:nvSpPr>
+          <p:cNvPr id="6" name="Rounded Rectangle 5"/>
           <p:cNvSpPr/>
           <p:nvPr/>
         </p:nvSpPr>
         <p:spPr>
           <a:xfrm>
-            <a:off x="1106424" y="1883664"/>
-            <a:ext cx="109728" cy="109728"/>
-          </a:xfrm>
-          <a:prstGeom prst="ellipse">
-            <a:avLst/>
+            <a:off x="685800" y="1682496"/>
+            <a:ext cx="1778508" cy="1993392"/>
+          </a:xfrm>
+          <a:prstGeom prst="roundRect">
+            <a:avLst>
+              <a:gd name="adj" fmla="val 5000"/>
+            </a:avLst>
           </a:prstGeom>
           <a:solidFill>
-            <a:srgbClr val="7BA060"/>
+            <a:srgbClr val="EEF4EA"/>
           </a:solidFill>
           <a:ln>
             <a:noFill/>
@@ -6271,14 +8985,82 @@
       </p:sp>
       <p:sp>
         <p:nvSpPr>
-          <p:cNvPr id="8" name="TextBox 7"/>
+          <p:cNvPr id="7" name="Oval 6"/>
+          <p:cNvSpPr/>
+          <p:nvPr/>
+        </p:nvSpPr>
+        <p:spPr>
+          <a:xfrm>
+            <a:off x="1273302" y="1837943"/>
+            <a:ext cx="603504" cy="603504"/>
+          </a:xfrm>
+          <a:prstGeom prst="ellipse">
+            <a:avLst/>
+          </a:prstGeom>
+          <a:solidFill>
+            <a:srgbClr val="4A7331"/>
+          </a:solidFill>
+          <a:ln>
+            <a:noFill/>
+          </a:ln>
+          <a:effectLst/>
+        </p:spPr>
+        <p:style>
+          <a:lnRef idx="1">
+            <a:schemeClr val="accent1"/>
+          </a:lnRef>
+          <a:fillRef idx="3">
+            <a:schemeClr val="accent1"/>
+          </a:fillRef>
+          <a:effectRef idx="2">
+            <a:schemeClr val="accent1"/>
+          </a:effectRef>
+          <a:fontRef idx="minor">
+            <a:schemeClr val="lt1"/>
+          </a:fontRef>
+        </p:style>
+        <p:txBody>
+          <a:bodyPr rtlCol="0" anchor="ctr"/>
+          <a:lstStyle/>
+          <a:p>
+            <a:pPr algn="ctr"/>
+          </a:p>
+        </p:txBody>
+      </p:sp>
+      <p:pic>
+        <p:nvPicPr>
+          <p:cNvPr id="8" name="Picture 7" descr="stall.png"/>
+          <p:cNvPicPr>
+            <a:picLocks noChangeAspect="1"/>
+          </p:cNvPicPr>
+          <p:nvPr/>
+        </p:nvPicPr>
+        <p:blipFill>
+          <a:blip r:embed="rId2"/>
+          <a:stretch>
+            <a:fillRect/>
+          </a:stretch>
+        </p:blipFill>
+        <p:spPr>
+          <a:xfrm>
+            <a:off x="1392174" y="1956815"/>
+            <a:ext cx="365760" cy="365760"/>
+          </a:xfrm>
+          <a:prstGeom prst="rect">
+            <a:avLst/>
+          </a:prstGeom>
+        </p:spPr>
+      </p:pic>
+      <p:sp>
+        <p:nvSpPr>
+          <p:cNvPr id="9" name="TextBox 8"/>
           <p:cNvSpPr txBox="1"/>
           <p:nvPr/>
         </p:nvSpPr>
         <p:spPr>
           <a:xfrm>
-            <a:off x="1399032" y="1810512"/>
-            <a:ext cx="6583680" cy="247650"/>
+            <a:off x="813816" y="2596896"/>
+            <a:ext cx="1522476" cy="457200"/>
           </a:xfrm>
           <a:prstGeom prst="rect">
             <a:avLst/>
@@ -6291,67 +9073,23 @@
           </a:bodyPr>
           <a:lstStyle/>
           <a:p>
-            <a:pPr algn="l">
+            <a:pPr algn="ctr">
               <a:lnSpc>
-                <a:spcPct val="130000"/>
+                <a:spcPct val="110000"/>
               </a:lnSpc>
               <a:spcAft>
                 <a:spcPts val="0"/>
               </a:spcAft>
             </a:pPr>
             <a:r>
-              <a:rPr sz="1500" b="0" i="0">
-                <a:solidFill>
-                  <a:srgbClr val="2E3436"/>
-                </a:solidFill>
-                <a:latin typeface="Karla"/>
-              </a:rPr>
-              <a:t>Is there any cost for trips, books or equipment?</a:t>
-            </a:r>
-          </a:p>
-        </p:txBody>
-      </p:sp>
-      <p:sp>
-        <p:nvSpPr>
-          <p:cNvPr id="9" name="Oval 8"/>
-          <p:cNvSpPr/>
-          <p:nvPr/>
-        </p:nvSpPr>
-        <p:spPr>
-          <a:xfrm>
-            <a:off x="1106424" y="2277618"/>
-            <a:ext cx="109728" cy="109728"/>
-          </a:xfrm>
-          <a:prstGeom prst="ellipse">
-            <a:avLst/>
-          </a:prstGeom>
-          <a:solidFill>
-            <a:srgbClr val="7BA060"/>
-          </a:solidFill>
-          <a:ln>
-            <a:noFill/>
-          </a:ln>
-          <a:effectLst/>
-        </p:spPr>
-        <p:style>
-          <a:lnRef idx="1">
-            <a:schemeClr val="accent1"/>
-          </a:lnRef>
-          <a:fillRef idx="3">
-            <a:schemeClr val="accent1"/>
-          </a:fillRef>
-          <a:effectRef idx="2">
-            <a:schemeClr val="accent1"/>
-          </a:effectRef>
-          <a:fontRef idx="minor">
-            <a:schemeClr val="lt1"/>
-          </a:fontRef>
-        </p:style>
-        <p:txBody>
-          <a:bodyPr rtlCol="0" anchor="ctr"/>
-          <a:lstStyle/>
-          <a:p>
-            <a:pPr algn="ctr"/>
+              <a:rPr sz="1300" b="1" i="0">
+                <a:solidFill>
+                  <a:srgbClr val="4A7331"/>
+                </a:solidFill>
+                <a:latin typeface="Libre Caslon Display"/>
+              </a:rPr>
+              <a:t>Fernbrook School</a:t>
+            </a:r>
           </a:p>
         </p:txBody>
       </p:sp>
@@ -6363,136 +9101,8 @@
         </p:nvSpPr>
         <p:spPr>
           <a:xfrm>
-            <a:off x="1399032" y="2204466"/>
-            <a:ext cx="6583680" cy="247650"/>
-          </a:xfrm>
-          <a:prstGeom prst="rect">
-            <a:avLst/>
-          </a:prstGeom>
-          <a:noFill/>
-        </p:spPr>
-        <p:txBody>
-          <a:bodyPr wrap="square" anchor="t" lIns="0" rIns="0" tIns="0" bIns="0">
-            <a:spAutoFit/>
-          </a:bodyPr>
-          <a:lstStyle/>
-          <a:p>
-            <a:pPr algn="l">
-              <a:lnSpc>
-                <a:spcPct val="130000"/>
-              </a:lnSpc>
-              <a:spcAft>
-                <a:spcPts val="0"/>
-              </a:spcAft>
-            </a:pPr>
-            <a:r>
-              <a:rPr sz="1500" b="0" i="0">
-                <a:solidFill>
-                  <a:srgbClr val="2E3436"/>
-                </a:solidFill>
-                <a:latin typeface="Karla"/>
-              </a:rPr>
-              <a:t>Is there a bursary or any help with costs, and how do I apply?</a:t>
-            </a:r>
-          </a:p>
-        </p:txBody>
-      </p:sp>
-      <p:sp>
-        <p:nvSpPr>
-          <p:cNvPr id="11" name="Oval 10"/>
-          <p:cNvSpPr/>
-          <p:nvPr/>
-        </p:nvSpPr>
-        <p:spPr>
-          <a:xfrm>
-            <a:off x="1106424" y="2671572"/>
-            <a:ext cx="109728" cy="109728"/>
-          </a:xfrm>
-          <a:prstGeom prst="ellipse">
-            <a:avLst/>
-          </a:prstGeom>
-          <a:solidFill>
-            <a:srgbClr val="7BA060"/>
-          </a:solidFill>
-          <a:ln>
-            <a:noFill/>
-          </a:ln>
-          <a:effectLst/>
-        </p:spPr>
-        <p:style>
-          <a:lnRef idx="1">
-            <a:schemeClr val="accent1"/>
-          </a:lnRef>
-          <a:fillRef idx="3">
-            <a:schemeClr val="accent1"/>
-          </a:fillRef>
-          <a:effectRef idx="2">
-            <a:schemeClr val="accent1"/>
-          </a:effectRef>
-          <a:fontRef idx="minor">
-            <a:schemeClr val="lt1"/>
-          </a:fontRef>
-        </p:style>
-        <p:txBody>
-          <a:bodyPr rtlCol="0" anchor="ctr"/>
-          <a:lstStyle/>
-          <a:p>
-            <a:pPr algn="ctr"/>
-          </a:p>
-        </p:txBody>
-      </p:sp>
-      <p:sp>
-        <p:nvSpPr>
-          <p:cNvPr id="12" name="TextBox 11"/>
-          <p:cNvSpPr txBox="1"/>
-          <p:nvPr/>
-        </p:nvSpPr>
-        <p:spPr>
-          <a:xfrm>
-            <a:off x="1399032" y="2598420"/>
-            <a:ext cx="6583680" cy="247650"/>
-          </a:xfrm>
-          <a:prstGeom prst="rect">
-            <a:avLst/>
-          </a:prstGeom>
-          <a:noFill/>
-        </p:spPr>
-        <p:txBody>
-          <a:bodyPr wrap="square" anchor="t" lIns="0" rIns="0" tIns="0" bIns="0">
-            <a:spAutoFit/>
-          </a:bodyPr>
-          <a:lstStyle/>
-          <a:p>
-            <a:pPr algn="l">
-              <a:lnSpc>
-                <a:spcPct val="130000"/>
-              </a:lnSpc>
-              <a:spcAft>
-                <a:spcPts val="0"/>
-              </a:spcAft>
-            </a:pPr>
-            <a:r>
-              <a:rPr sz="1500" b="0" i="0">
-                <a:solidFill>
-                  <a:srgbClr val="2E3436"/>
-                </a:solidFill>
-                <a:latin typeface="Karla"/>
-              </a:rPr>
-              <a:t>How do most students get here in the morning?</a:t>
-            </a:r>
-          </a:p>
-        </p:txBody>
-      </p:sp>
-      <p:sp>
-        <p:nvSpPr>
-          <p:cNvPr id="13" name="TextBox 12"/>
-          <p:cNvSpPr txBox="1"/>
-          <p:nvPr/>
-        </p:nvSpPr>
-        <p:spPr>
-          <a:xfrm>
-            <a:off x="685800" y="4041648"/>
-            <a:ext cx="7772400" cy="310896"/>
+            <a:off x="813816" y="3127248"/>
+            <a:ext cx="1522476" cy="548640"/>
           </a:xfrm>
           <a:prstGeom prst="rect">
             <a:avLst/>
@@ -6514,20 +9124,110 @@
               </a:spcAft>
             </a:pPr>
             <a:r>
-              <a:rPr sz="1150" b="0" i="1">
+              <a:rPr sz="1050" b="0" i="1">
                 <a:solidFill>
                   <a:srgbClr val="5C6552"/>
                 </a:solidFill>
                 <a:latin typeface="Karla"/>
               </a:rPr>
-              <a:t>Add one of your own. The best question is the one you actually want the answer to.</a:t>
-            </a:r>
+              <a:t>School sixth form</a:t>
+            </a:r>
+          </a:p>
+        </p:txBody>
+      </p:sp>
+      <p:sp>
+        <p:nvSpPr>
+          <p:cNvPr id="11" name="Rounded Rectangle 10"/>
+          <p:cNvSpPr/>
+          <p:nvPr/>
+        </p:nvSpPr>
+        <p:spPr>
+          <a:xfrm>
+            <a:off x="2683764" y="1682496"/>
+            <a:ext cx="1778508" cy="1993392"/>
+          </a:xfrm>
+          <a:prstGeom prst="roundRect">
+            <a:avLst>
+              <a:gd name="adj" fmla="val 5000"/>
+            </a:avLst>
+          </a:prstGeom>
+          <a:solidFill>
+            <a:srgbClr val="EEF4EA"/>
+          </a:solidFill>
+          <a:ln>
+            <a:noFill/>
+          </a:ln>
+          <a:effectLst/>
+        </p:spPr>
+        <p:style>
+          <a:lnRef idx="1">
+            <a:schemeClr val="accent1"/>
+          </a:lnRef>
+          <a:fillRef idx="3">
+            <a:schemeClr val="accent1"/>
+          </a:fillRef>
+          <a:effectRef idx="2">
+            <a:schemeClr val="accent1"/>
+          </a:effectRef>
+          <a:fontRef idx="minor">
+            <a:schemeClr val="lt1"/>
+          </a:fontRef>
+        </p:style>
+        <p:txBody>
+          <a:bodyPr rtlCol="0" anchor="ctr"/>
+          <a:lstStyle/>
+          <a:p>
+            <a:pPr algn="ctr"/>
+          </a:p>
+        </p:txBody>
+      </p:sp>
+      <p:sp>
+        <p:nvSpPr>
+          <p:cNvPr id="12" name="Oval 11"/>
+          <p:cNvSpPr/>
+          <p:nvPr/>
+        </p:nvSpPr>
+        <p:spPr>
+          <a:xfrm>
+            <a:off x="3271266" y="1837943"/>
+            <a:ext cx="603504" cy="603504"/>
+          </a:xfrm>
+          <a:prstGeom prst="ellipse">
+            <a:avLst/>
+          </a:prstGeom>
+          <a:solidFill>
+            <a:srgbClr val="4A7331"/>
+          </a:solidFill>
+          <a:ln>
+            <a:noFill/>
+          </a:ln>
+          <a:effectLst/>
+        </p:spPr>
+        <p:style>
+          <a:lnRef idx="1">
+            <a:schemeClr val="accent1"/>
+          </a:lnRef>
+          <a:fillRef idx="3">
+            <a:schemeClr val="accent1"/>
+          </a:fillRef>
+          <a:effectRef idx="2">
+            <a:schemeClr val="accent1"/>
+          </a:effectRef>
+          <a:fontRef idx="minor">
+            <a:schemeClr val="lt1"/>
+          </a:fontRef>
+        </p:style>
+        <p:txBody>
+          <a:bodyPr rtlCol="0" anchor="ctr"/>
+          <a:lstStyle/>
+          <a:p>
+            <a:pPr algn="ctr"/>
           </a:p>
         </p:txBody>
       </p:sp>
       <p:pic>
         <p:nvPicPr>
-          <p:cNvPr id="14" name="Picture 13" descr="logo-mark.png"/>
+          <p:cNvPr id="13" name="Picture 12" descr="stall.png"/>
           <p:cNvPicPr>
             <a:picLocks noChangeAspect="1"/>
           </p:cNvPicPr>
@@ -6541,6 +9241,940 @@
         </p:blipFill>
         <p:spPr>
           <a:xfrm>
+            <a:off x="3390138" y="1956815"/>
+            <a:ext cx="365760" cy="365760"/>
+          </a:xfrm>
+          <a:prstGeom prst="rect">
+            <a:avLst/>
+          </a:prstGeom>
+        </p:spPr>
+      </p:pic>
+      <p:sp>
+        <p:nvSpPr>
+          <p:cNvPr id="14" name="TextBox 13"/>
+          <p:cNvSpPr txBox="1"/>
+          <p:nvPr/>
+        </p:nvSpPr>
+        <p:spPr>
+          <a:xfrm>
+            <a:off x="2811780" y="2596896"/>
+            <a:ext cx="1522476" cy="457200"/>
+          </a:xfrm>
+          <a:prstGeom prst="rect">
+            <a:avLst/>
+          </a:prstGeom>
+          <a:noFill/>
+        </p:spPr>
+        <p:txBody>
+          <a:bodyPr wrap="square" anchor="t" lIns="0" rIns="0" tIns="0" bIns="0">
+            <a:spAutoFit/>
+          </a:bodyPr>
+          <a:lstStyle/>
+          <a:p>
+            <a:pPr algn="ctr">
+              <a:lnSpc>
+                <a:spcPct val="110000"/>
+              </a:lnSpc>
+              <a:spcAft>
+                <a:spcPts val="0"/>
+              </a:spcAft>
+            </a:pPr>
+            <a:r>
+              <a:rPr sz="1300" b="1" i="0">
+                <a:solidFill>
+                  <a:srgbClr val="4A7331"/>
+                </a:solidFill>
+                <a:latin typeface="Libre Caslon Display"/>
+              </a:rPr>
+              <a:t>Kestrel Vale College</a:t>
+            </a:r>
+          </a:p>
+        </p:txBody>
+      </p:sp>
+      <p:sp>
+        <p:nvSpPr>
+          <p:cNvPr id="15" name="TextBox 14"/>
+          <p:cNvSpPr txBox="1"/>
+          <p:nvPr/>
+        </p:nvSpPr>
+        <p:spPr>
+          <a:xfrm>
+            <a:off x="2811780" y="3127248"/>
+            <a:ext cx="1522476" cy="548640"/>
+          </a:xfrm>
+          <a:prstGeom prst="rect">
+            <a:avLst/>
+          </a:prstGeom>
+          <a:noFill/>
+        </p:spPr>
+        <p:txBody>
+          <a:bodyPr wrap="square" anchor="t" lIns="0" rIns="0" tIns="0" bIns="0">
+            <a:spAutoFit/>
+          </a:bodyPr>
+          <a:lstStyle/>
+          <a:p>
+            <a:pPr algn="ctr">
+              <a:lnSpc>
+                <a:spcPct val="125000"/>
+              </a:lnSpc>
+              <a:spcAft>
+                <a:spcPts val="0"/>
+              </a:spcAft>
+            </a:pPr>
+            <a:r>
+              <a:rPr sz="1050" b="0" i="1">
+                <a:solidFill>
+                  <a:srgbClr val="5C6552"/>
+                </a:solidFill>
+                <a:latin typeface="Karla"/>
+              </a:rPr>
+              <a:t>Further education college</a:t>
+            </a:r>
+          </a:p>
+        </p:txBody>
+      </p:sp>
+      <p:sp>
+        <p:nvSpPr>
+          <p:cNvPr id="16" name="Rounded Rectangle 15"/>
+          <p:cNvSpPr/>
+          <p:nvPr/>
+        </p:nvSpPr>
+        <p:spPr>
+          <a:xfrm>
+            <a:off x="4681728" y="1682496"/>
+            <a:ext cx="1778508" cy="1993392"/>
+          </a:xfrm>
+          <a:prstGeom prst="roundRect">
+            <a:avLst>
+              <a:gd name="adj" fmla="val 5000"/>
+            </a:avLst>
+          </a:prstGeom>
+          <a:solidFill>
+            <a:srgbClr val="EEF4EA"/>
+          </a:solidFill>
+          <a:ln>
+            <a:noFill/>
+          </a:ln>
+          <a:effectLst/>
+        </p:spPr>
+        <p:style>
+          <a:lnRef idx="1">
+            <a:schemeClr val="accent1"/>
+          </a:lnRef>
+          <a:fillRef idx="3">
+            <a:schemeClr val="accent1"/>
+          </a:fillRef>
+          <a:effectRef idx="2">
+            <a:schemeClr val="accent1"/>
+          </a:effectRef>
+          <a:fontRef idx="minor">
+            <a:schemeClr val="lt1"/>
+          </a:fontRef>
+        </p:style>
+        <p:txBody>
+          <a:bodyPr rtlCol="0" anchor="ctr"/>
+          <a:lstStyle/>
+          <a:p>
+            <a:pPr algn="ctr"/>
+          </a:p>
+        </p:txBody>
+      </p:sp>
+      <p:sp>
+        <p:nvSpPr>
+          <p:cNvPr id="17" name="Oval 16"/>
+          <p:cNvSpPr/>
+          <p:nvPr/>
+        </p:nvSpPr>
+        <p:spPr>
+          <a:xfrm>
+            <a:off x="5269230" y="1837943"/>
+            <a:ext cx="603504" cy="603504"/>
+          </a:xfrm>
+          <a:prstGeom prst="ellipse">
+            <a:avLst/>
+          </a:prstGeom>
+          <a:solidFill>
+            <a:srgbClr val="4A7331"/>
+          </a:solidFill>
+          <a:ln>
+            <a:noFill/>
+          </a:ln>
+          <a:effectLst/>
+        </p:spPr>
+        <p:style>
+          <a:lnRef idx="1">
+            <a:schemeClr val="accent1"/>
+          </a:lnRef>
+          <a:fillRef idx="3">
+            <a:schemeClr val="accent1"/>
+          </a:fillRef>
+          <a:effectRef idx="2">
+            <a:schemeClr val="accent1"/>
+          </a:effectRef>
+          <a:fontRef idx="minor">
+            <a:schemeClr val="lt1"/>
+          </a:fontRef>
+        </p:style>
+        <p:txBody>
+          <a:bodyPr rtlCol="0" anchor="ctr"/>
+          <a:lstStyle/>
+          <a:p>
+            <a:pPr algn="ctr"/>
+          </a:p>
+        </p:txBody>
+      </p:sp>
+      <p:pic>
+        <p:nvPicPr>
+          <p:cNvPr id="18" name="Picture 17" descr="stall.png"/>
+          <p:cNvPicPr>
+            <a:picLocks noChangeAspect="1"/>
+          </p:cNvPicPr>
+          <p:nvPr/>
+        </p:nvPicPr>
+        <p:blipFill>
+          <a:blip r:embed="rId2"/>
+          <a:stretch>
+            <a:fillRect/>
+          </a:stretch>
+        </p:blipFill>
+        <p:spPr>
+          <a:xfrm>
+            <a:off x="5388102" y="1956815"/>
+            <a:ext cx="365760" cy="365760"/>
+          </a:xfrm>
+          <a:prstGeom prst="rect">
+            <a:avLst/>
+          </a:prstGeom>
+        </p:spPr>
+      </p:pic>
+      <p:sp>
+        <p:nvSpPr>
+          <p:cNvPr id="19" name="TextBox 18"/>
+          <p:cNvSpPr txBox="1"/>
+          <p:nvPr/>
+        </p:nvSpPr>
+        <p:spPr>
+          <a:xfrm>
+            <a:off x="4809744" y="2596896"/>
+            <a:ext cx="1522476" cy="457200"/>
+          </a:xfrm>
+          <a:prstGeom prst="rect">
+            <a:avLst/>
+          </a:prstGeom>
+          <a:noFill/>
+        </p:spPr>
+        <p:txBody>
+          <a:bodyPr wrap="square" anchor="t" lIns="0" rIns="0" tIns="0" bIns="0">
+            <a:spAutoFit/>
+          </a:bodyPr>
+          <a:lstStyle/>
+          <a:p>
+            <a:pPr algn="ctr">
+              <a:lnSpc>
+                <a:spcPct val="110000"/>
+              </a:lnSpc>
+              <a:spcAft>
+                <a:spcPts val="0"/>
+              </a:spcAft>
+            </a:pPr>
+            <a:r>
+              <a:rPr sz="1300" b="1" i="0">
+                <a:solidFill>
+                  <a:srgbClr val="4A7331"/>
+                </a:solidFill>
+                <a:latin typeface="Libre Caslon Display"/>
+              </a:rPr>
+              <a:t>Hillmarsh Sixth Form College</a:t>
+            </a:r>
+          </a:p>
+        </p:txBody>
+      </p:sp>
+      <p:sp>
+        <p:nvSpPr>
+          <p:cNvPr id="20" name="TextBox 19"/>
+          <p:cNvSpPr txBox="1"/>
+          <p:nvPr/>
+        </p:nvSpPr>
+        <p:spPr>
+          <a:xfrm>
+            <a:off x="4809744" y="3127248"/>
+            <a:ext cx="1522476" cy="548640"/>
+          </a:xfrm>
+          <a:prstGeom prst="rect">
+            <a:avLst/>
+          </a:prstGeom>
+          <a:noFill/>
+        </p:spPr>
+        <p:txBody>
+          <a:bodyPr wrap="square" anchor="t" lIns="0" rIns="0" tIns="0" bIns="0">
+            <a:spAutoFit/>
+          </a:bodyPr>
+          <a:lstStyle/>
+          <a:p>
+            <a:pPr algn="ctr">
+              <a:lnSpc>
+                <a:spcPct val="125000"/>
+              </a:lnSpc>
+              <a:spcAft>
+                <a:spcPts val="0"/>
+              </a:spcAft>
+            </a:pPr>
+            <a:r>
+              <a:rPr sz="1050" b="0" i="1">
+                <a:solidFill>
+                  <a:srgbClr val="5C6552"/>
+                </a:solidFill>
+                <a:latin typeface="Karla"/>
+              </a:rPr>
+              <a:t>Sixth form college</a:t>
+            </a:r>
+          </a:p>
+        </p:txBody>
+      </p:sp>
+      <p:sp>
+        <p:nvSpPr>
+          <p:cNvPr id="21" name="Rounded Rectangle 20"/>
+          <p:cNvSpPr/>
+          <p:nvPr/>
+        </p:nvSpPr>
+        <p:spPr>
+          <a:xfrm>
+            <a:off x="6679692" y="1682496"/>
+            <a:ext cx="1778508" cy="1993392"/>
+          </a:xfrm>
+          <a:prstGeom prst="roundRect">
+            <a:avLst>
+              <a:gd name="adj" fmla="val 5000"/>
+            </a:avLst>
+          </a:prstGeom>
+          <a:solidFill>
+            <a:srgbClr val="EEF4EA"/>
+          </a:solidFill>
+          <a:ln>
+            <a:noFill/>
+          </a:ln>
+          <a:effectLst/>
+        </p:spPr>
+        <p:style>
+          <a:lnRef idx="1">
+            <a:schemeClr val="accent1"/>
+          </a:lnRef>
+          <a:fillRef idx="3">
+            <a:schemeClr val="accent1"/>
+          </a:fillRef>
+          <a:effectRef idx="2">
+            <a:schemeClr val="accent1"/>
+          </a:effectRef>
+          <a:fontRef idx="minor">
+            <a:schemeClr val="lt1"/>
+          </a:fontRef>
+        </p:style>
+        <p:txBody>
+          <a:bodyPr rtlCol="0" anchor="ctr"/>
+          <a:lstStyle/>
+          <a:p>
+            <a:pPr algn="ctr"/>
+          </a:p>
+        </p:txBody>
+      </p:sp>
+      <p:sp>
+        <p:nvSpPr>
+          <p:cNvPr id="22" name="Oval 21"/>
+          <p:cNvSpPr/>
+          <p:nvPr/>
+        </p:nvSpPr>
+        <p:spPr>
+          <a:xfrm>
+            <a:off x="7267194" y="1837943"/>
+            <a:ext cx="603504" cy="603504"/>
+          </a:xfrm>
+          <a:prstGeom prst="ellipse">
+            <a:avLst/>
+          </a:prstGeom>
+          <a:solidFill>
+            <a:srgbClr val="4A7331"/>
+          </a:solidFill>
+          <a:ln>
+            <a:noFill/>
+          </a:ln>
+          <a:effectLst/>
+        </p:spPr>
+        <p:style>
+          <a:lnRef idx="1">
+            <a:schemeClr val="accent1"/>
+          </a:lnRef>
+          <a:fillRef idx="3">
+            <a:schemeClr val="accent1"/>
+          </a:fillRef>
+          <a:effectRef idx="2">
+            <a:schemeClr val="accent1"/>
+          </a:effectRef>
+          <a:fontRef idx="minor">
+            <a:schemeClr val="lt1"/>
+          </a:fontRef>
+        </p:style>
+        <p:txBody>
+          <a:bodyPr rtlCol="0" anchor="ctr"/>
+          <a:lstStyle/>
+          <a:p>
+            <a:pPr algn="ctr"/>
+          </a:p>
+        </p:txBody>
+      </p:sp>
+      <p:pic>
+        <p:nvPicPr>
+          <p:cNvPr id="23" name="Picture 22" descr="stall.png"/>
+          <p:cNvPicPr>
+            <a:picLocks noChangeAspect="1"/>
+          </p:cNvPicPr>
+          <p:nvPr/>
+        </p:nvPicPr>
+        <p:blipFill>
+          <a:blip r:embed="rId2"/>
+          <a:stretch>
+            <a:fillRect/>
+          </a:stretch>
+        </p:blipFill>
+        <p:spPr>
+          <a:xfrm>
+            <a:off x="7386066" y="1956815"/>
+            <a:ext cx="365760" cy="365760"/>
+          </a:xfrm>
+          <a:prstGeom prst="rect">
+            <a:avLst/>
+          </a:prstGeom>
+        </p:spPr>
+      </p:pic>
+      <p:sp>
+        <p:nvSpPr>
+          <p:cNvPr id="24" name="TextBox 23"/>
+          <p:cNvSpPr txBox="1"/>
+          <p:nvPr/>
+        </p:nvSpPr>
+        <p:spPr>
+          <a:xfrm>
+            <a:off x="6807707" y="2596896"/>
+            <a:ext cx="1522476" cy="457200"/>
+          </a:xfrm>
+          <a:prstGeom prst="rect">
+            <a:avLst/>
+          </a:prstGeom>
+          <a:noFill/>
+        </p:spPr>
+        <p:txBody>
+          <a:bodyPr wrap="square" anchor="t" lIns="0" rIns="0" tIns="0" bIns="0">
+            <a:spAutoFit/>
+          </a:bodyPr>
+          <a:lstStyle/>
+          <a:p>
+            <a:pPr algn="ctr">
+              <a:lnSpc>
+                <a:spcPct val="110000"/>
+              </a:lnSpc>
+              <a:spcAft>
+                <a:spcPts val="0"/>
+              </a:spcAft>
+            </a:pPr>
+            <a:r>
+              <a:rPr sz="1300" b="1" i="0">
+                <a:solidFill>
+                  <a:srgbClr val="4A7331"/>
+                </a:solidFill>
+                <a:latin typeface="Libre Caslon Display"/>
+              </a:rPr>
+              <a:t>Brackwell Engineering</a:t>
+            </a:r>
+          </a:p>
+        </p:txBody>
+      </p:sp>
+      <p:sp>
+        <p:nvSpPr>
+          <p:cNvPr id="25" name="TextBox 24"/>
+          <p:cNvSpPr txBox="1"/>
+          <p:nvPr/>
+        </p:nvSpPr>
+        <p:spPr>
+          <a:xfrm>
+            <a:off x="6807707" y="3127248"/>
+            <a:ext cx="1522476" cy="548640"/>
+          </a:xfrm>
+          <a:prstGeom prst="rect">
+            <a:avLst/>
+          </a:prstGeom>
+          <a:noFill/>
+        </p:spPr>
+        <p:txBody>
+          <a:bodyPr wrap="square" anchor="t" lIns="0" rIns="0" tIns="0" bIns="0">
+            <a:spAutoFit/>
+          </a:bodyPr>
+          <a:lstStyle/>
+          <a:p>
+            <a:pPr algn="ctr">
+              <a:lnSpc>
+                <a:spcPct val="125000"/>
+              </a:lnSpc>
+              <a:spcAft>
+                <a:spcPts val="0"/>
+              </a:spcAft>
+            </a:pPr>
+            <a:r>
+              <a:rPr sz="1050" b="0" i="1">
+                <a:solidFill>
+                  <a:srgbClr val="5C6552"/>
+                </a:solidFill>
+                <a:latin typeface="Karla"/>
+              </a:rPr>
+              <a:t>Apprenticeship provider</a:t>
+            </a:r>
+          </a:p>
+        </p:txBody>
+      </p:sp>
+      <p:sp>
+        <p:nvSpPr>
+          <p:cNvPr id="26" name="Rounded Rectangle 25"/>
+          <p:cNvSpPr/>
+          <p:nvPr/>
+        </p:nvSpPr>
+        <p:spPr>
+          <a:xfrm>
+            <a:off x="685800" y="3822191"/>
+            <a:ext cx="7772400" cy="603504"/>
+          </a:xfrm>
+          <a:prstGeom prst="roundRect">
+            <a:avLst>
+              <a:gd name="adj" fmla="val 12000"/>
+            </a:avLst>
+          </a:prstGeom>
+          <a:solidFill>
+            <a:srgbClr val="4A7331"/>
+          </a:solidFill>
+          <a:ln>
+            <a:noFill/>
+          </a:ln>
+          <a:effectLst/>
+        </p:spPr>
+        <p:style>
+          <a:lnRef idx="1">
+            <a:schemeClr val="accent1"/>
+          </a:lnRef>
+          <a:fillRef idx="3">
+            <a:schemeClr val="accent1"/>
+          </a:fillRef>
+          <a:effectRef idx="2">
+            <a:schemeClr val="accent1"/>
+          </a:effectRef>
+          <a:fontRef idx="minor">
+            <a:schemeClr val="lt1"/>
+          </a:fontRef>
+        </p:style>
+        <p:txBody>
+          <a:bodyPr rtlCol="0" anchor="ctr"/>
+          <a:lstStyle/>
+          <a:p>
+            <a:pPr algn="ctr"/>
+          </a:p>
+        </p:txBody>
+      </p:sp>
+      <p:sp>
+        <p:nvSpPr>
+          <p:cNvPr id="27" name="Oval 26"/>
+          <p:cNvSpPr/>
+          <p:nvPr/>
+        </p:nvSpPr>
+        <p:spPr>
+          <a:xfrm>
+            <a:off x="923544" y="3986783"/>
+            <a:ext cx="274320" cy="274320"/>
+          </a:xfrm>
+          <a:prstGeom prst="ellipse">
+            <a:avLst/>
+          </a:prstGeom>
+          <a:solidFill>
+            <a:srgbClr val="EEF4EA"/>
+          </a:solidFill>
+          <a:ln>
+            <a:noFill/>
+          </a:ln>
+          <a:effectLst/>
+        </p:spPr>
+        <p:style>
+          <a:lnRef idx="1">
+            <a:schemeClr val="accent1"/>
+          </a:lnRef>
+          <a:fillRef idx="3">
+            <a:schemeClr val="accent1"/>
+          </a:fillRef>
+          <a:effectRef idx="2">
+            <a:schemeClr val="accent1"/>
+          </a:effectRef>
+          <a:fontRef idx="minor">
+            <a:schemeClr val="lt1"/>
+          </a:fontRef>
+        </p:style>
+        <p:txBody>
+          <a:bodyPr rtlCol="0" anchor="ctr"/>
+          <a:lstStyle/>
+          <a:p>
+            <a:pPr algn="ctr"/>
+          </a:p>
+        </p:txBody>
+      </p:sp>
+      <p:sp>
+        <p:nvSpPr>
+          <p:cNvPr id="28" name="TextBox 27"/>
+          <p:cNvSpPr txBox="1"/>
+          <p:nvPr/>
+        </p:nvSpPr>
+        <p:spPr>
+          <a:xfrm>
+            <a:off x="923544" y="4032504"/>
+            <a:ext cx="274320" cy="201168"/>
+          </a:xfrm>
+          <a:prstGeom prst="rect">
+            <a:avLst/>
+          </a:prstGeom>
+          <a:noFill/>
+        </p:spPr>
+        <p:txBody>
+          <a:bodyPr wrap="square" anchor="t" lIns="0" rIns="0" tIns="0" bIns="0">
+            <a:spAutoFit/>
+          </a:bodyPr>
+          <a:lstStyle/>
+          <a:p>
+            <a:pPr algn="ctr">
+              <a:lnSpc>
+                <a:spcPct val="125000"/>
+              </a:lnSpc>
+              <a:spcAft>
+                <a:spcPts val="0"/>
+              </a:spcAft>
+            </a:pPr>
+            <a:r>
+              <a:rPr sz="1050" b="1" i="0">
+                <a:solidFill>
+                  <a:srgbClr val="4A7331"/>
+                </a:solidFill>
+                <a:latin typeface="Karla"/>
+              </a:rPr>
+              <a:t>1</a:t>
+            </a:r>
+          </a:p>
+        </p:txBody>
+      </p:sp>
+      <p:sp>
+        <p:nvSpPr>
+          <p:cNvPr id="29" name="TextBox 28"/>
+          <p:cNvSpPr txBox="1"/>
+          <p:nvPr/>
+        </p:nvSpPr>
+        <p:spPr>
+          <a:xfrm>
+            <a:off x="1289304" y="3948684"/>
+            <a:ext cx="2011680" cy="350520"/>
+          </a:xfrm>
+          <a:prstGeom prst="rect">
+            <a:avLst/>
+          </a:prstGeom>
+          <a:noFill/>
+        </p:spPr>
+        <p:txBody>
+          <a:bodyPr wrap="square" anchor="ctr" lIns="0" rIns="0" tIns="0" bIns="0">
+            <a:spAutoFit/>
+          </a:bodyPr>
+          <a:lstStyle/>
+          <a:p>
+            <a:pPr algn="l">
+              <a:lnSpc>
+                <a:spcPct val="120000"/>
+              </a:lnSpc>
+              <a:spcAft>
+                <a:spcPts val="0"/>
+              </a:spcAft>
+            </a:pPr>
+            <a:r>
+              <a:rPr sz="1150" b="0" i="0">
+                <a:solidFill>
+                  <a:srgbClr val="FFFDF7"/>
+                </a:solidFill>
+                <a:latin typeface="Karla"/>
+              </a:rPr>
+              <a:t>Staff: read your stall card and the rule at the bottom</a:t>
+            </a:r>
+          </a:p>
+        </p:txBody>
+      </p:sp>
+      <p:sp>
+        <p:nvSpPr>
+          <p:cNvPr id="30" name="Oval 29"/>
+          <p:cNvSpPr/>
+          <p:nvPr/>
+        </p:nvSpPr>
+        <p:spPr>
+          <a:xfrm>
+            <a:off x="3355848" y="3986783"/>
+            <a:ext cx="274320" cy="274320"/>
+          </a:xfrm>
+          <a:prstGeom prst="ellipse">
+            <a:avLst/>
+          </a:prstGeom>
+          <a:solidFill>
+            <a:srgbClr val="EEF4EA"/>
+          </a:solidFill>
+          <a:ln>
+            <a:noFill/>
+          </a:ln>
+          <a:effectLst/>
+        </p:spPr>
+        <p:style>
+          <a:lnRef idx="1">
+            <a:schemeClr val="accent1"/>
+          </a:lnRef>
+          <a:fillRef idx="3">
+            <a:schemeClr val="accent1"/>
+          </a:fillRef>
+          <a:effectRef idx="2">
+            <a:schemeClr val="accent1"/>
+          </a:effectRef>
+          <a:fontRef idx="minor">
+            <a:schemeClr val="lt1"/>
+          </a:fontRef>
+        </p:style>
+        <p:txBody>
+          <a:bodyPr rtlCol="0" anchor="ctr"/>
+          <a:lstStyle/>
+          <a:p>
+            <a:pPr algn="ctr"/>
+          </a:p>
+        </p:txBody>
+      </p:sp>
+      <p:sp>
+        <p:nvSpPr>
+          <p:cNvPr id="31" name="TextBox 30"/>
+          <p:cNvSpPr txBox="1"/>
+          <p:nvPr/>
+        </p:nvSpPr>
+        <p:spPr>
+          <a:xfrm>
+            <a:off x="3355848" y="4032504"/>
+            <a:ext cx="274320" cy="201168"/>
+          </a:xfrm>
+          <a:prstGeom prst="rect">
+            <a:avLst/>
+          </a:prstGeom>
+          <a:noFill/>
+        </p:spPr>
+        <p:txBody>
+          <a:bodyPr wrap="square" anchor="t" lIns="0" rIns="0" tIns="0" bIns="0">
+            <a:spAutoFit/>
+          </a:bodyPr>
+          <a:lstStyle/>
+          <a:p>
+            <a:pPr algn="ctr">
+              <a:lnSpc>
+                <a:spcPct val="125000"/>
+              </a:lnSpc>
+              <a:spcAft>
+                <a:spcPts val="0"/>
+              </a:spcAft>
+            </a:pPr>
+            <a:r>
+              <a:rPr sz="1050" b="1" i="0">
+                <a:solidFill>
+                  <a:srgbClr val="4A7331"/>
+                </a:solidFill>
+                <a:latin typeface="Karla"/>
+              </a:rPr>
+              <a:t>2</a:t>
+            </a:r>
+          </a:p>
+        </p:txBody>
+      </p:sp>
+      <p:sp>
+        <p:nvSpPr>
+          <p:cNvPr id="32" name="TextBox 31"/>
+          <p:cNvSpPr txBox="1"/>
+          <p:nvPr/>
+        </p:nvSpPr>
+        <p:spPr>
+          <a:xfrm>
+            <a:off x="3721608" y="3948684"/>
+            <a:ext cx="2011680" cy="350520"/>
+          </a:xfrm>
+          <a:prstGeom prst="rect">
+            <a:avLst/>
+          </a:prstGeom>
+          <a:noFill/>
+        </p:spPr>
+        <p:txBody>
+          <a:bodyPr wrap="square" anchor="ctr" lIns="0" rIns="0" tIns="0" bIns="0">
+            <a:spAutoFit/>
+          </a:bodyPr>
+          <a:lstStyle/>
+          <a:p>
+            <a:pPr algn="l">
+              <a:lnSpc>
+                <a:spcPct val="120000"/>
+              </a:lnSpc>
+              <a:spcAft>
+                <a:spcPts val="0"/>
+              </a:spcAft>
+            </a:pPr>
+            <a:r>
+              <a:rPr sz="1150" b="0" i="0">
+                <a:solidFill>
+                  <a:srgbClr val="FFFDF7"/>
+                </a:solidFill>
+                <a:latin typeface="Karla"/>
+              </a:rPr>
+              <a:t>Visitors: star the three questions you will ask</a:t>
+            </a:r>
+          </a:p>
+        </p:txBody>
+      </p:sp>
+      <p:sp>
+        <p:nvSpPr>
+          <p:cNvPr id="33" name="Oval 32"/>
+          <p:cNvSpPr/>
+          <p:nvPr/>
+        </p:nvSpPr>
+        <p:spPr>
+          <a:xfrm>
+            <a:off x="5788152" y="3986783"/>
+            <a:ext cx="274320" cy="274320"/>
+          </a:xfrm>
+          <a:prstGeom prst="ellipse">
+            <a:avLst/>
+          </a:prstGeom>
+          <a:solidFill>
+            <a:srgbClr val="EEF4EA"/>
+          </a:solidFill>
+          <a:ln>
+            <a:noFill/>
+          </a:ln>
+          <a:effectLst/>
+        </p:spPr>
+        <p:style>
+          <a:lnRef idx="1">
+            <a:schemeClr val="accent1"/>
+          </a:lnRef>
+          <a:fillRef idx="3">
+            <a:schemeClr val="accent1"/>
+          </a:fillRef>
+          <a:effectRef idx="2">
+            <a:schemeClr val="accent1"/>
+          </a:effectRef>
+          <a:fontRef idx="minor">
+            <a:schemeClr val="lt1"/>
+          </a:fontRef>
+        </p:style>
+        <p:txBody>
+          <a:bodyPr rtlCol="0" anchor="ctr"/>
+          <a:lstStyle/>
+          <a:p>
+            <a:pPr algn="ctr"/>
+          </a:p>
+        </p:txBody>
+      </p:sp>
+      <p:sp>
+        <p:nvSpPr>
+          <p:cNvPr id="34" name="TextBox 33"/>
+          <p:cNvSpPr txBox="1"/>
+          <p:nvPr/>
+        </p:nvSpPr>
+        <p:spPr>
+          <a:xfrm>
+            <a:off x="5788152" y="4032504"/>
+            <a:ext cx="274320" cy="201168"/>
+          </a:xfrm>
+          <a:prstGeom prst="rect">
+            <a:avLst/>
+          </a:prstGeom>
+          <a:noFill/>
+        </p:spPr>
+        <p:txBody>
+          <a:bodyPr wrap="square" anchor="t" lIns="0" rIns="0" tIns="0" bIns="0">
+            <a:spAutoFit/>
+          </a:bodyPr>
+          <a:lstStyle/>
+          <a:p>
+            <a:pPr algn="ctr">
+              <a:lnSpc>
+                <a:spcPct val="125000"/>
+              </a:lnSpc>
+              <a:spcAft>
+                <a:spcPts val="0"/>
+              </a:spcAft>
+            </a:pPr>
+            <a:r>
+              <a:rPr sz="1050" b="1" i="0">
+                <a:solidFill>
+                  <a:srgbClr val="4A7331"/>
+                </a:solidFill>
+                <a:latin typeface="Karla"/>
+              </a:rPr>
+              <a:t>3</a:t>
+            </a:r>
+          </a:p>
+        </p:txBody>
+      </p:sp>
+      <p:sp>
+        <p:nvSpPr>
+          <p:cNvPr id="35" name="TextBox 34"/>
+          <p:cNvSpPr txBox="1"/>
+          <p:nvPr/>
+        </p:nvSpPr>
+        <p:spPr>
+          <a:xfrm>
+            <a:off x="6153912" y="3948684"/>
+            <a:ext cx="2011680" cy="350520"/>
+          </a:xfrm>
+          <a:prstGeom prst="rect">
+            <a:avLst/>
+          </a:prstGeom>
+          <a:noFill/>
+        </p:spPr>
+        <p:txBody>
+          <a:bodyPr wrap="square" anchor="ctr" lIns="0" rIns="0" tIns="0" bIns="0">
+            <a:spAutoFit/>
+          </a:bodyPr>
+          <a:lstStyle/>
+          <a:p>
+            <a:pPr algn="l">
+              <a:lnSpc>
+                <a:spcPct val="120000"/>
+              </a:lnSpc>
+              <a:spcAft>
+                <a:spcPts val="0"/>
+              </a:spcAft>
+            </a:pPr>
+            <a:r>
+              <a:rPr sz="1150" b="0" i="0">
+                <a:solidFill>
+                  <a:srgbClr val="FFFDF7"/>
+                </a:solidFill>
+                <a:latin typeface="Karla"/>
+              </a:rPr>
+              <a:t>Tomorrow the desks become stalls</a:t>
+            </a:r>
+          </a:p>
+        </p:txBody>
+      </p:sp>
+      <p:pic>
+        <p:nvPicPr>
+          <p:cNvPr id="36" name="Picture 35" descr="logo-mark.png"/>
+          <p:cNvPicPr>
+            <a:picLocks noChangeAspect="1"/>
+          </p:cNvPicPr>
+          <p:nvPr/>
+        </p:nvPicPr>
+        <p:blipFill>
+          <a:blip r:embed="rId3"/>
+          <a:stretch>
+            <a:fillRect/>
+          </a:stretch>
+        </p:blipFill>
+        <p:spPr>
+          <a:xfrm>
             <a:off x="384048" y="4727448"/>
             <a:ext cx="158374" cy="182880"/>
           </a:xfrm>
@@ -6551,7 +10185,7 @@
       </p:pic>
       <p:sp>
         <p:nvSpPr>
-          <p:cNvPr id="15" name="TextBox 14"/>
+          <p:cNvPr id="37" name="TextBox 36"/>
           <p:cNvSpPr txBox="1"/>
           <p:nvPr/>
         </p:nvSpPr>
@@ -6593,7 +10227,7 @@
       </p:sp>
       <p:sp>
         <p:nvSpPr>
-          <p:cNvPr id="16" name="TextBox 15"/>
+          <p:cNvPr id="38" name="TextBox 37"/>
           <p:cNvSpPr txBox="1"/>
           <p:nvPr/>
         </p:nvSpPr>
@@ -6732,111 +10366,21 @@
                 </a:solidFill>
                 <a:latin typeface="Karla"/>
               </a:rPr>
-              <a:t>QUESTIONS TO ASK AT AN OPEN EVENING  ·  MORNING 5</a:t>
-            </a:r>
-          </a:p>
-        </p:txBody>
-      </p:sp>
-      <p:sp>
-        <p:nvSpPr>
-          <p:cNvPr id="4" name="Rounded Rectangle 3"/>
-          <p:cNvSpPr/>
-          <p:nvPr/>
-        </p:nvSpPr>
-        <p:spPr>
-          <a:xfrm>
-            <a:off x="685800" y="841248"/>
-            <a:ext cx="7772400" cy="3017520"/>
-          </a:xfrm>
-          <a:prstGeom prst="roundRect">
-            <a:avLst>
-              <a:gd name="adj" fmla="val 6000"/>
-            </a:avLst>
-          </a:prstGeom>
-          <a:solidFill>
-            <a:srgbClr val="EEF4EA"/>
-          </a:solidFill>
-          <a:ln>
-            <a:noFill/>
-          </a:ln>
-          <a:effectLst/>
-        </p:spPr>
-        <p:style>
-          <a:lnRef idx="1">
-            <a:schemeClr val="accent1"/>
-          </a:lnRef>
-          <a:fillRef idx="3">
-            <a:schemeClr val="accent1"/>
-          </a:fillRef>
-          <a:effectRef idx="2">
-            <a:schemeClr val="accent1"/>
-          </a:effectRef>
-          <a:fontRef idx="minor">
-            <a:schemeClr val="lt1"/>
-          </a:fontRef>
-        </p:style>
-        <p:txBody>
-          <a:bodyPr rtlCol="0" anchor="ctr"/>
-          <a:lstStyle/>
-          <a:p>
-            <a:pPr algn="ctr"/>
-          </a:p>
-        </p:txBody>
-      </p:sp>
-      <p:sp>
-        <p:nvSpPr>
-          <p:cNvPr id="5" name="Rectangle 4"/>
-          <p:cNvSpPr/>
-          <p:nvPr/>
-        </p:nvSpPr>
-        <p:spPr>
-          <a:xfrm>
-            <a:off x="685800" y="841248"/>
-            <a:ext cx="7772400" cy="54864"/>
-          </a:xfrm>
-          <a:prstGeom prst="rect">
-            <a:avLst/>
-          </a:prstGeom>
-          <a:solidFill>
-            <a:srgbClr val="7BA060"/>
-          </a:solidFill>
-          <a:ln>
-            <a:noFill/>
-          </a:ln>
-          <a:effectLst/>
-        </p:spPr>
-        <p:style>
-          <a:lnRef idx="1">
-            <a:schemeClr val="accent1"/>
-          </a:lnRef>
-          <a:fillRef idx="3">
-            <a:schemeClr val="accent1"/>
-          </a:fillRef>
-          <a:effectRef idx="2">
-            <a:schemeClr val="accent1"/>
-          </a:effectRef>
-          <a:fontRef idx="minor">
-            <a:schemeClr val="lt1"/>
-          </a:fontRef>
-        </p:style>
-        <p:txBody>
-          <a:bodyPr rtlCol="0" anchor="ctr"/>
-          <a:lstStyle/>
-          <a:p>
-            <a:pPr algn="ctr"/>
-          </a:p>
-        </p:txBody>
-      </p:sp>
-      <p:sp>
-        <p:nvSpPr>
-          <p:cNvPr id="6" name="TextBox 5"/>
+              <a:t>QUESTIONS TO ASK AT AN OPEN EVENING  ·  FRIDAY</a:t>
+            </a:r>
+          </a:p>
+        </p:txBody>
+      </p:sp>
+      <p:sp>
+        <p:nvSpPr>
+          <p:cNvPr id="4" name="TextBox 3"/>
           <p:cNvSpPr txBox="1"/>
           <p:nvPr/>
         </p:nvSpPr>
         <p:spPr>
           <a:xfrm>
-            <a:off x="1051560" y="1115568"/>
-            <a:ext cx="7040880" cy="512064"/>
+            <a:off x="685800" y="749808"/>
+            <a:ext cx="7772400" cy="512064"/>
           </a:xfrm>
           <a:prstGeom prst="rect">
             <a:avLst/>
@@ -6858,33 +10402,33 @@
               </a:spcAft>
             </a:pPr>
             <a:r>
-              <a:rPr sz="2800" b="1" i="0">
-                <a:solidFill>
-                  <a:srgbClr val="4A7331"/>
+              <a:rPr sz="3000" b="1" i="0">
+                <a:solidFill>
+                  <a:srgbClr val="2E3436"/>
                 </a:solidFill>
                 <a:latin typeface="Libre Caslon Display"/>
               </a:rPr>
-              <a:t>If it goes wrong</a:t>
-            </a:r>
-          </a:p>
-        </p:txBody>
-      </p:sp>
-      <p:sp>
-        <p:nvSpPr>
-          <p:cNvPr id="7" name="Oval 6"/>
+              <a:t>The open evening</a:t>
+            </a:r>
+          </a:p>
+        </p:txBody>
+      </p:sp>
+      <p:sp>
+        <p:nvSpPr>
+          <p:cNvPr id="5" name="Rectangle 4"/>
           <p:cNvSpPr/>
           <p:nvPr/>
         </p:nvSpPr>
         <p:spPr>
           <a:xfrm>
-            <a:off x="1106424" y="1883664"/>
-            <a:ext cx="109728" cy="109728"/>
-          </a:xfrm>
-          <a:prstGeom prst="ellipse">
+            <a:off x="685800" y="1389888"/>
+            <a:ext cx="7772400" cy="640080"/>
+          </a:xfrm>
+          <a:prstGeom prst="rect">
             <a:avLst/>
           </a:prstGeom>
           <a:solidFill>
-            <a:srgbClr val="7BA060"/>
+            <a:srgbClr val="FFFDF7"/>
           </a:solidFill>
           <a:ln>
             <a:noFill/>
@@ -6915,62 +10459,20 @@
       </p:sp>
       <p:sp>
         <p:nvSpPr>
-          <p:cNvPr id="8" name="TextBox 7"/>
-          <p:cNvSpPr txBox="1"/>
-          <p:nvPr/>
-        </p:nvSpPr>
-        <p:spPr>
-          <a:xfrm>
-            <a:off x="1399032" y="1810512"/>
-            <a:ext cx="6583680" cy="247650"/>
-          </a:xfrm>
-          <a:prstGeom prst="rect">
-            <a:avLst/>
-          </a:prstGeom>
-          <a:noFill/>
-        </p:spPr>
-        <p:txBody>
-          <a:bodyPr wrap="square" anchor="t" lIns="0" rIns="0" tIns="0" bIns="0">
-            <a:spAutoFit/>
-          </a:bodyPr>
-          <a:lstStyle/>
-          <a:p>
-            <a:pPr algn="l">
-              <a:lnSpc>
-                <a:spcPct val="130000"/>
-              </a:lnSpc>
-              <a:spcAft>
-                <a:spcPts val="0"/>
-              </a:spcAft>
-            </a:pPr>
-            <a:r>
-              <a:rPr sz="1500" b="0" i="0">
-                <a:solidFill>
-                  <a:srgbClr val="2E3436"/>
-                </a:solidFill>
-                <a:latin typeface="Karla"/>
-              </a:rPr>
-              <a:t>What happens if I pick the wrong subject in the first term?</a:t>
-            </a:r>
-          </a:p>
-        </p:txBody>
-      </p:sp>
-      <p:sp>
-        <p:nvSpPr>
-          <p:cNvPr id="9" name="Oval 8"/>
+          <p:cNvPr id="6" name="Oval 5"/>
           <p:cNvSpPr/>
           <p:nvPr/>
         </p:nvSpPr>
         <p:spPr>
           <a:xfrm>
-            <a:off x="1106424" y="2277618"/>
-            <a:ext cx="109728" cy="109728"/>
+            <a:off x="868680" y="1508760"/>
+            <a:ext cx="402336" cy="402336"/>
           </a:xfrm>
           <a:prstGeom prst="ellipse">
             <a:avLst/>
           </a:prstGeom>
           <a:solidFill>
-            <a:srgbClr val="7BA060"/>
+            <a:srgbClr val="4A7331"/>
           </a:solidFill>
           <a:ln>
             <a:noFill/>
@@ -7001,142 +10503,14 @@
       </p:sp>
       <p:sp>
         <p:nvSpPr>
-          <p:cNvPr id="10" name="TextBox 9"/>
+          <p:cNvPr id="7" name="TextBox 6"/>
           <p:cNvSpPr txBox="1"/>
           <p:nvPr/>
         </p:nvSpPr>
         <p:spPr>
           <a:xfrm>
-            <a:off x="1399032" y="2204466"/>
-            <a:ext cx="6583680" cy="247650"/>
-          </a:xfrm>
-          <a:prstGeom prst="rect">
-            <a:avLst/>
-          </a:prstGeom>
-          <a:noFill/>
-        </p:spPr>
-        <p:txBody>
-          <a:bodyPr wrap="square" anchor="t" lIns="0" rIns="0" tIns="0" bIns="0">
-            <a:spAutoFit/>
-          </a:bodyPr>
-          <a:lstStyle/>
-          <a:p>
-            <a:pPr algn="l">
-              <a:lnSpc>
-                <a:spcPct val="130000"/>
-              </a:lnSpc>
-              <a:spcAft>
-                <a:spcPts val="0"/>
-              </a:spcAft>
-            </a:pPr>
-            <a:r>
-              <a:rPr sz="1500" b="0" i="0">
-                <a:solidFill>
-                  <a:srgbClr val="2E3436"/>
-                </a:solidFill>
-                <a:latin typeface="Karla"/>
-              </a:rPr>
-              <a:t>Can I change courses, and until when?</a:t>
-            </a:r>
-          </a:p>
-        </p:txBody>
-      </p:sp>
-      <p:sp>
-        <p:nvSpPr>
-          <p:cNvPr id="11" name="Oval 10"/>
-          <p:cNvSpPr/>
-          <p:nvPr/>
-        </p:nvSpPr>
-        <p:spPr>
-          <a:xfrm>
-            <a:off x="1106424" y="2671572"/>
-            <a:ext cx="109728" cy="109728"/>
-          </a:xfrm>
-          <a:prstGeom prst="ellipse">
-            <a:avLst/>
-          </a:prstGeom>
-          <a:solidFill>
-            <a:srgbClr val="7BA060"/>
-          </a:solidFill>
-          <a:ln>
-            <a:noFill/>
-          </a:ln>
-          <a:effectLst/>
-        </p:spPr>
-        <p:style>
-          <a:lnRef idx="1">
-            <a:schemeClr val="accent1"/>
-          </a:lnRef>
-          <a:fillRef idx="3">
-            <a:schemeClr val="accent1"/>
-          </a:fillRef>
-          <a:effectRef idx="2">
-            <a:schemeClr val="accent1"/>
-          </a:effectRef>
-          <a:fontRef idx="minor">
-            <a:schemeClr val="lt1"/>
-          </a:fontRef>
-        </p:style>
-        <p:txBody>
-          <a:bodyPr rtlCol="0" anchor="ctr"/>
-          <a:lstStyle/>
-          <a:p>
-            <a:pPr algn="ctr"/>
-          </a:p>
-        </p:txBody>
-      </p:sp>
-      <p:sp>
-        <p:nvSpPr>
-          <p:cNvPr id="12" name="TextBox 11"/>
-          <p:cNvSpPr txBox="1"/>
-          <p:nvPr/>
-        </p:nvSpPr>
-        <p:spPr>
-          <a:xfrm>
-            <a:off x="1399032" y="2598420"/>
-            <a:ext cx="6583680" cy="247650"/>
-          </a:xfrm>
-          <a:prstGeom prst="rect">
-            <a:avLst/>
-          </a:prstGeom>
-          <a:noFill/>
-        </p:spPr>
-        <p:txBody>
-          <a:bodyPr wrap="square" anchor="t" lIns="0" rIns="0" tIns="0" bIns="0">
-            <a:spAutoFit/>
-          </a:bodyPr>
-          <a:lstStyle/>
-          <a:p>
-            <a:pPr algn="l">
-              <a:lnSpc>
-                <a:spcPct val="130000"/>
-              </a:lnSpc>
-              <a:spcAft>
-                <a:spcPts val="0"/>
-              </a:spcAft>
-            </a:pPr>
-            <a:r>
-              <a:rPr sz="1500" b="0" i="0">
-                <a:solidFill>
-                  <a:srgbClr val="2E3436"/>
-                </a:solidFill>
-                <a:latin typeface="Karla"/>
-              </a:rPr>
-              <a:t>What support is there if my grades are not what I hoped?</a:t>
-            </a:r>
-          </a:p>
-        </p:txBody>
-      </p:sp>
-      <p:sp>
-        <p:nvSpPr>
-          <p:cNvPr id="13" name="TextBox 12"/>
-          <p:cNvSpPr txBox="1"/>
-          <p:nvPr/>
-        </p:nvSpPr>
-        <p:spPr>
-          <a:xfrm>
-            <a:off x="685800" y="4041648"/>
-            <a:ext cx="7772400" cy="310896"/>
+            <a:off x="868680" y="1604772"/>
+            <a:ext cx="402336" cy="219456"/>
           </a:xfrm>
           <a:prstGeom prst="rect">
             <a:avLst/>
@@ -7158,51 +10532,27 @@
               </a:spcAft>
             </a:pPr>
             <a:r>
-              <a:rPr sz="1150" b="0" i="1">
-                <a:solidFill>
-                  <a:srgbClr val="5C6552"/>
+              <a:rPr sz="1150" b="1" i="0">
+                <a:solidFill>
+                  <a:srgbClr val="FFFDF7"/>
                 </a:solidFill>
                 <a:latin typeface="Karla"/>
               </a:rPr>
-              <a:t>Add one of your own. The best question is the one you actually want the answer to.</a:t>
-            </a:r>
-          </a:p>
-        </p:txBody>
-      </p:sp>
-      <p:pic>
-        <p:nvPicPr>
-          <p:cNvPr id="14" name="Picture 13" descr="logo-mark.png"/>
-          <p:cNvPicPr>
-            <a:picLocks noChangeAspect="1"/>
-          </p:cNvPicPr>
-          <p:nvPr/>
-        </p:nvPicPr>
-        <p:blipFill>
-          <a:blip r:embed="rId2"/>
-          <a:stretch>
-            <a:fillRect/>
-          </a:stretch>
-        </p:blipFill>
-        <p:spPr>
-          <a:xfrm>
-            <a:off x="384048" y="4727448"/>
-            <a:ext cx="158374" cy="182880"/>
-          </a:xfrm>
-          <a:prstGeom prst="rect">
-            <a:avLst/>
-          </a:prstGeom>
-        </p:spPr>
-      </p:pic>
-      <p:sp>
-        <p:nvSpPr>
-          <p:cNvPr id="15" name="TextBox 14"/>
+              <a:t>1</a:t>
+            </a:r>
+          </a:p>
+        </p:txBody>
+      </p:sp>
+      <p:sp>
+        <p:nvSpPr>
+          <p:cNvPr id="8" name="TextBox 7"/>
           <p:cNvSpPr txBox="1"/>
           <p:nvPr/>
         </p:nvSpPr>
         <p:spPr>
           <a:xfrm>
-            <a:off x="603504" y="4709160"/>
-            <a:ext cx="2194560" cy="210312"/>
+            <a:off x="1417320" y="1490472"/>
+            <a:ext cx="6821424" cy="237744"/>
           </a:xfrm>
           <a:prstGeom prst="rect">
             <a:avLst/>
@@ -7224,6 +10574,756 @@
               </a:spcAft>
             </a:pPr>
             <a:r>
+              <a:rPr sz="1300" b="1" i="0">
+                <a:solidFill>
+                  <a:srgbClr val="4A7331"/>
+                </a:solidFill>
+                <a:latin typeface="Libre Caslon Display"/>
+              </a:rPr>
+              <a:t>Staff to your stalls</a:t>
+            </a:r>
+          </a:p>
+        </p:txBody>
+      </p:sp>
+      <p:sp>
+        <p:nvSpPr>
+          <p:cNvPr id="9" name="TextBox 8"/>
+          <p:cNvSpPr txBox="1"/>
+          <p:nvPr/>
+        </p:nvSpPr>
+        <p:spPr>
+          <a:xfrm>
+            <a:off x="1417320" y="1737360"/>
+            <a:ext cx="6821424" cy="219456"/>
+          </a:xfrm>
+          <a:prstGeom prst="rect">
+            <a:avLst/>
+          </a:prstGeom>
+          <a:noFill/>
+        </p:spPr>
+        <p:txBody>
+          <a:bodyPr wrap="square" anchor="t" lIns="0" rIns="0" tIns="0" bIns="0">
+            <a:spAutoFit/>
+          </a:bodyPr>
+          <a:lstStyle/>
+          <a:p>
+            <a:pPr algn="l">
+              <a:lnSpc>
+                <a:spcPct val="125000"/>
+              </a:lnSpc>
+              <a:spcAft>
+                <a:spcPts val="0"/>
+              </a:spcAft>
+            </a:pPr>
+            <a:r>
+              <a:rPr sz="1100" b="0" i="0">
+                <a:solidFill>
+                  <a:srgbClr val="5C6552"/>
+                </a:solidFill>
+                <a:latin typeface="Karla"/>
+              </a:rPr>
+              <a:t>Two at each desk, with your card. Answer from the card, and give one vague answer on purpose.</a:t>
+            </a:r>
+          </a:p>
+        </p:txBody>
+      </p:sp>
+      <p:sp>
+        <p:nvSpPr>
+          <p:cNvPr id="10" name="Rectangle 9"/>
+          <p:cNvSpPr/>
+          <p:nvPr/>
+        </p:nvSpPr>
+        <p:spPr>
+          <a:xfrm>
+            <a:off x="685800" y="2139696"/>
+            <a:ext cx="7772400" cy="640080"/>
+          </a:xfrm>
+          <a:prstGeom prst="rect">
+            <a:avLst/>
+          </a:prstGeom>
+          <a:solidFill>
+            <a:srgbClr val="FFFDF7"/>
+          </a:solidFill>
+          <a:ln>
+            <a:noFill/>
+          </a:ln>
+          <a:effectLst/>
+        </p:spPr>
+        <p:style>
+          <a:lnRef idx="1">
+            <a:schemeClr val="accent1"/>
+          </a:lnRef>
+          <a:fillRef idx="3">
+            <a:schemeClr val="accent1"/>
+          </a:fillRef>
+          <a:effectRef idx="2">
+            <a:schemeClr val="accent1"/>
+          </a:effectRef>
+          <a:fontRef idx="minor">
+            <a:schemeClr val="lt1"/>
+          </a:fontRef>
+        </p:style>
+        <p:txBody>
+          <a:bodyPr rtlCol="0" anchor="ctr"/>
+          <a:lstStyle/>
+          <a:p>
+            <a:pPr algn="ctr"/>
+          </a:p>
+        </p:txBody>
+      </p:sp>
+      <p:sp>
+        <p:nvSpPr>
+          <p:cNvPr id="11" name="Oval 10"/>
+          <p:cNvSpPr/>
+          <p:nvPr/>
+        </p:nvSpPr>
+        <p:spPr>
+          <a:xfrm>
+            <a:off x="868680" y="2258568"/>
+            <a:ext cx="402336" cy="402336"/>
+          </a:xfrm>
+          <a:prstGeom prst="ellipse">
+            <a:avLst/>
+          </a:prstGeom>
+          <a:solidFill>
+            <a:srgbClr val="4A7331"/>
+          </a:solidFill>
+          <a:ln>
+            <a:noFill/>
+          </a:ln>
+          <a:effectLst/>
+        </p:spPr>
+        <p:style>
+          <a:lnRef idx="1">
+            <a:schemeClr val="accent1"/>
+          </a:lnRef>
+          <a:fillRef idx="3">
+            <a:schemeClr val="accent1"/>
+          </a:fillRef>
+          <a:effectRef idx="2">
+            <a:schemeClr val="accent1"/>
+          </a:effectRef>
+          <a:fontRef idx="minor">
+            <a:schemeClr val="lt1"/>
+          </a:fontRef>
+        </p:style>
+        <p:txBody>
+          <a:bodyPr rtlCol="0" anchor="ctr"/>
+          <a:lstStyle/>
+          <a:p>
+            <a:pPr algn="ctr"/>
+          </a:p>
+        </p:txBody>
+      </p:sp>
+      <p:sp>
+        <p:nvSpPr>
+          <p:cNvPr id="12" name="TextBox 11"/>
+          <p:cNvSpPr txBox="1"/>
+          <p:nvPr/>
+        </p:nvSpPr>
+        <p:spPr>
+          <a:xfrm>
+            <a:off x="868680" y="2354579"/>
+            <a:ext cx="402336" cy="219456"/>
+          </a:xfrm>
+          <a:prstGeom prst="rect">
+            <a:avLst/>
+          </a:prstGeom>
+          <a:noFill/>
+        </p:spPr>
+        <p:txBody>
+          <a:bodyPr wrap="square" anchor="t" lIns="0" rIns="0" tIns="0" bIns="0">
+            <a:spAutoFit/>
+          </a:bodyPr>
+          <a:lstStyle/>
+          <a:p>
+            <a:pPr algn="ctr">
+              <a:lnSpc>
+                <a:spcPct val="125000"/>
+              </a:lnSpc>
+              <a:spcAft>
+                <a:spcPts val="0"/>
+              </a:spcAft>
+            </a:pPr>
+            <a:r>
+              <a:rPr sz="1150" b="1" i="0">
+                <a:solidFill>
+                  <a:srgbClr val="FFFDF7"/>
+                </a:solidFill>
+                <a:latin typeface="Karla"/>
+              </a:rPr>
+              <a:t>2</a:t>
+            </a:r>
+          </a:p>
+        </p:txBody>
+      </p:sp>
+      <p:sp>
+        <p:nvSpPr>
+          <p:cNvPr id="13" name="TextBox 12"/>
+          <p:cNvSpPr txBox="1"/>
+          <p:nvPr/>
+        </p:nvSpPr>
+        <p:spPr>
+          <a:xfrm>
+            <a:off x="1417320" y="2240279"/>
+            <a:ext cx="6821424" cy="237744"/>
+          </a:xfrm>
+          <a:prstGeom prst="rect">
+            <a:avLst/>
+          </a:prstGeom>
+          <a:noFill/>
+        </p:spPr>
+        <p:txBody>
+          <a:bodyPr wrap="square" anchor="t" lIns="0" rIns="0" tIns="0" bIns="0">
+            <a:spAutoFit/>
+          </a:bodyPr>
+          <a:lstStyle/>
+          <a:p>
+            <a:pPr algn="l">
+              <a:lnSpc>
+                <a:spcPct val="125000"/>
+              </a:lnSpc>
+              <a:spcAft>
+                <a:spcPts val="0"/>
+              </a:spcAft>
+            </a:pPr>
+            <a:r>
+              <a:rPr sz="1300" b="1" i="0">
+                <a:solidFill>
+                  <a:srgbClr val="4A7331"/>
+                </a:solidFill>
+                <a:latin typeface="Libre Caslon Display"/>
+              </a:rPr>
+              <a:t>Visitors, go and ask</a:t>
+            </a:r>
+          </a:p>
+        </p:txBody>
+      </p:sp>
+      <p:sp>
+        <p:nvSpPr>
+          <p:cNvPr id="14" name="TextBox 13"/>
+          <p:cNvSpPr txBox="1"/>
+          <p:nvPr/>
+        </p:nvSpPr>
+        <p:spPr>
+          <a:xfrm>
+            <a:off x="1417320" y="2487168"/>
+            <a:ext cx="6821424" cy="219456"/>
+          </a:xfrm>
+          <a:prstGeom prst="rect">
+            <a:avLst/>
+          </a:prstGeom>
+          <a:noFill/>
+        </p:spPr>
+        <p:txBody>
+          <a:bodyPr wrap="square" anchor="t" lIns="0" rIns="0" tIns="0" bIns="0">
+            <a:spAutoFit/>
+          </a:bodyPr>
+          <a:lstStyle/>
+          <a:p>
+            <a:pPr algn="l">
+              <a:lnSpc>
+                <a:spcPct val="125000"/>
+              </a:lnSpc>
+              <a:spcAft>
+                <a:spcPts val="0"/>
+              </a:spcAft>
+            </a:pPr>
+            <a:r>
+              <a:rPr sz="1100" b="0" i="0">
+                <a:solidFill>
+                  <a:srgbClr val="5C6552"/>
+                </a:solidFill>
+                <a:latin typeface="Karla"/>
+              </a:rPr>
+              <a:t>Take your sheet to a stall and ask your three starred questions.</a:t>
+            </a:r>
+          </a:p>
+        </p:txBody>
+      </p:sp>
+      <p:sp>
+        <p:nvSpPr>
+          <p:cNvPr id="15" name="Rectangle 14"/>
+          <p:cNvSpPr/>
+          <p:nvPr/>
+        </p:nvSpPr>
+        <p:spPr>
+          <a:xfrm>
+            <a:off x="685800" y="2889504"/>
+            <a:ext cx="7772400" cy="640080"/>
+          </a:xfrm>
+          <a:prstGeom prst="rect">
+            <a:avLst/>
+          </a:prstGeom>
+          <a:solidFill>
+            <a:srgbClr val="FFFDF7"/>
+          </a:solidFill>
+          <a:ln>
+            <a:noFill/>
+          </a:ln>
+          <a:effectLst/>
+        </p:spPr>
+        <p:style>
+          <a:lnRef idx="1">
+            <a:schemeClr val="accent1"/>
+          </a:lnRef>
+          <a:fillRef idx="3">
+            <a:schemeClr val="accent1"/>
+          </a:fillRef>
+          <a:effectRef idx="2">
+            <a:schemeClr val="accent1"/>
+          </a:effectRef>
+          <a:fontRef idx="minor">
+            <a:schemeClr val="lt1"/>
+          </a:fontRef>
+        </p:style>
+        <p:txBody>
+          <a:bodyPr rtlCol="0" anchor="ctr"/>
+          <a:lstStyle/>
+          <a:p>
+            <a:pPr algn="ctr"/>
+          </a:p>
+        </p:txBody>
+      </p:sp>
+      <p:sp>
+        <p:nvSpPr>
+          <p:cNvPr id="16" name="Oval 15"/>
+          <p:cNvSpPr/>
+          <p:nvPr/>
+        </p:nvSpPr>
+        <p:spPr>
+          <a:xfrm>
+            <a:off x="868680" y="3008376"/>
+            <a:ext cx="402336" cy="402336"/>
+          </a:xfrm>
+          <a:prstGeom prst="ellipse">
+            <a:avLst/>
+          </a:prstGeom>
+          <a:solidFill>
+            <a:srgbClr val="4A7331"/>
+          </a:solidFill>
+          <a:ln>
+            <a:noFill/>
+          </a:ln>
+          <a:effectLst/>
+        </p:spPr>
+        <p:style>
+          <a:lnRef idx="1">
+            <a:schemeClr val="accent1"/>
+          </a:lnRef>
+          <a:fillRef idx="3">
+            <a:schemeClr val="accent1"/>
+          </a:fillRef>
+          <a:effectRef idx="2">
+            <a:schemeClr val="accent1"/>
+          </a:effectRef>
+          <a:fontRef idx="minor">
+            <a:schemeClr val="lt1"/>
+          </a:fontRef>
+        </p:style>
+        <p:txBody>
+          <a:bodyPr rtlCol="0" anchor="ctr"/>
+          <a:lstStyle/>
+          <a:p>
+            <a:pPr algn="ctr"/>
+          </a:p>
+        </p:txBody>
+      </p:sp>
+      <p:sp>
+        <p:nvSpPr>
+          <p:cNvPr id="17" name="TextBox 16"/>
+          <p:cNvSpPr txBox="1"/>
+          <p:nvPr/>
+        </p:nvSpPr>
+        <p:spPr>
+          <a:xfrm>
+            <a:off x="868680" y="3104388"/>
+            <a:ext cx="402336" cy="219456"/>
+          </a:xfrm>
+          <a:prstGeom prst="rect">
+            <a:avLst/>
+          </a:prstGeom>
+          <a:noFill/>
+        </p:spPr>
+        <p:txBody>
+          <a:bodyPr wrap="square" anchor="t" lIns="0" rIns="0" tIns="0" bIns="0">
+            <a:spAutoFit/>
+          </a:bodyPr>
+          <a:lstStyle/>
+          <a:p>
+            <a:pPr algn="ctr">
+              <a:lnSpc>
+                <a:spcPct val="125000"/>
+              </a:lnSpc>
+              <a:spcAft>
+                <a:spcPts val="0"/>
+              </a:spcAft>
+            </a:pPr>
+            <a:r>
+              <a:rPr sz="1150" b="1" i="0">
+                <a:solidFill>
+                  <a:srgbClr val="FFFDF7"/>
+                </a:solidFill>
+                <a:latin typeface="Karla"/>
+              </a:rPr>
+              <a:t>3</a:t>
+            </a:r>
+          </a:p>
+        </p:txBody>
+      </p:sp>
+      <p:sp>
+        <p:nvSpPr>
+          <p:cNvPr id="18" name="TextBox 17"/>
+          <p:cNvSpPr txBox="1"/>
+          <p:nvPr/>
+        </p:nvSpPr>
+        <p:spPr>
+          <a:xfrm>
+            <a:off x="1417320" y="2990088"/>
+            <a:ext cx="6821424" cy="237744"/>
+          </a:xfrm>
+          <a:prstGeom prst="rect">
+            <a:avLst/>
+          </a:prstGeom>
+          <a:noFill/>
+        </p:spPr>
+        <p:txBody>
+          <a:bodyPr wrap="square" anchor="t" lIns="0" rIns="0" tIns="0" bIns="0">
+            <a:spAutoFit/>
+          </a:bodyPr>
+          <a:lstStyle/>
+          <a:p>
+            <a:pPr algn="l">
+              <a:lnSpc>
+                <a:spcPct val="125000"/>
+              </a:lnSpc>
+              <a:spcAft>
+                <a:spcPts val="0"/>
+              </a:spcAft>
+            </a:pPr>
+            <a:r>
+              <a:rPr sz="1300" b="1" i="0">
+                <a:solidFill>
+                  <a:srgbClr val="4A7331"/>
+                </a:solidFill>
+                <a:latin typeface="Libre Caslon Display"/>
+              </a:rPr>
+              <a:t>Push for a real answer</a:t>
+            </a:r>
+          </a:p>
+        </p:txBody>
+      </p:sp>
+      <p:sp>
+        <p:nvSpPr>
+          <p:cNvPr id="19" name="TextBox 18"/>
+          <p:cNvSpPr txBox="1"/>
+          <p:nvPr/>
+        </p:nvSpPr>
+        <p:spPr>
+          <a:xfrm>
+            <a:off x="1417320" y="3236976"/>
+            <a:ext cx="6821424" cy="219456"/>
+          </a:xfrm>
+          <a:prstGeom prst="rect">
+            <a:avLst/>
+          </a:prstGeom>
+          <a:noFill/>
+        </p:spPr>
+        <p:txBody>
+          <a:bodyPr wrap="square" anchor="t" lIns="0" rIns="0" tIns="0" bIns="0">
+            <a:spAutoFit/>
+          </a:bodyPr>
+          <a:lstStyle/>
+          <a:p>
+            <a:pPr algn="l">
+              <a:lnSpc>
+                <a:spcPct val="125000"/>
+              </a:lnSpc>
+              <a:spcAft>
+                <a:spcPts val="0"/>
+              </a:spcAft>
+            </a:pPr>
+            <a:r>
+              <a:rPr sz="1100" b="0" i="0">
+                <a:solidFill>
+                  <a:srgbClr val="5C6552"/>
+                </a:solidFill>
+                <a:latin typeface="Karla"/>
+              </a:rPr>
+              <a:t>If an answer is vague, follow it up. Write down what you find out.</a:t>
+            </a:r>
+          </a:p>
+        </p:txBody>
+      </p:sp>
+      <p:sp>
+        <p:nvSpPr>
+          <p:cNvPr id="20" name="Rectangle 19"/>
+          <p:cNvSpPr/>
+          <p:nvPr/>
+        </p:nvSpPr>
+        <p:spPr>
+          <a:xfrm>
+            <a:off x="685800" y="3639312"/>
+            <a:ext cx="7772400" cy="640080"/>
+          </a:xfrm>
+          <a:prstGeom prst="rect">
+            <a:avLst/>
+          </a:prstGeom>
+          <a:solidFill>
+            <a:srgbClr val="FFFDF7"/>
+          </a:solidFill>
+          <a:ln>
+            <a:noFill/>
+          </a:ln>
+          <a:effectLst/>
+        </p:spPr>
+        <p:style>
+          <a:lnRef idx="1">
+            <a:schemeClr val="accent1"/>
+          </a:lnRef>
+          <a:fillRef idx="3">
+            <a:schemeClr val="accent1"/>
+          </a:fillRef>
+          <a:effectRef idx="2">
+            <a:schemeClr val="accent1"/>
+          </a:effectRef>
+          <a:fontRef idx="minor">
+            <a:schemeClr val="lt1"/>
+          </a:fontRef>
+        </p:style>
+        <p:txBody>
+          <a:bodyPr rtlCol="0" anchor="ctr"/>
+          <a:lstStyle/>
+          <a:p>
+            <a:pPr algn="ctr"/>
+          </a:p>
+        </p:txBody>
+      </p:sp>
+      <p:sp>
+        <p:nvSpPr>
+          <p:cNvPr id="21" name="Oval 20"/>
+          <p:cNvSpPr/>
+          <p:nvPr/>
+        </p:nvSpPr>
+        <p:spPr>
+          <a:xfrm>
+            <a:off x="868680" y="3758184"/>
+            <a:ext cx="402336" cy="402336"/>
+          </a:xfrm>
+          <a:prstGeom prst="ellipse">
+            <a:avLst/>
+          </a:prstGeom>
+          <a:solidFill>
+            <a:srgbClr val="4A7331"/>
+          </a:solidFill>
+          <a:ln>
+            <a:noFill/>
+          </a:ln>
+          <a:effectLst/>
+        </p:spPr>
+        <p:style>
+          <a:lnRef idx="1">
+            <a:schemeClr val="accent1"/>
+          </a:lnRef>
+          <a:fillRef idx="3">
+            <a:schemeClr val="accent1"/>
+          </a:fillRef>
+          <a:effectRef idx="2">
+            <a:schemeClr val="accent1"/>
+          </a:effectRef>
+          <a:fontRef idx="minor">
+            <a:schemeClr val="lt1"/>
+          </a:fontRef>
+        </p:style>
+        <p:txBody>
+          <a:bodyPr rtlCol="0" anchor="ctr"/>
+          <a:lstStyle/>
+          <a:p>
+            <a:pPr algn="ctr"/>
+          </a:p>
+        </p:txBody>
+      </p:sp>
+      <p:sp>
+        <p:nvSpPr>
+          <p:cNvPr id="22" name="TextBox 21"/>
+          <p:cNvSpPr txBox="1"/>
+          <p:nvPr/>
+        </p:nvSpPr>
+        <p:spPr>
+          <a:xfrm>
+            <a:off x="868680" y="3854196"/>
+            <a:ext cx="402336" cy="219456"/>
+          </a:xfrm>
+          <a:prstGeom prst="rect">
+            <a:avLst/>
+          </a:prstGeom>
+          <a:noFill/>
+        </p:spPr>
+        <p:txBody>
+          <a:bodyPr wrap="square" anchor="t" lIns="0" rIns="0" tIns="0" bIns="0">
+            <a:spAutoFit/>
+          </a:bodyPr>
+          <a:lstStyle/>
+          <a:p>
+            <a:pPr algn="ctr">
+              <a:lnSpc>
+                <a:spcPct val="125000"/>
+              </a:lnSpc>
+              <a:spcAft>
+                <a:spcPts val="0"/>
+              </a:spcAft>
+            </a:pPr>
+            <a:r>
+              <a:rPr sz="1150" b="1" i="0">
+                <a:solidFill>
+                  <a:srgbClr val="FFFDF7"/>
+                </a:solidFill>
+                <a:latin typeface="Karla"/>
+              </a:rPr>
+              <a:t>4</a:t>
+            </a:r>
+          </a:p>
+        </p:txBody>
+      </p:sp>
+      <p:sp>
+        <p:nvSpPr>
+          <p:cNvPr id="23" name="TextBox 22"/>
+          <p:cNvSpPr txBox="1"/>
+          <p:nvPr/>
+        </p:nvSpPr>
+        <p:spPr>
+          <a:xfrm>
+            <a:off x="1417320" y="3739896"/>
+            <a:ext cx="6821424" cy="237744"/>
+          </a:xfrm>
+          <a:prstGeom prst="rect">
+            <a:avLst/>
+          </a:prstGeom>
+          <a:noFill/>
+        </p:spPr>
+        <p:txBody>
+          <a:bodyPr wrap="square" anchor="t" lIns="0" rIns="0" tIns="0" bIns="0">
+            <a:spAutoFit/>
+          </a:bodyPr>
+          <a:lstStyle/>
+          <a:p>
+            <a:pPr algn="l">
+              <a:lnSpc>
+                <a:spcPct val="125000"/>
+              </a:lnSpc>
+              <a:spcAft>
+                <a:spcPts val="0"/>
+              </a:spcAft>
+            </a:pPr>
+            <a:r>
+              <a:rPr sz="1300" b="1" i="0">
+                <a:solidFill>
+                  <a:srgbClr val="4A7331"/>
+                </a:solidFill>
+                <a:latin typeface="Libre Caslon Display"/>
+              </a:rPr>
+              <a:t>Swap</a:t>
+            </a:r>
+          </a:p>
+        </p:txBody>
+      </p:sp>
+      <p:sp>
+        <p:nvSpPr>
+          <p:cNvPr id="24" name="TextBox 23"/>
+          <p:cNvSpPr txBox="1"/>
+          <p:nvPr/>
+        </p:nvSpPr>
+        <p:spPr>
+          <a:xfrm>
+            <a:off x="1417320" y="3986784"/>
+            <a:ext cx="6821424" cy="219456"/>
+          </a:xfrm>
+          <a:prstGeom prst="rect">
+            <a:avLst/>
+          </a:prstGeom>
+          <a:noFill/>
+        </p:spPr>
+        <p:txBody>
+          <a:bodyPr wrap="square" anchor="t" lIns="0" rIns="0" tIns="0" bIns="0">
+            <a:spAutoFit/>
+          </a:bodyPr>
+          <a:lstStyle/>
+          <a:p>
+            <a:pPr algn="l">
+              <a:lnSpc>
+                <a:spcPct val="125000"/>
+              </a:lnSpc>
+              <a:spcAft>
+                <a:spcPts val="0"/>
+              </a:spcAft>
+            </a:pPr>
+            <a:r>
+              <a:rPr sz="1100" b="0" i="0">
+                <a:solidFill>
+                  <a:srgbClr val="5C6552"/>
+                </a:solidFill>
+                <a:latin typeface="Karla"/>
+              </a:rPr>
+              <a:t>Staff become visitors, now or next time, so everybody gets to ask.</a:t>
+            </a:r>
+          </a:p>
+        </p:txBody>
+      </p:sp>
+      <p:pic>
+        <p:nvPicPr>
+          <p:cNvPr id="25" name="Picture 24" descr="logo-mark.png"/>
+          <p:cNvPicPr>
+            <a:picLocks noChangeAspect="1"/>
+          </p:cNvPicPr>
+          <p:nvPr/>
+        </p:nvPicPr>
+        <p:blipFill>
+          <a:blip r:embed="rId2"/>
+          <a:stretch>
+            <a:fillRect/>
+          </a:stretch>
+        </p:blipFill>
+        <p:spPr>
+          <a:xfrm>
+            <a:off x="384048" y="4727448"/>
+            <a:ext cx="158374" cy="182880"/>
+          </a:xfrm>
+          <a:prstGeom prst="rect">
+            <a:avLst/>
+          </a:prstGeom>
+        </p:spPr>
+      </p:pic>
+      <p:sp>
+        <p:nvSpPr>
+          <p:cNvPr id="26" name="TextBox 25"/>
+          <p:cNvSpPr txBox="1"/>
+          <p:nvPr/>
+        </p:nvSpPr>
+        <p:spPr>
+          <a:xfrm>
+            <a:off x="603504" y="4709160"/>
+            <a:ext cx="2194560" cy="210312"/>
+          </a:xfrm>
+          <a:prstGeom prst="rect">
+            <a:avLst/>
+          </a:prstGeom>
+          <a:noFill/>
+        </p:spPr>
+        <p:txBody>
+          <a:bodyPr wrap="square" anchor="t" lIns="0" rIns="0" tIns="0" bIns="0">
+            <a:spAutoFit/>
+          </a:bodyPr>
+          <a:lstStyle/>
+          <a:p>
+            <a:pPr algn="l">
+              <a:lnSpc>
+                <a:spcPct val="125000"/>
+              </a:lnSpc>
+              <a:spcAft>
+                <a:spcPts val="0"/>
+              </a:spcAft>
+            </a:pPr>
+            <a:r>
               <a:rPr sz="850" b="0" i="1">
                 <a:solidFill>
                   <a:srgbClr val="8B9179"/>
@@ -7237,7 +11337,7 @@
       </p:sp>
       <p:sp>
         <p:nvSpPr>
-          <p:cNvPr id="16" name="TextBox 15"/>
+          <p:cNvPr id="27" name="TextBox 26"/>
           <p:cNvSpPr txBox="1"/>
           <p:nvPr/>
         </p:nvSpPr>
@@ -7484,7 +11584,7 @@
                 </a:solidFill>
                 <a:latin typeface="Karla"/>
               </a:rPr>
-              <a:t>Bring the sheet back. Which question got the most useful answer, and which one did nobody answer properly?</a:t>
+              <a:t>Bring your sheet back. Which question got the most useful answer, and which one did nobody answer properly?</a:t>
             </a:r>
           </a:p>
         </p:txBody>

--- a/morning-registration-activities/open-evening-questions/downloads/Open_Evening_Questions_Year_10_and_11.pptx
+++ b/morning-registration-activities/open-evening-questions/downloads/Open_Evening_Questions_Year_10_and_11.pptx
@@ -3173,7 +3173,7 @@
                 <a:solidFill>
                   <a:srgbClr val="4A7331"/>
                 </a:solidFill>
-                <a:latin typeface="Karla"/>
+                <a:latin typeface="Calibri"/>
               </a:rPr>
               <a:t>MORNING REGISTRATION ACTIVITIES</a:t>
             </a:r>
@@ -3211,11 +3211,11 @@
               </a:spcAft>
             </a:pPr>
             <a:r>
-              <a:rPr sz="2700" b="1" i="0">
+              <a:rPr sz="2700" b="0" i="0">
                 <a:solidFill>
                   <a:srgbClr val="4A7331"/>
                 </a:solidFill>
-                <a:latin typeface="Libre Caslon Display"/>
+                <a:latin typeface="Georgia"/>
               </a:rPr>
               <a:t>Questions to Ask at an Open Evening</a:t>
             </a:r>
@@ -3270,7 +3270,7 @@
                 <a:solidFill>
                   <a:srgbClr val="FFFDF7"/>
                 </a:solidFill>
-                <a:latin typeface="Karla"/>
+                <a:latin typeface="Calibri"/>
               </a:rPr>
               <a:t>YEAR 10 AND 11</a:t>
             </a:r>
@@ -3312,7 +3312,7 @@
                 <a:solidFill>
                   <a:srgbClr val="5C6552"/>
                 </a:solidFill>
-                <a:latin typeface="Karla"/>
+                <a:latin typeface="Calibri"/>
               </a:rPr>
               <a:t>A week of practice, and a list of questions to take with you.</a:t>
             </a:r>
@@ -3398,7 +3398,7 @@
                 <a:solidFill>
                   <a:srgbClr val="7BA060"/>
                 </a:solidFill>
-                <a:latin typeface="Karla"/>
+                <a:latin typeface="Calibri"/>
               </a:rPr>
               <a:t>MON</a:t>
             </a:r>
@@ -3504,11 +3504,11 @@
               </a:spcAft>
             </a:pPr>
             <a:r>
-              <a:rPr sz="1350" b="1" i="0">
+              <a:rPr sz="1350" b="0" i="0">
                 <a:solidFill>
                   <a:srgbClr val="4A7331"/>
                 </a:solidFill>
-                <a:latin typeface="Libre Caslon Display"/>
+                <a:latin typeface="Georgia"/>
               </a:rPr>
               <a:t>Rank them</a:t>
             </a:r>
@@ -3594,7 +3594,7 @@
                 <a:solidFill>
                   <a:srgbClr val="7BA060"/>
                 </a:solidFill>
-                <a:latin typeface="Karla"/>
+                <a:latin typeface="Calibri"/>
               </a:rPr>
               <a:t>TUE</a:t>
             </a:r>
@@ -3700,11 +3700,11 @@
               </a:spcAft>
             </a:pPr>
             <a:r>
-              <a:rPr sz="1350" b="1" i="0">
+              <a:rPr sz="1350" b="0" i="0">
                 <a:solidFill>
                   <a:srgbClr val="4A7331"/>
                 </a:solidFill>
-                <a:latin typeface="Libre Caslon Display"/>
+                <a:latin typeface="Georgia"/>
               </a:rPr>
               <a:t>Rank them</a:t>
             </a:r>
@@ -3790,7 +3790,7 @@
                 <a:solidFill>
                   <a:srgbClr val="7BA060"/>
                 </a:solidFill>
-                <a:latin typeface="Karla"/>
+                <a:latin typeface="Calibri"/>
               </a:rPr>
               <a:t>WED</a:t>
             </a:r>
@@ -3896,11 +3896,11 @@
               </a:spcAft>
             </a:pPr>
             <a:r>
-              <a:rPr sz="1350" b="1" i="0">
+              <a:rPr sz="1350" b="0" i="0">
                 <a:solidFill>
                   <a:srgbClr val="4A7331"/>
                 </a:solidFill>
-                <a:latin typeface="Libre Caslon Display"/>
+                <a:latin typeface="Georgia"/>
               </a:rPr>
               <a:t>Ask it for real</a:t>
             </a:r>
@@ -3986,7 +3986,7 @@
                 <a:solidFill>
                   <a:srgbClr val="7BA060"/>
                 </a:solidFill>
-                <a:latin typeface="Karla"/>
+                <a:latin typeface="Calibri"/>
               </a:rPr>
               <a:t>THU</a:t>
             </a:r>
@@ -4092,11 +4092,11 @@
               </a:spcAft>
             </a:pPr>
             <a:r>
-              <a:rPr sz="1350" b="1" i="0">
+              <a:rPr sz="1350" b="0" i="0">
                 <a:solidFill>
                   <a:srgbClr val="4A7331"/>
                 </a:solidFill>
-                <a:latin typeface="Libre Caslon Display"/>
+                <a:latin typeface="Georgia"/>
               </a:rPr>
               <a:t>Set up</a:t>
             </a:r>
@@ -4182,7 +4182,7 @@
                 <a:solidFill>
                   <a:srgbClr val="7BA060"/>
                 </a:solidFill>
-                <a:latin typeface="Karla"/>
+                <a:latin typeface="Calibri"/>
               </a:rPr>
               <a:t>FRI</a:t>
             </a:r>
@@ -4288,11 +4288,11 @@
               </a:spcAft>
             </a:pPr>
             <a:r>
-              <a:rPr sz="1350" b="1" i="0">
+              <a:rPr sz="1350" b="0" i="0">
                 <a:solidFill>
                   <a:srgbClr val="4A7331"/>
                 </a:solidFill>
-                <a:latin typeface="Libre Caslon Display"/>
+                <a:latin typeface="Georgia"/>
               </a:rPr>
               <a:t>The open evening</a:t>
             </a:r>
@@ -4334,7 +4334,7 @@
                 <a:solidFill>
                   <a:srgbClr val="8B9179"/>
                 </a:solidFill>
-                <a:latin typeface="Karla"/>
+                <a:latin typeface="Calibri"/>
               </a:rPr>
               <a:t>Needs: the question sheet, one per student, and the answer cards and stall cards from the pack.</a:t>
             </a:r>
@@ -4400,7 +4400,7 @@
                 <a:solidFill>
                   <a:srgbClr val="8B9179"/>
                 </a:solidFill>
-                <a:latin typeface="Karla"/>
+                <a:latin typeface="Calibri"/>
               </a:rPr>
               <a:t>The Pastoral Guide</a:t>
             </a:r>
@@ -4442,7 +4442,7 @@
                 <a:solidFill>
                   <a:srgbClr val="8B9179"/>
                 </a:solidFill>
-                <a:latin typeface="Karla"/>
+                <a:latin typeface="Calibri"/>
               </a:rPr>
               <a:t>1 / 7</a:t>
             </a:r>
@@ -4546,7 +4546,7 @@
                 <a:solidFill>
                   <a:srgbClr val="4A7331"/>
                 </a:solidFill>
-                <a:latin typeface="Karla"/>
+                <a:latin typeface="Calibri"/>
               </a:rPr>
               <a:t>QUESTIONS TO ASK AT AN OPEN EVENING  ·  MONDAY</a:t>
             </a:r>
@@ -4584,11 +4584,11 @@
               </a:spcAft>
             </a:pPr>
             <a:r>
-              <a:rPr sz="3000" b="1" i="0">
+              <a:rPr sz="3000" b="0" i="0">
                 <a:solidFill>
                   <a:srgbClr val="2E3436"/>
                 </a:solidFill>
-                <a:latin typeface="Libre Caslon Display"/>
+                <a:latin typeface="Georgia"/>
               </a:rPr>
               <a:t>Rank them</a:t>
             </a:r>
@@ -4630,7 +4630,7 @@
                 <a:solidFill>
                   <a:srgbClr val="7BA060"/>
                 </a:solidFill>
-                <a:latin typeface="Karla"/>
+                <a:latin typeface="Calibri"/>
               </a:rPr>
               <a:t>The course, the day and the people.</a:t>
             </a:r>
@@ -4764,7 +4764,7 @@
                 <a:solidFill>
                   <a:srgbClr val="7BA060"/>
                 </a:solidFill>
-                <a:latin typeface="Karla"/>
+                <a:latin typeface="Calibri"/>
               </a:rPr>
               <a:t>?</a:t>
             </a:r>
@@ -4806,7 +4806,7 @@
                 <a:solidFill>
                   <a:srgbClr val="2E3436"/>
                 </a:solidFill>
-                <a:latin typeface="Karla"/>
+                <a:latin typeface="Calibri"/>
               </a:rPr>
               <a:t>How is it assessed: exams, coursework, or both?</a:t>
             </a:r>
@@ -4894,7 +4894,7 @@
                 <a:solidFill>
                   <a:srgbClr val="7BA060"/>
                 </a:solidFill>
-                <a:latin typeface="Karla"/>
+                <a:latin typeface="Calibri"/>
               </a:rPr>
               <a:t>?</a:t>
             </a:r>
@@ -4936,7 +4936,7 @@
                 <a:solidFill>
                   <a:srgbClr val="2E3436"/>
                 </a:solidFill>
-                <a:latin typeface="Karla"/>
+                <a:latin typeface="Calibri"/>
               </a:rPr>
               <a:t>What did last year’s students go on to do?</a:t>
             </a:r>
@@ -5024,7 +5024,7 @@
                 <a:solidFill>
                   <a:srgbClr val="7BA060"/>
                 </a:solidFill>
-                <a:latin typeface="Karla"/>
+                <a:latin typeface="Calibri"/>
               </a:rPr>
               <a:t>?</a:t>
             </a:r>
@@ -5066,7 +5066,7 @@
                 <a:solidFill>
                   <a:srgbClr val="2E3436"/>
                 </a:solidFill>
-                <a:latin typeface="Karla"/>
+                <a:latin typeface="Calibri"/>
               </a:rPr>
               <a:t>How many hours a week am I in lessons, and what happens in the gaps?</a:t>
             </a:r>
@@ -5154,7 +5154,7 @@
                 <a:solidFill>
                   <a:srgbClr val="7BA060"/>
                 </a:solidFill>
-                <a:latin typeface="Karla"/>
+                <a:latin typeface="Calibri"/>
               </a:rPr>
               <a:t>?</a:t>
             </a:r>
@@ -5196,7 +5196,7 @@
                 <a:solidFill>
                   <a:srgbClr val="2E3436"/>
                 </a:solidFill>
-                <a:latin typeface="Karla"/>
+                <a:latin typeface="Calibri"/>
               </a:rPr>
               <a:t>Who would I go to if I was struggling?</a:t>
             </a:r>
@@ -5284,7 +5284,7 @@
                 <a:solidFill>
                   <a:srgbClr val="7BA060"/>
                 </a:solidFill>
-                <a:latin typeface="Karla"/>
+                <a:latin typeface="Calibri"/>
               </a:rPr>
               <a:t>?</a:t>
             </a:r>
@@ -5326,7 +5326,7 @@
                 <a:solidFill>
                   <a:srgbClr val="2E3436"/>
                 </a:solidFill>
-                <a:latin typeface="Karla"/>
+                <a:latin typeface="Calibri"/>
               </a:rPr>
               <a:t>Do students who did not come from this school settle in?</a:t>
             </a:r>
@@ -5458,7 +5458,7 @@
                 <a:solidFill>
                   <a:srgbClr val="4A7331"/>
                 </a:solidFill>
-                <a:latin typeface="Karla"/>
+                <a:latin typeface="Calibri"/>
               </a:rPr>
               <a:t>1</a:t>
             </a:r>
@@ -5500,7 +5500,7 @@
                 <a:solidFill>
                   <a:srgbClr val="FFFDF7"/>
                 </a:solidFill>
-                <a:latin typeface="Karla"/>
+                <a:latin typeface="Calibri"/>
               </a:rPr>
               <a:t>Rank them on your sheet, 1 for must ask</a:t>
             </a:r>
@@ -5586,7 +5586,7 @@
                 <a:solidFill>
                   <a:srgbClr val="4A7331"/>
                 </a:solidFill>
-                <a:latin typeface="Karla"/>
+                <a:latin typeface="Calibri"/>
               </a:rPr>
               <a:t>2</a:t>
             </a:r>
@@ -5628,7 +5628,7 @@
                 <a:solidFill>
                   <a:srgbClr val="FFFDF7"/>
                 </a:solidFill>
-                <a:latin typeface="Karla"/>
+                <a:latin typeface="Calibri"/>
               </a:rPr>
               <a:t>Add one question of your own</a:t>
             </a:r>
@@ -5714,7 +5714,7 @@
                 <a:solidFill>
                   <a:srgbClr val="4A7331"/>
                 </a:solidFill>
-                <a:latin typeface="Karla"/>
+                <a:latin typeface="Calibri"/>
               </a:rPr>
               <a:t>3</a:t>
             </a:r>
@@ -5756,7 +5756,7 @@
                 <a:solidFill>
                   <a:srgbClr val="FFFDF7"/>
                 </a:solidFill>
-                <a:latin typeface="Karla"/>
+                <a:latin typeface="Calibri"/>
               </a:rPr>
               <a:t>Compare with the person next to you</a:t>
             </a:r>
@@ -5822,7 +5822,7 @@
                 <a:solidFill>
                   <a:srgbClr val="8B9179"/>
                 </a:solidFill>
-                <a:latin typeface="Karla"/>
+                <a:latin typeface="Calibri"/>
               </a:rPr>
               <a:t>The Pastoral Guide</a:t>
             </a:r>
@@ -5864,7 +5864,7 @@
                 <a:solidFill>
                   <a:srgbClr val="8B9179"/>
                 </a:solidFill>
-                <a:latin typeface="Karla"/>
+                <a:latin typeface="Calibri"/>
               </a:rPr>
               <a:t>2 / 7</a:t>
             </a:r>
@@ -5968,7 +5968,7 @@
                 <a:solidFill>
                   <a:srgbClr val="4A7331"/>
                 </a:solidFill>
-                <a:latin typeface="Karla"/>
+                <a:latin typeface="Calibri"/>
               </a:rPr>
               <a:t>QUESTIONS TO ASK AT AN OPEN EVENING  ·  TUESDAY</a:t>
             </a:r>
@@ -6006,11 +6006,11 @@
               </a:spcAft>
             </a:pPr>
             <a:r>
-              <a:rPr sz="3000" b="1" i="0">
+              <a:rPr sz="3000" b="0" i="0">
                 <a:solidFill>
                   <a:srgbClr val="2E3436"/>
                 </a:solidFill>
-                <a:latin typeface="Libre Caslon Display"/>
+                <a:latin typeface="Georgia"/>
               </a:rPr>
               <a:t>Rank them</a:t>
             </a:r>
@@ -6052,7 +6052,7 @@
                 <a:solidFill>
                   <a:srgbClr val="7BA060"/>
                 </a:solidFill>
-                <a:latin typeface="Karla"/>
+                <a:latin typeface="Calibri"/>
               </a:rPr>
               <a:t>Money, getting there, and if it goes wrong.</a:t>
             </a:r>
@@ -6186,7 +6186,7 @@
                 <a:solidFill>
                   <a:srgbClr val="7BA060"/>
                 </a:solidFill>
-                <a:latin typeface="Karla"/>
+                <a:latin typeface="Calibri"/>
               </a:rPr>
               <a:t>?</a:t>
             </a:r>
@@ -6228,7 +6228,7 @@
                 <a:solidFill>
                   <a:srgbClr val="2E3436"/>
                 </a:solidFill>
-                <a:latin typeface="Karla"/>
+                <a:latin typeface="Calibri"/>
               </a:rPr>
               <a:t>Is there any cost for trips, books or equipment?</a:t>
             </a:r>
@@ -6316,7 +6316,7 @@
                 <a:solidFill>
                   <a:srgbClr val="7BA060"/>
                 </a:solidFill>
-                <a:latin typeface="Karla"/>
+                <a:latin typeface="Calibri"/>
               </a:rPr>
               <a:t>?</a:t>
             </a:r>
@@ -6358,7 +6358,7 @@
                 <a:solidFill>
                   <a:srgbClr val="2E3436"/>
                 </a:solidFill>
-                <a:latin typeface="Karla"/>
+                <a:latin typeface="Calibri"/>
               </a:rPr>
               <a:t>Is there a bursary or any help with costs, and how do I apply?</a:t>
             </a:r>
@@ -6446,7 +6446,7 @@
                 <a:solidFill>
                   <a:srgbClr val="7BA060"/>
                 </a:solidFill>
-                <a:latin typeface="Karla"/>
+                <a:latin typeface="Calibri"/>
               </a:rPr>
               <a:t>?</a:t>
             </a:r>
@@ -6488,7 +6488,7 @@
                 <a:solidFill>
                   <a:srgbClr val="2E3436"/>
                 </a:solidFill>
-                <a:latin typeface="Karla"/>
+                <a:latin typeface="Calibri"/>
               </a:rPr>
               <a:t>How do most students get here in the morning?</a:t>
             </a:r>
@@ -6576,7 +6576,7 @@
                 <a:solidFill>
                   <a:srgbClr val="7BA060"/>
                 </a:solidFill>
-                <a:latin typeface="Karla"/>
+                <a:latin typeface="Calibri"/>
               </a:rPr>
               <a:t>?</a:t>
             </a:r>
@@ -6618,7 +6618,7 @@
                 <a:solidFill>
                   <a:srgbClr val="2E3436"/>
                 </a:solidFill>
-                <a:latin typeface="Karla"/>
+                <a:latin typeface="Calibri"/>
               </a:rPr>
               <a:t>Can I change courses, and until when?</a:t>
             </a:r>
@@ -6706,7 +6706,7 @@
                 <a:solidFill>
                   <a:srgbClr val="7BA060"/>
                 </a:solidFill>
-                <a:latin typeface="Karla"/>
+                <a:latin typeface="Calibri"/>
               </a:rPr>
               <a:t>?</a:t>
             </a:r>
@@ -6748,7 +6748,7 @@
                 <a:solidFill>
                   <a:srgbClr val="2E3436"/>
                 </a:solidFill>
-                <a:latin typeface="Karla"/>
+                <a:latin typeface="Calibri"/>
               </a:rPr>
               <a:t>What support is there if my grades are not what I hoped?</a:t>
             </a:r>
@@ -6880,7 +6880,7 @@
                 <a:solidFill>
                   <a:srgbClr val="4A7331"/>
                 </a:solidFill>
-                <a:latin typeface="Karla"/>
+                <a:latin typeface="Calibri"/>
               </a:rPr>
               <a:t>1</a:t>
             </a:r>
@@ -6922,7 +6922,7 @@
                 <a:solidFill>
                   <a:srgbClr val="FFFDF7"/>
                 </a:solidFill>
-                <a:latin typeface="Karla"/>
+                <a:latin typeface="Calibri"/>
               </a:rPr>
               <a:t>Rank them on your sheet, 1 for must ask</a:t>
             </a:r>
@@ -7008,7 +7008,7 @@
                 <a:solidFill>
                   <a:srgbClr val="4A7331"/>
                 </a:solidFill>
-                <a:latin typeface="Karla"/>
+                <a:latin typeface="Calibri"/>
               </a:rPr>
               <a:t>2</a:t>
             </a:r>
@@ -7050,7 +7050,7 @@
                 <a:solidFill>
                   <a:srgbClr val="FFFDF7"/>
                 </a:solidFill>
-                <a:latin typeface="Karla"/>
+                <a:latin typeface="Calibri"/>
               </a:rPr>
               <a:t>Add one question of your own</a:t>
             </a:r>
@@ -7136,7 +7136,7 @@
                 <a:solidFill>
                   <a:srgbClr val="4A7331"/>
                 </a:solidFill>
-                <a:latin typeface="Karla"/>
+                <a:latin typeface="Calibri"/>
               </a:rPr>
               <a:t>3</a:t>
             </a:r>
@@ -7178,7 +7178,7 @@
                 <a:solidFill>
                   <a:srgbClr val="FFFDF7"/>
                 </a:solidFill>
-                <a:latin typeface="Karla"/>
+                <a:latin typeface="Calibri"/>
               </a:rPr>
               <a:t>Copy your top five from the week onto the back</a:t>
             </a:r>
@@ -7244,7 +7244,7 @@
                 <a:solidFill>
                   <a:srgbClr val="8B9179"/>
                 </a:solidFill>
-                <a:latin typeface="Karla"/>
+                <a:latin typeface="Calibri"/>
               </a:rPr>
               <a:t>The Pastoral Guide</a:t>
             </a:r>
@@ -7286,7 +7286,7 @@
                 <a:solidFill>
                   <a:srgbClr val="8B9179"/>
                 </a:solidFill>
-                <a:latin typeface="Karla"/>
+                <a:latin typeface="Calibri"/>
               </a:rPr>
               <a:t>3 / 7</a:t>
             </a:r>
@@ -7390,7 +7390,7 @@
                 <a:solidFill>
                   <a:srgbClr val="4A7331"/>
                 </a:solidFill>
-                <a:latin typeface="Karla"/>
+                <a:latin typeface="Calibri"/>
               </a:rPr>
               <a:t>QUESTIONS TO ASK AT AN OPEN EVENING  ·  WEDNESDAY</a:t>
             </a:r>
@@ -7428,11 +7428,11 @@
               </a:spcAft>
             </a:pPr>
             <a:r>
-              <a:rPr sz="3000" b="1" i="0">
+              <a:rPr sz="3000" b="0" i="0">
                 <a:solidFill>
                   <a:srgbClr val="2E3436"/>
                 </a:solidFill>
-                <a:latin typeface="Libre Caslon Display"/>
+                <a:latin typeface="Georgia"/>
               </a:rPr>
               <a:t>Ask it for real</a:t>
             </a:r>
@@ -7474,7 +7474,7 @@
                 <a:solidFill>
                   <a:srgbClr val="7BA060"/>
                 </a:solidFill>
-                <a:latin typeface="Karla"/>
+                <a:latin typeface="Calibri"/>
               </a:rPr>
               <a:t>A vague answer is not an answer. Follow it up until you could write it down.</a:t>
             </a:r>
@@ -7562,7 +7562,7 @@
                 <a:solidFill>
                   <a:srgbClr val="7BA060"/>
                 </a:solidFill>
-                <a:latin typeface="Karla"/>
+                <a:latin typeface="Calibri"/>
               </a:rPr>
               <a:t>THEY SAY</a:t>
             </a:r>
@@ -7604,7 +7604,7 @@
                 <a:solidFill>
                   <a:srgbClr val="5C6552"/>
                 </a:solidFill>
-                <a:latin typeface="Karla"/>
+                <a:latin typeface="Calibri"/>
               </a:rPr>
               <a:t>“There’s loads of support here.”</a:t>
             </a:r>
@@ -7646,7 +7646,7 @@
                 <a:solidFill>
                   <a:srgbClr val="4A7331"/>
                 </a:solidFill>
-                <a:latin typeface="Karla"/>
+                <a:latin typeface="Calibri"/>
               </a:rPr>
               <a:t>YOU ASK</a:t>
             </a:r>
@@ -7688,7 +7688,7 @@
                 <a:solidFill>
                   <a:srgbClr val="2E3436"/>
                 </a:solidFill>
-                <a:latin typeface="Karla"/>
+                <a:latin typeface="Calibri"/>
               </a:rPr>
               <a:t>“Who exactly would I go to, and how?”</a:t>
             </a:r>
@@ -7730,7 +7730,7 @@
                 <a:solidFill>
                   <a:srgbClr val="7BA060"/>
                 </a:solidFill>
-                <a:latin typeface="Karla"/>
+                <a:latin typeface="Calibri"/>
               </a:rPr>
               <a:t>THEY SAY</a:t>
             </a:r>
@@ -7772,7 +7772,7 @@
                 <a:solidFill>
                   <a:srgbClr val="5C6552"/>
                 </a:solidFill>
-                <a:latin typeface="Karla"/>
+                <a:latin typeface="Calibri"/>
               </a:rPr>
               <a:t>“Your tutor first. You see them every week.”</a:t>
             </a:r>
@@ -7856,11 +7856,11 @@
               </a:spcAft>
             </a:pPr>
             <a:r>
-              <a:rPr sz="1350" b="1" i="0">
+              <a:rPr sz="1350" b="0" i="0">
                 <a:solidFill>
                   <a:srgbClr val="4A7331"/>
                 </a:solidFill>
-                <a:latin typeface="Libre Caslon Display"/>
+                <a:latin typeface="Georgia"/>
               </a:rPr>
               <a:t>Follow-ups that work</a:t>
             </a:r>
@@ -7946,7 +7946,7 @@
                 <a:solidFill>
                   <a:srgbClr val="2E3436"/>
                 </a:solidFill>
-                <a:latin typeface="Karla"/>
+                <a:latin typeface="Calibri"/>
               </a:rPr>
               <a:t>Who, exactly?</a:t>
             </a:r>
@@ -8032,7 +8032,7 @@
                 <a:solidFill>
                   <a:srgbClr val="2E3436"/>
                 </a:solidFill>
-                <a:latin typeface="Karla"/>
+                <a:latin typeface="Calibri"/>
               </a:rPr>
               <a:t>How much?</a:t>
             </a:r>
@@ -8118,7 +8118,7 @@
                 <a:solidFill>
                   <a:srgbClr val="2E3436"/>
                 </a:solidFill>
-                <a:latin typeface="Karla"/>
+                <a:latin typeface="Calibri"/>
               </a:rPr>
               <a:t>By when?</a:t>
             </a:r>
@@ -8204,7 +8204,7 @@
                 <a:solidFill>
                   <a:srgbClr val="2E3436"/>
                 </a:solidFill>
-                <a:latin typeface="Karla"/>
+                <a:latin typeface="Calibri"/>
               </a:rPr>
               <a:t>Can you give me an example?</a:t>
             </a:r>
@@ -8336,7 +8336,7 @@
                 <a:solidFill>
                   <a:srgbClr val="4A7331"/>
                 </a:solidFill>
-                <a:latin typeface="Karla"/>
+                <a:latin typeface="Calibri"/>
               </a:rPr>
               <a:t>1</a:t>
             </a:r>
@@ -8378,7 +8378,7 @@
                 <a:solidFill>
                   <a:srgbClr val="FFFDF7"/>
                 </a:solidFill>
-                <a:latin typeface="Karla"/>
+                <a:latin typeface="Calibri"/>
               </a:rPr>
               <a:t>In pairs, one reads a vague answer card</a:t>
             </a:r>
@@ -8464,7 +8464,7 @@
                 <a:solidFill>
                   <a:srgbClr val="4A7331"/>
                 </a:solidFill>
-                <a:latin typeface="Karla"/>
+                <a:latin typeface="Calibri"/>
               </a:rPr>
               <a:t>2</a:t>
             </a:r>
@@ -8506,7 +8506,7 @@
                 <a:solidFill>
                   <a:srgbClr val="FFFDF7"/>
                 </a:solidFill>
-                <a:latin typeface="Karla"/>
+                <a:latin typeface="Calibri"/>
               </a:rPr>
               <a:t>The other follows it up until it means something</a:t>
             </a:r>
@@ -8592,7 +8592,7 @@
                 <a:solidFill>
                   <a:srgbClr val="4A7331"/>
                 </a:solidFill>
-                <a:latin typeface="Karla"/>
+                <a:latin typeface="Calibri"/>
               </a:rPr>
               <a:t>3</a:t>
             </a:r>
@@ -8634,7 +8634,7 @@
                 <a:solidFill>
                   <a:srgbClr val="FFFDF7"/>
                 </a:solidFill>
-                <a:latin typeface="Karla"/>
+                <a:latin typeface="Calibri"/>
               </a:rPr>
               <a:t>Swap, and write your best follow-up on your sheet</a:t>
             </a:r>
@@ -8700,7 +8700,7 @@
                 <a:solidFill>
                   <a:srgbClr val="8B9179"/>
                 </a:solidFill>
-                <a:latin typeface="Karla"/>
+                <a:latin typeface="Calibri"/>
               </a:rPr>
               <a:t>The Pastoral Guide</a:t>
             </a:r>
@@ -8742,7 +8742,7 @@
                 <a:solidFill>
                   <a:srgbClr val="8B9179"/>
                 </a:solidFill>
-                <a:latin typeface="Karla"/>
+                <a:latin typeface="Calibri"/>
               </a:rPr>
               <a:t>4 / 7</a:t>
             </a:r>
@@ -8846,7 +8846,7 @@
                 <a:solidFill>
                   <a:srgbClr val="4A7331"/>
                 </a:solidFill>
-                <a:latin typeface="Karla"/>
+                <a:latin typeface="Calibri"/>
               </a:rPr>
               <a:t>QUESTIONS TO ASK AT AN OPEN EVENING  ·  THURSDAY</a:t>
             </a:r>
@@ -8884,11 +8884,11 @@
               </a:spcAft>
             </a:pPr>
             <a:r>
-              <a:rPr sz="3000" b="1" i="0">
+              <a:rPr sz="3000" b="0" i="0">
                 <a:solidFill>
                   <a:srgbClr val="2E3436"/>
                 </a:solidFill>
-                <a:latin typeface="Libre Caslon Display"/>
+                <a:latin typeface="Georgia"/>
               </a:rPr>
               <a:t>Set up the open evening</a:t>
             </a:r>
@@ -8930,7 +8930,7 @@
                 <a:solidFill>
                   <a:srgbClr val="7BA060"/>
                 </a:solidFill>
-                <a:latin typeface="Karla"/>
+                <a:latin typeface="Calibri"/>
               </a:rPr>
               <a:t>Four made-up places, and two people to run each one.</a:t>
             </a:r>
@@ -9082,11 +9082,11 @@
               </a:spcAft>
             </a:pPr>
             <a:r>
-              <a:rPr sz="1300" b="1" i="0">
+              <a:rPr sz="1300" b="0" i="0">
                 <a:solidFill>
                   <a:srgbClr val="4A7331"/>
                 </a:solidFill>
-                <a:latin typeface="Libre Caslon Display"/>
+                <a:latin typeface="Georgia"/>
               </a:rPr>
               <a:t>Fernbrook School</a:t>
             </a:r>
@@ -9128,7 +9128,7 @@
                 <a:solidFill>
                   <a:srgbClr val="5C6552"/>
                 </a:solidFill>
-                <a:latin typeface="Karla"/>
+                <a:latin typeface="Calibri"/>
               </a:rPr>
               <a:t>School sixth form</a:t>
             </a:r>
@@ -9280,11 +9280,11 @@
               </a:spcAft>
             </a:pPr>
             <a:r>
-              <a:rPr sz="1300" b="1" i="0">
+              <a:rPr sz="1300" b="0" i="0">
                 <a:solidFill>
                   <a:srgbClr val="4A7331"/>
                 </a:solidFill>
-                <a:latin typeface="Libre Caslon Display"/>
+                <a:latin typeface="Georgia"/>
               </a:rPr>
               <a:t>Kestrel Vale College</a:t>
             </a:r>
@@ -9326,7 +9326,7 @@
                 <a:solidFill>
                   <a:srgbClr val="5C6552"/>
                 </a:solidFill>
-                <a:latin typeface="Karla"/>
+                <a:latin typeface="Calibri"/>
               </a:rPr>
               <a:t>Further education college</a:t>
             </a:r>
@@ -9478,11 +9478,11 @@
               </a:spcAft>
             </a:pPr>
             <a:r>
-              <a:rPr sz="1300" b="1" i="0">
+              <a:rPr sz="1300" b="0" i="0">
                 <a:solidFill>
                   <a:srgbClr val="4A7331"/>
                 </a:solidFill>
-                <a:latin typeface="Libre Caslon Display"/>
+                <a:latin typeface="Georgia"/>
               </a:rPr>
               <a:t>Hillmarsh Sixth Form College</a:t>
             </a:r>
@@ -9524,7 +9524,7 @@
                 <a:solidFill>
                   <a:srgbClr val="5C6552"/>
                 </a:solidFill>
-                <a:latin typeface="Karla"/>
+                <a:latin typeface="Calibri"/>
               </a:rPr>
               <a:t>Sixth form college</a:t>
             </a:r>
@@ -9676,11 +9676,11 @@
               </a:spcAft>
             </a:pPr>
             <a:r>
-              <a:rPr sz="1300" b="1" i="0">
+              <a:rPr sz="1300" b="0" i="0">
                 <a:solidFill>
                   <a:srgbClr val="4A7331"/>
                 </a:solidFill>
-                <a:latin typeface="Libre Caslon Display"/>
+                <a:latin typeface="Georgia"/>
               </a:rPr>
               <a:t>Brackwell Engineering</a:t>
             </a:r>
@@ -9722,7 +9722,7 @@
                 <a:solidFill>
                   <a:srgbClr val="5C6552"/>
                 </a:solidFill>
-                <a:latin typeface="Karla"/>
+                <a:latin typeface="Calibri"/>
               </a:rPr>
               <a:t>Apprenticeship provider</a:t>
             </a:r>
@@ -9854,7 +9854,7 @@
                 <a:solidFill>
                   <a:srgbClr val="4A7331"/>
                 </a:solidFill>
-                <a:latin typeface="Karla"/>
+                <a:latin typeface="Calibri"/>
               </a:rPr>
               <a:t>1</a:t>
             </a:r>
@@ -9896,7 +9896,7 @@
                 <a:solidFill>
                   <a:srgbClr val="FFFDF7"/>
                 </a:solidFill>
-                <a:latin typeface="Karla"/>
+                <a:latin typeface="Calibri"/>
               </a:rPr>
               <a:t>Staff: read your stall card and the rule at the bottom</a:t>
             </a:r>
@@ -9982,7 +9982,7 @@
                 <a:solidFill>
                   <a:srgbClr val="4A7331"/>
                 </a:solidFill>
-                <a:latin typeface="Karla"/>
+                <a:latin typeface="Calibri"/>
               </a:rPr>
               <a:t>2</a:t>
             </a:r>
@@ -10024,7 +10024,7 @@
                 <a:solidFill>
                   <a:srgbClr val="FFFDF7"/>
                 </a:solidFill>
-                <a:latin typeface="Karla"/>
+                <a:latin typeface="Calibri"/>
               </a:rPr>
               <a:t>Visitors: star the three questions you will ask</a:t>
             </a:r>
@@ -10110,7 +10110,7 @@
                 <a:solidFill>
                   <a:srgbClr val="4A7331"/>
                 </a:solidFill>
-                <a:latin typeface="Karla"/>
+                <a:latin typeface="Calibri"/>
               </a:rPr>
               <a:t>3</a:t>
             </a:r>
@@ -10152,7 +10152,7 @@
                 <a:solidFill>
                   <a:srgbClr val="FFFDF7"/>
                 </a:solidFill>
-                <a:latin typeface="Karla"/>
+                <a:latin typeface="Calibri"/>
               </a:rPr>
               <a:t>Tomorrow the desks become stalls</a:t>
             </a:r>
@@ -10218,7 +10218,7 @@
                 <a:solidFill>
                   <a:srgbClr val="8B9179"/>
                 </a:solidFill>
-                <a:latin typeface="Karla"/>
+                <a:latin typeface="Calibri"/>
               </a:rPr>
               <a:t>The Pastoral Guide</a:t>
             </a:r>
@@ -10260,7 +10260,7 @@
                 <a:solidFill>
                   <a:srgbClr val="8B9179"/>
                 </a:solidFill>
-                <a:latin typeface="Karla"/>
+                <a:latin typeface="Calibri"/>
               </a:rPr>
               <a:t>5 / 7</a:t>
             </a:r>
@@ -10364,7 +10364,7 @@
                 <a:solidFill>
                   <a:srgbClr val="4A7331"/>
                 </a:solidFill>
-                <a:latin typeface="Karla"/>
+                <a:latin typeface="Calibri"/>
               </a:rPr>
               <a:t>QUESTIONS TO ASK AT AN OPEN EVENING  ·  FRIDAY</a:t>
             </a:r>
@@ -10402,11 +10402,11 @@
               </a:spcAft>
             </a:pPr>
             <a:r>
-              <a:rPr sz="3000" b="1" i="0">
+              <a:rPr sz="3000" b="0" i="0">
                 <a:solidFill>
                   <a:srgbClr val="2E3436"/>
                 </a:solidFill>
-                <a:latin typeface="Libre Caslon Display"/>
+                <a:latin typeface="Georgia"/>
               </a:rPr>
               <a:t>The open evening</a:t>
             </a:r>
@@ -10536,7 +10536,7 @@
                 <a:solidFill>
                   <a:srgbClr val="FFFDF7"/>
                 </a:solidFill>
-                <a:latin typeface="Karla"/>
+                <a:latin typeface="Calibri"/>
               </a:rPr>
               <a:t>1</a:t>
             </a:r>
@@ -10574,11 +10574,11 @@
               </a:spcAft>
             </a:pPr>
             <a:r>
-              <a:rPr sz="1300" b="1" i="0">
+              <a:rPr sz="1300" b="0" i="0">
                 <a:solidFill>
                   <a:srgbClr val="4A7331"/>
                 </a:solidFill>
-                <a:latin typeface="Libre Caslon Display"/>
+                <a:latin typeface="Georgia"/>
               </a:rPr>
               <a:t>Staff to your stalls</a:t>
             </a:r>
@@ -10620,7 +10620,7 @@
                 <a:solidFill>
                   <a:srgbClr val="5C6552"/>
                 </a:solidFill>
-                <a:latin typeface="Karla"/>
+                <a:latin typeface="Calibri"/>
               </a:rPr>
               <a:t>Two at each desk, with your card. Answer from the card, and give one vague answer on purpose.</a:t>
             </a:r>
@@ -10750,7 +10750,7 @@
                 <a:solidFill>
                   <a:srgbClr val="FFFDF7"/>
                 </a:solidFill>
-                <a:latin typeface="Karla"/>
+                <a:latin typeface="Calibri"/>
               </a:rPr>
               <a:t>2</a:t>
             </a:r>
@@ -10788,11 +10788,11 @@
               </a:spcAft>
             </a:pPr>
             <a:r>
-              <a:rPr sz="1300" b="1" i="0">
+              <a:rPr sz="1300" b="0" i="0">
                 <a:solidFill>
                   <a:srgbClr val="4A7331"/>
                 </a:solidFill>
-                <a:latin typeface="Libre Caslon Display"/>
+                <a:latin typeface="Georgia"/>
               </a:rPr>
               <a:t>Visitors, go and ask</a:t>
             </a:r>
@@ -10834,7 +10834,7 @@
                 <a:solidFill>
                   <a:srgbClr val="5C6552"/>
                 </a:solidFill>
-                <a:latin typeface="Karla"/>
+                <a:latin typeface="Calibri"/>
               </a:rPr>
               <a:t>Take your sheet to a stall and ask your three starred questions.</a:t>
             </a:r>
@@ -10964,7 +10964,7 @@
                 <a:solidFill>
                   <a:srgbClr val="FFFDF7"/>
                 </a:solidFill>
-                <a:latin typeface="Karla"/>
+                <a:latin typeface="Calibri"/>
               </a:rPr>
               <a:t>3</a:t>
             </a:r>
@@ -11002,11 +11002,11 @@
               </a:spcAft>
             </a:pPr>
             <a:r>
-              <a:rPr sz="1300" b="1" i="0">
+              <a:rPr sz="1300" b="0" i="0">
                 <a:solidFill>
                   <a:srgbClr val="4A7331"/>
                 </a:solidFill>
-                <a:latin typeface="Libre Caslon Display"/>
+                <a:latin typeface="Georgia"/>
               </a:rPr>
               <a:t>Push for a real answer</a:t>
             </a:r>
@@ -11048,7 +11048,7 @@
                 <a:solidFill>
                   <a:srgbClr val="5C6552"/>
                 </a:solidFill>
-                <a:latin typeface="Karla"/>
+                <a:latin typeface="Calibri"/>
               </a:rPr>
               <a:t>If an answer is vague, follow it up. Write down what you find out.</a:t>
             </a:r>
@@ -11178,7 +11178,7 @@
                 <a:solidFill>
                   <a:srgbClr val="FFFDF7"/>
                 </a:solidFill>
-                <a:latin typeface="Karla"/>
+                <a:latin typeface="Calibri"/>
               </a:rPr>
               <a:t>4</a:t>
             </a:r>
@@ -11216,11 +11216,11 @@
               </a:spcAft>
             </a:pPr>
             <a:r>
-              <a:rPr sz="1300" b="1" i="0">
+              <a:rPr sz="1300" b="0" i="0">
                 <a:solidFill>
                   <a:srgbClr val="4A7331"/>
                 </a:solidFill>
-                <a:latin typeface="Libre Caslon Display"/>
+                <a:latin typeface="Georgia"/>
               </a:rPr>
               <a:t>Swap</a:t>
             </a:r>
@@ -11262,7 +11262,7 @@
                 <a:solidFill>
                   <a:srgbClr val="5C6552"/>
                 </a:solidFill>
-                <a:latin typeface="Karla"/>
+                <a:latin typeface="Calibri"/>
               </a:rPr>
               <a:t>Staff become visitors, now or next time, so everybody gets to ask.</a:t>
             </a:r>
@@ -11328,7 +11328,7 @@
                 <a:solidFill>
                   <a:srgbClr val="8B9179"/>
                 </a:solidFill>
-                <a:latin typeface="Karla"/>
+                <a:latin typeface="Calibri"/>
               </a:rPr>
               <a:t>The Pastoral Guide</a:t>
             </a:r>
@@ -11370,7 +11370,7 @@
                 <a:solidFill>
                   <a:srgbClr val="8B9179"/>
                 </a:solidFill>
-                <a:latin typeface="Karla"/>
+                <a:latin typeface="Calibri"/>
               </a:rPr>
               <a:t>6 / 7</a:t>
             </a:r>
@@ -11474,7 +11474,7 @@
                 <a:solidFill>
                   <a:srgbClr val="4A7331"/>
                 </a:solidFill>
-                <a:latin typeface="Karla"/>
+                <a:latin typeface="Calibri"/>
               </a:rPr>
               <a:t>QUESTIONS TO ASK AT AN OPEN EVENING  ·  THE WEEK AFTER</a:t>
             </a:r>
@@ -11536,11 +11536,11 @@
               </a:spcAft>
             </a:pPr>
             <a:r>
-              <a:rPr sz="3200" b="1" i="0">
+              <a:rPr sz="3200" b="0" i="0">
                 <a:solidFill>
                   <a:srgbClr val="4A7331"/>
                 </a:solidFill>
-                <a:latin typeface="Libre Caslon Display"/>
+                <a:latin typeface="Georgia"/>
               </a:rPr>
               <a:t>What did you find out?</a:t>
             </a:r>
@@ -11582,7 +11582,7 @@
                 <a:solidFill>
                   <a:srgbClr val="5C6552"/>
                 </a:solidFill>
-                <a:latin typeface="Karla"/>
+                <a:latin typeface="Calibri"/>
               </a:rPr>
               <a:t>Bring your sheet back. Which question got the most useful answer, and which one did nobody answer properly?</a:t>
             </a:r>
@@ -11624,7 +11624,7 @@
                 <a:solidFill>
                   <a:srgbClr val="8B9179"/>
                 </a:solidFill>
-                <a:latin typeface="Karla"/>
+                <a:latin typeface="Calibri"/>
               </a:rPr>
               <a:t>An unanswered question is worth asking somewhere else.</a:t>
             </a:r>
@@ -11690,7 +11690,7 @@
                 <a:solidFill>
                   <a:srgbClr val="8B9179"/>
                 </a:solidFill>
-                <a:latin typeface="Karla"/>
+                <a:latin typeface="Calibri"/>
               </a:rPr>
               <a:t>The Pastoral Guide</a:t>
             </a:r>
@@ -11732,7 +11732,7 @@
                 <a:solidFill>
                   <a:srgbClr val="8B9179"/>
                 </a:solidFill>
-                <a:latin typeface="Karla"/>
+                <a:latin typeface="Calibri"/>
               </a:rPr>
               <a:t>7 / 7</a:t>
             </a:r>
